--- a/public/HPWD-GPT.pptx
+++ b/public/HPWD-GPT.pptx
@@ -4878,7 +4878,7 @@
                 </a:solidFill>
                 <a:latin typeface="Pretendard"/>
               </a:rPr>
-              <a:t>• Synthetic 증강 — Claude로 보충 데이터 생성</a:t>
+              <a:t>• Synthetic 증강 — 외부 LLM으로 보충 데이터 생성</a:t>
             </a:r>
           </a:p>
         </p:txBody>
@@ -13971,7 +13971,7 @@
                 </a:solidFill>
                 <a:latin typeface="Pretendard"/>
               </a:rPr>
-              <a:t>방식 — Claude/GPT API 활용 · 자체 AI 미개발</a:t>
+              <a:t>방식 — 외부 LLM API 활용 · 자체 AI 미개발</a:t>
             </a:r>
           </a:p>
           <a:p>
@@ -14155,7 +14155,7 @@
                 </a:solidFill>
                 <a:latin typeface="Pretendard"/>
               </a:rPr>
-              <a:t>• ⓐ 외부 LLM API — AI 두뇌 (Claude API)</a:t>
+              <a:t>• ⓐ 외부 LLM API — AI 두뇌 (외부 LLM API)</a:t>
             </a:r>
           </a:p>
           <a:p>
@@ -19521,7 +19521,7 @@
                 </a:solidFill>
                 <a:latin typeface="Pretendard"/>
               </a:rPr>
-              <a:t>• Claude API (~수백 GB) — ③ 답변 생성 · 외부 (마스킹)</a:t>
+              <a:t>• 외부 LLM API (~수백 GB) — ③ 답변 생성 · 외부 (마스킹)</a:t>
             </a:r>
           </a:p>
           <a:p>
@@ -19537,7 +19537,7 @@
                 </a:solidFill>
                 <a:latin typeface="Pretendard"/>
               </a:rPr>
-              <a:t>• 자체 sLLM (~수십 GB) — Phase 2 Claude 대체 · 사내 호스팅</a:t>
+              <a:t>• 자체 sLLM (~수십 GB) — Phase 2 외부 LLM 대체 · 사내 호스팅</a:t>
             </a:r>
           </a:p>
         </p:txBody>
@@ -19680,7 +19680,7 @@
                 </a:solidFill>
                 <a:latin typeface="Pretendard"/>
               </a:rPr>
-              <a:t>③ Claude API + Tool-use · AI 답변</a:t>
+              <a:t>③ 외부 LLM API + Tool-use · AI 답변</a:t>
             </a:r>
           </a:p>
         </p:txBody>
@@ -19926,7 +19926,7 @@
                 </a:solidFill>
                 <a:latin typeface="Pretendard"/>
               </a:rPr>
-              <a:t>단순 텍스트 생성 ≠ Claude</a:t>
+              <a:t>단순 텍스트 생성 ≠ 외부 LLM</a:t>
             </a:r>
           </a:p>
           <a:p>
@@ -19988,7 +19988,7 @@
         <p:spPr>
           <a:xfrm>
             <a:off x="576072" y="3648456"/>
-            <a:ext cx="5240883" cy="694944"/>
+            <a:ext cx="5240883" cy="502920"/>
           </a:xfrm>
           <a:prstGeom prst="roundRect">
             <a:avLst>
@@ -20050,7 +20050,7 @@
                 </a:solidFill>
                 <a:latin typeface="Pretendard"/>
               </a:rPr>
-              <a:t>AI 외부 함수 호출 능력. Claude 판단 → 도구 호출 → 결과 수신 → 답변 반영.</a:t>
+              <a:t>AI 외부 함수 호출 능력. LLM 판단 → 도구 호출 → 결과 수신 → 답변 반영.</a:t>
             </a:r>
           </a:p>
         </p:txBody>

--- a/public/HPWD-GPT.pptx
+++ b/public/HPWD-GPT.pptx
@@ -3591,7 +3591,7 @@
                 </a:solidFill>
                 <a:latin typeface="Consolas"/>
               </a:rPr>
-              <a:t>한 줄 비유</a:t>
+              <a:t>한 줄 정리</a:t>
             </a:r>
           </a:p>
         </p:txBody>
@@ -3630,7 +3630,7 @@
                 </a:solidFill>
                 <a:latin typeface="Pretendard"/>
               </a:rPr>
-              <a:t>청중 적응형 디자이너</a:t>
+              <a:t>사용자별 맞춤 답변 표시</a:t>
             </a:r>
           </a:p>
         </p:txBody>
@@ -4476,7 +4476,7 @@
                 </a:solidFill>
                 <a:latin typeface="Consolas"/>
               </a:rPr>
-              <a:t>한 줄 비유</a:t>
+              <a:t>한 줄 정리</a:t>
             </a:r>
           </a:p>
         </p:txBody>
@@ -4515,7 +4515,7 @@
                 </a:solidFill>
                 <a:latin typeface="Pretendard"/>
               </a:rPr>
-              <a:t>미래 AI 양식 창고</a:t>
+              <a:t>자체 sLLM 학습 데이터 축적</a:t>
             </a:r>
           </a:p>
         </p:txBody>
@@ -5292,7 +5292,7 @@
                 </a:solidFill>
                 <a:latin typeface="Pretendard"/>
               </a:rPr>
-              <a:t>AI · 시뮬 공용 사내 데이터 창고</a:t>
+              <a:t>AI · 시뮬 공용 사내 데이터 통합 저장소</a:t>
             </a:r>
           </a:p>
         </p:txBody>
@@ -5979,7 +5979,7 @@
                 </a:solidFill>
                 <a:latin typeface="Pretendard"/>
               </a:rPr>
-              <a:t>ⓐ ↔ ⓑ 짝꿍 트랙 — 한 쪽 부재 시 시스템 정지</a:t>
+              <a:t>ⓐ ↔ ⓑ 상호 의존 — 한 쪽 부재 시 시스템 정지</a:t>
             </a:r>
           </a:p>
         </p:txBody>
@@ -6161,7 +6161,7 @@
                 </a:solidFill>
                 <a:latin typeface="Pretendard"/>
               </a:rPr>
-              <a:t>창고 짓기 전 평면도 — 저장 구조 청사진</a:t>
+              <a:t>데이터 저장 구조 사전 설계 — 청사진</a:t>
             </a:r>
           </a:p>
         </p:txBody>
@@ -6290,7 +6290,7 @@
                 </a:solidFill>
                 <a:latin typeface="Consolas"/>
               </a:rPr>
-              <a:t>한 줄 비유</a:t>
+              <a:t>한 줄 정리</a:t>
             </a:r>
           </a:p>
         </p:txBody>
@@ -6329,7 +6329,7 @@
                 </a:solidFill>
                 <a:latin typeface="Pretendard"/>
               </a:rPr>
-              <a:t>창고 짓기 전 평면도</a:t>
+              <a:t>데이터 수집 전 사전 설계</a:t>
             </a:r>
           </a:p>
         </p:txBody>
@@ -14155,7 +14155,7 @@
                 </a:solidFill>
                 <a:latin typeface="Pretendard"/>
               </a:rPr>
-              <a:t>• ⓐ 외부 LLM API — AI 두뇌 (외부 LLM API)</a:t>
+              <a:t>• ⓐ 외부 LLM API — AI 답변 엔진 (외부 LLM API)</a:t>
             </a:r>
           </a:p>
           <a:p>
@@ -14171,7 +14171,7 @@
                 </a:solidFill>
                 <a:latin typeface="Pretendard"/>
               </a:rPr>
-              <a:t>• ⓑ 검증 DB — 사내 데이터 창고</a:t>
+              <a:t>• ⓑ 검증 DB — 사내 데이터 통합 저장소</a:t>
             </a:r>
           </a:p>
           <a:p>
@@ -14633,7 +14633,7 @@
                 </a:solidFill>
                 <a:latin typeface="Pretendard"/>
               </a:rPr>
-              <a:t>9개월 · 4단계 · AI 두뇌</a:t>
+              <a:t>9개월 · 4단계 · AI 답변 엔진</a:t>
             </a:r>
           </a:p>
         </p:txBody>
@@ -14801,7 +14801,7 @@
                 </a:solidFill>
                 <a:latin typeface="Pretendard"/>
               </a:rPr>
-              <a:t>시스템의 얼굴 — 사용자 직접 접점</a:t>
+              <a:t>사용자 직접 접점 컴포넌트</a:t>
             </a:r>
           </a:p>
         </p:txBody>
@@ -15622,7 +15622,7 @@
                 </a:solidFill>
                 <a:latin typeface="Pretendard"/>
               </a:rPr>
-              <a:t>4박자 파이프라인 + 보조 1</a:t>
+              <a:t>4단계 파이프라인 + 보조 1</a:t>
             </a:r>
           </a:p>
         </p:txBody>
@@ -15661,7 +15661,7 @@
                 </a:solidFill>
                 <a:latin typeface="Pretendard"/>
               </a:rPr>
-              <a:t>실행 — 4박자 순차</a:t>
+              <a:t>실행 — 4단계 순차</a:t>
             </a:r>
           </a:p>
           <a:p>
@@ -16825,7 +16825,7 @@
                 </a:solidFill>
                 <a:latin typeface="Consolas"/>
               </a:rPr>
-              <a:t>한 줄 비유</a:t>
+              <a:t>한 줄 정리</a:t>
             </a:r>
           </a:p>
         </p:txBody>
@@ -16864,7 +16864,7 @@
                 </a:solidFill>
                 <a:latin typeface="Pretendard"/>
               </a:rPr>
-              <a:t>모호한 질문 정리 비서</a:t>
+              <a:t>모호한 질문의 정형화</a:t>
             </a:r>
           </a:p>
         </p:txBody>
@@ -17770,7 +17770,7 @@
                 </a:solidFill>
                 <a:latin typeface="Consolas"/>
               </a:rPr>
-              <a:t>한 줄 비유</a:t>
+              <a:t>한 줄 정리</a:t>
             </a:r>
           </a:p>
         </p:txBody>
@@ -17809,7 +17809,7 @@
                 </a:solidFill>
                 <a:latin typeface="Pretendard"/>
               </a:rPr>
-              <a:t>의미를 이해하는 도서관 사서</a:t>
+              <a:t>의미 기반 사내 자료 검색</a:t>
             </a:r>
           </a:p>
         </p:txBody>
@@ -19719,7 +19719,7 @@
                 </a:solidFill>
                 <a:latin typeface="Pretendard"/>
               </a:rPr>
-              <a:t>도구 호출형 AI 엔지니어</a:t>
+              <a:t>외부 도구 호출형 AI 모델</a:t>
             </a:r>
           </a:p>
         </p:txBody>
@@ -19848,7 +19848,7 @@
                 </a:solidFill>
                 <a:latin typeface="Consolas"/>
               </a:rPr>
-              <a:t>한 줄 비유</a:t>
+              <a:t>한 줄 정리</a:t>
             </a:r>
           </a:p>
         </p:txBody>
@@ -19887,7 +19887,7 @@
                 </a:solidFill>
                 <a:latin typeface="Pretendard"/>
               </a:rPr>
-              <a:t>도구를 쓰는 AI 엔지니어</a:t>
+              <a:t>외부 도구 호출형 AI</a:t>
             </a:r>
           </a:p>
         </p:txBody>
@@ -20498,7 +20498,7 @@
                 </a:solidFill>
                 <a:latin typeface="Pretendard"/>
               </a:rPr>
-              <a:t>Tool-use = "말하는 비서" → "행동하는 엔지니어"</a:t>
+              <a:t>Tool-use = 텍스트 생성 + 외부 도구 직접 실행</a:t>
             </a:r>
           </a:p>
         </p:txBody>

--- a/public/HPWD-GPT.pptx
+++ b/public/HPWD-GPT.pptx
@@ -22,7 +22,6 @@
     <p:sldId id="270" r:id="rId21"/>
     <p:sldId id="271" r:id="rId22"/>
     <p:sldId id="272" r:id="rId23"/>
-    <p:sldId id="273" r:id="rId24"/>
   </p:sldIdLst>
   <p:sldSz cx="12191695" cy="6858000" type="screen4x3"/>
   <p:notesSz cx="6858000" cy="9144000"/>
@@ -3319,7 +3318,7 @@
                 </a:solidFill>
                 <a:latin typeface="Consolas"/>
               </a:rPr>
-              <a:t>01 / 18</a:t>
+              <a:t>01 / 17</a:t>
             </a:r>
           </a:p>
         </p:txBody>
@@ -3384,7 +3383,7 @@
                 </a:solidFill>
                 <a:latin typeface="Consolas"/>
               </a:rPr>
-              <a:t>D-4. 서브트랙 ④</a:t>
+              <a:t>D-5. 서브트랙 ⑤</a:t>
             </a:r>
           </a:p>
         </p:txBody>
@@ -3423,7 +3422,7 @@
                 </a:solidFill>
                 <a:latin typeface="Pretendard"/>
               </a:rPr>
-              <a:t>④ Explainer · 답변 표시</a:t>
+              <a:t>⑤ 로그 수집 + 데이터 라벨링</a:t>
             </a:r>
           </a:p>
         </p:txBody>
@@ -3462,7 +3461,7 @@
                 </a:solidFill>
                 <a:latin typeface="Pretendard"/>
               </a:rPr>
-              <a:t>JSON → 카드 · 그래프 · 다이어그램</a:t>
+              <a:t>Phase 2 학습 데이터 수확기</a:t>
             </a:r>
           </a:p>
         </p:txBody>
@@ -3630,7 +3629,7 @@
                 </a:solidFill>
                 <a:latin typeface="Pretendard"/>
               </a:rPr>
-              <a:t>사용자별 맞춤 답변 표시</a:t>
+              <a:t>자체 sLLM 학습 데이터 축적</a:t>
             </a:r>
           </a:p>
         </p:txBody>
@@ -3644,7 +3643,7 @@
         <p:spPr>
           <a:xfrm>
             <a:off x="576072" y="2660904"/>
-            <a:ext cx="5240883" cy="914400"/>
+            <a:ext cx="5240883" cy="457200"/>
           </a:xfrm>
           <a:prstGeom prst="rect">
             <a:avLst/>
@@ -3669,7 +3668,7 @@
                 </a:solidFill>
                 <a:latin typeface="Pretendard"/>
               </a:rPr>
-              <a:t>동일 데이터 · 다른 표현</a:t>
+              <a:t>9개월 동안 — 대화 · 검색 · 답변 · 피드백 전수 저장</a:t>
             </a:r>
           </a:p>
           <a:p>
@@ -3685,39 +3684,7 @@
                 </a:solidFill>
                 <a:latin typeface="Pretendard"/>
               </a:rPr>
-              <a:t/>
-            </a:r>
-          </a:p>
-          <a:p>
-            <a:pPr algn="l">
-              <a:lnSpc>
-                <a:spcPct val="135000"/>
-              </a:lnSpc>
-            </a:pPr>
-            <a:r>
-              <a:rPr sz="1000" b="0" i="0">
-                <a:solidFill>
-                  <a:srgbClr val="475569"/>
-                </a:solidFill>
-                <a:latin typeface="Pretendard"/>
-              </a:rPr>
-              <a:t>전문가 — "FMC 0.62 kg/kWh · UAcond 145 W/K"</a:t>
-            </a:r>
-          </a:p>
-          <a:p>
-            <a:pPr algn="l">
-              <a:lnSpc>
-                <a:spcPct val="135000"/>
-              </a:lnSpc>
-            </a:pPr>
-            <a:r>
-              <a:rPr sz="1000" b="0" i="0">
-                <a:solidFill>
-                  <a:srgbClr val="475569"/>
-                </a:solidFill>
-                <a:latin typeface="Pretendard"/>
-              </a:rPr>
-              <a:t>비전문가 — "건조 효율 12%↓ · 라디에이터 부족"</a:t>
+              <a:t>→ Phase 2 자체 sLLM 학습 데이터셋</a:t>
             </a:r>
           </a:p>
         </p:txBody>
@@ -3725,6 +3692,82 @@
       <p:sp>
         <p:nvSpPr>
           <p:cNvPr id="10" name="Rounded Rectangle 9"/>
+          <p:cNvSpPr/>
+          <p:nvPr/>
+        </p:nvSpPr>
+        <p:spPr>
+          <a:xfrm>
+            <a:off x="576072" y="3191256"/>
+            <a:ext cx="5240883" cy="694944"/>
+          </a:xfrm>
+          <a:prstGeom prst="roundRect">
+            <a:avLst>
+              <a:gd name="adj" fmla="val 8000"/>
+            </a:avLst>
+          </a:prstGeom>
+          <a:solidFill>
+            <a:srgbClr val="F8FAFC"/>
+          </a:solidFill>
+          <a:ln w="6350">
+            <a:solidFill>
+              <a:srgbClr val="CBD5E1"/>
+            </a:solidFill>
+          </a:ln>
+        </p:spPr>
+        <p:style>
+          <a:lnRef idx="1">
+            <a:schemeClr val="accent1"/>
+          </a:lnRef>
+          <a:fillRef idx="3">
+            <a:schemeClr val="accent1"/>
+          </a:fillRef>
+          <a:effectRef idx="2">
+            <a:schemeClr val="accent1"/>
+          </a:effectRef>
+          <a:fontRef idx="minor">
+            <a:schemeClr val="lt1"/>
+          </a:fontRef>
+        </p:style>
+        <p:txBody>
+          <a:bodyPr rtlCol="0" anchor="t" lIns="109728" rIns="109728" tIns="73152" bIns="73152" wrap="square"/>
+          <a:lstStyle/>
+          <a:p>
+            <a:pPr algn="l">
+              <a:lnSpc>
+                <a:spcPct val="120000"/>
+              </a:lnSpc>
+            </a:pPr>
+            <a:r>
+              <a:rPr sz="850" b="1">
+                <a:solidFill>
+                  <a:srgbClr val="2563EB"/>
+                </a:solidFill>
+                <a:latin typeface="Consolas"/>
+              </a:rPr>
+              <a:t>데이터 라벨링</a:t>
+            </a:r>
+          </a:p>
+          <a:p>
+            <a:pPr algn="l">
+              <a:lnSpc>
+                <a:spcPct val="130000"/>
+              </a:lnSpc>
+            </a:pPr>
+            <a:r>
+              <a:rPr sz="900">
+                <a:solidFill>
+                  <a:srgbClr val="475569"/>
+                </a:solidFill>
+                <a:latin typeface="Pretendard"/>
+              </a:rPr>
+              <a:t>전문가 검토 후 "정답" 라벨 부착 데이터. AI 학습 핵심 재료. 양보다 품질 우선 → 전문가 리뷰 필수.</a:t>
+            </a:r>
+          </a:p>
+        </p:txBody>
+      </p:sp>
+      <p:sp>
+        <p:nvSpPr>
+          <p:cNvPr id="11" name="Rounded Rectangle 10"/>
           <p:cNvSpPr/>
           <p:nvPr/>
         </p:nvSpPr>
@@ -3771,7 +3814,7 @@
       </p:sp>
       <p:sp>
         <p:nvSpPr>
-          <p:cNvPr id="11" name="Rectangle 10"/>
+          <p:cNvPr id="12" name="Rectangle 11"/>
           <p:cNvSpPr/>
           <p:nvPr/>
         </p:nvSpPr>
@@ -3814,7 +3857,7 @@
       </p:sp>
       <p:sp>
         <p:nvSpPr>
-          <p:cNvPr id="12" name="TextBox 11"/>
+          <p:cNvPr id="13" name="TextBox 12"/>
           <p:cNvSpPr txBox="1"/>
           <p:nvPr/>
         </p:nvSpPr>
@@ -3846,14 +3889,14 @@
                 </a:solidFill>
                 <a:latin typeface="Consolas"/>
               </a:rPr>
-              <a:t>구성 요소 (M3~M8.5)</a:t>
-            </a:r>
-          </a:p>
-        </p:txBody>
-      </p:sp>
-      <p:sp>
-        <p:nvSpPr>
-          <p:cNvPr id="13" name="TextBox 12"/>
+              <a:t>구성 요소 (M3~M9)</a:t>
+            </a:r>
+          </a:p>
+        </p:txBody>
+      </p:sp>
+      <p:sp>
+        <p:nvSpPr>
+          <p:cNvPr id="14" name="TextBox 13"/>
           <p:cNvSpPr txBox="1"/>
           <p:nvPr/>
         </p:nvSpPr>
@@ -3885,7 +3928,7 @@
                 </a:solidFill>
                 <a:latin typeface="Pretendard"/>
               </a:rPr>
-              <a:t>• JSON → UI 매핑 — 카테고리별 카드 컴포넌트</a:t>
+              <a:t>• 구조화 로그 파이프 — JSON 형식 대화 저장</a:t>
             </a:r>
           </a:p>
           <a:p>
@@ -3901,7 +3944,7 @@
                 </a:solidFill>
                 <a:latin typeface="Pretendard"/>
               </a:rPr>
-              <a:t>• 전문가 / 비전문가 모드 — 답변 톤 분기</a:t>
+              <a:t>• 피드백 UI — 👍/👎 + 자유 코멘트</a:t>
             </a:r>
           </a:p>
           <a:p>
@@ -3917,7 +3960,7 @@
                 </a:solidFill>
                 <a:latin typeface="Pretendard"/>
               </a:rPr>
-              <a:t>• 근거 인용 — 클릭 → 원문 스크롤</a:t>
+              <a:t>• 품질 필터 · 익명화 — 노이즈 제거 · 민감정보 마스킹</a:t>
             </a:r>
           </a:p>
           <a:p>
@@ -3933,7 +3976,7 @@
                 </a:solidFill>
                 <a:latin typeface="Pretendard"/>
               </a:rPr>
-              <a:t>• 1D 시각화 — 시뮬 결과 그래프 · 차트</a:t>
+              <a:t>• 전문가 리뷰 · 라벨링 — 정답 라벨 부착</a:t>
             </a:r>
           </a:p>
           <a:p>
@@ -3949,14 +3992,14 @@
                 </a:solidFill>
                 <a:latin typeface="Pretendard"/>
               </a:rPr>
-              <a:t>• 음성 · 그래프 · PDF — 출력 다양화</a:t>
-            </a:r>
-          </a:p>
-        </p:txBody>
-      </p:sp>
-      <p:sp>
-        <p:nvSpPr>
-          <p:cNvPr id="14" name="Rounded Rectangle 13"/>
+              <a:t>• Synthetic 증강 — 외부 LLM으로 보충 데이터 생성</a:t>
+            </a:r>
+          </a:p>
+        </p:txBody>
+      </p:sp>
+      <p:sp>
+        <p:nvSpPr>
+          <p:cNvPr id="15" name="Rounded Rectangle 14"/>
           <p:cNvSpPr/>
           <p:nvPr/>
         </p:nvSpPr>
@@ -4003,7 +4046,7 @@
       </p:sp>
       <p:sp>
         <p:nvSpPr>
-          <p:cNvPr id="15" name="Rectangle 14"/>
+          <p:cNvPr id="16" name="Rectangle 15"/>
           <p:cNvSpPr/>
           <p:nvPr/>
         </p:nvSpPr>
@@ -4016,7 +4059,7 @@
             <a:avLst/>
           </a:prstGeom>
           <a:solidFill>
-            <a:srgbClr val="DC2626"/>
+            <a:srgbClr val="D97706"/>
           </a:solidFill>
           <a:ln>
             <a:noFill/>
@@ -4046,7 +4089,7 @@
       </p:sp>
       <p:sp>
         <p:nvSpPr>
-          <p:cNvPr id="16" name="TextBox 15"/>
+          <p:cNvPr id="17" name="TextBox 16"/>
           <p:cNvSpPr txBox="1"/>
           <p:nvPr/>
         </p:nvSpPr>
@@ -4074,7 +4117,7 @@
             <a:r>
               <a:rPr sz="850" b="1" i="0">
                 <a:solidFill>
-                  <a:srgbClr val="DC2626"/>
+                  <a:srgbClr val="D97706"/>
                 </a:solidFill>
                 <a:latin typeface="Consolas"/>
               </a:rPr>
@@ -4085,14 +4128,14 @@
       </p:sp>
       <p:sp>
         <p:nvSpPr>
-          <p:cNvPr id="17" name="TextBox 16"/>
+          <p:cNvPr id="18" name="TextBox 17"/>
           <p:cNvSpPr txBox="1"/>
           <p:nvPr/>
         </p:nvSpPr>
         <p:spPr>
           <a:xfrm>
             <a:off x="6374739" y="4512564"/>
-            <a:ext cx="5240883" cy="914400"/>
+            <a:ext cx="5240883" cy="1097280"/>
           </a:xfrm>
           <a:prstGeom prst="rect">
             <a:avLst/>
@@ -4117,7 +4160,7 @@
                 </a:solidFill>
                 <a:latin typeface="Pretendard"/>
               </a:rPr>
-              <a:t>정확 답변 ≠ 유용한 답변</a:t>
+              <a:t>Phase 2 자체 AI = 도메인 특화 데이터 필수</a:t>
             </a:r>
           </a:p>
           <a:p>
@@ -4133,7 +4176,7 @@
                 </a:solidFill>
                 <a:latin typeface="Pretendard"/>
               </a:rPr>
-              <a:t>비전문가 사용 가능성 = HPWD-GPT 차별점</a:t>
+              <a:t>일반 LLM — 본 도메인 미숙지</a:t>
             </a:r>
           </a:p>
           <a:p>
@@ -4165,14 +4208,30 @@
                 </a:solidFill>
                 <a:latin typeface="Pretendard"/>
               </a:rPr>
-              <a:t>근거 인용 = 신뢰성 핵심 ("왜 이렇게 답했나" 추적)</a:t>
-            </a:r>
-          </a:p>
-        </p:txBody>
-      </p:sp>
-      <p:sp>
-        <p:nvSpPr>
-          <p:cNvPr id="18" name="TextBox 17"/>
+              <a:t>데이터 부재 시 — 자체 sLLM 개발 최소 6개월 지연</a:t>
+            </a:r>
+          </a:p>
+          <a:p>
+            <a:pPr algn="l">
+              <a:lnSpc>
+                <a:spcPct val="135000"/>
+              </a:lnSpc>
+            </a:pPr>
+            <a:r>
+              <a:rPr sz="1000" b="0" i="0">
+                <a:solidFill>
+                  <a:srgbClr val="475569"/>
+                </a:solidFill>
+                <a:latin typeface="Pretendard"/>
+              </a:rPr>
+              <a:t>⑤ 트랙 = 시간 매입 트랙</a:t>
+            </a:r>
+          </a:p>
+        </p:txBody>
+      </p:sp>
+      <p:sp>
+        <p:nvSpPr>
+          <p:cNvPr id="19" name="TextBox 18"/>
           <p:cNvSpPr txBox="1"/>
           <p:nvPr/>
         </p:nvSpPr>
@@ -4204,7 +4263,7 @@
                 </a:solidFill>
                 <a:latin typeface="Consolas"/>
               </a:rPr>
-              <a:t>10 / 18</a:t>
+              <a:t>10 / 17</a:t>
             </a:r>
           </a:p>
         </p:txBody>
@@ -4269,7 +4328,7 @@
                 </a:solidFill>
                 <a:latin typeface="Consolas"/>
               </a:rPr>
-              <a:t>D-5. 서브트랙 ⑤</a:t>
+              <a:t>E. Phase 1 ⓑ 트랙</a:t>
             </a:r>
           </a:p>
         </p:txBody>
@@ -4308,7 +4367,7 @@
                 </a:solidFill>
                 <a:latin typeface="Pretendard"/>
               </a:rPr>
-              <a:t>⑤ 로그 수집 + 데이터 라벨링</a:t>
+              <a:t>ⓑ 검증 DB 구축</a:t>
             </a:r>
           </a:p>
         </p:txBody>
@@ -4347,7 +4406,7 @@
                 </a:solidFill>
                 <a:latin typeface="Pretendard"/>
               </a:rPr>
-              <a:t>Phase 2 학습 데이터 수확기</a:t>
+              <a:t>AI · 시뮬 공용 사내 데이터 통합 저장소</a:t>
             </a:r>
           </a:p>
         </p:txBody>
@@ -4414,7 +4473,7 @@
             <a:avLst/>
           </a:prstGeom>
           <a:solidFill>
-            <a:srgbClr val="2563EB"/>
+            <a:srgbClr val="D97706"/>
           </a:solidFill>
           <a:ln>
             <a:noFill/>
@@ -4472,11 +4531,11 @@
             <a:r>
               <a:rPr sz="850" b="1" i="0">
                 <a:solidFill>
-                  <a:srgbClr val="2563EB"/>
+                  <a:srgbClr val="D97706"/>
                 </a:solidFill>
                 <a:latin typeface="Consolas"/>
               </a:rPr>
-              <a:t>한 줄 정리</a:t>
+              <a:t>트랙 정체</a:t>
             </a:r>
           </a:p>
         </p:txBody>
@@ -4515,7 +4574,7 @@
                 </a:solidFill>
                 <a:latin typeface="Pretendard"/>
               </a:rPr>
-              <a:t>자체 sLLM 학습 데이터 축적</a:t>
+              <a:t>독립 DB 트랙이 필요한 이유</a:t>
             </a:r>
           </a:p>
         </p:txBody>
@@ -4529,7 +4588,7 @@
         <p:spPr>
           <a:xfrm>
             <a:off x="576072" y="2660904"/>
-            <a:ext cx="5240883" cy="457200"/>
+            <a:ext cx="5240883" cy="914400"/>
           </a:xfrm>
           <a:prstGeom prst="rect">
             <a:avLst/>
@@ -4554,7 +4613,7 @@
                 </a:solidFill>
                 <a:latin typeface="Pretendard"/>
               </a:rPr>
-              <a:t>9개월 동안 — 대화 · 검색 · 답변 · 피드백 전수 저장</a:t>
+              <a:t>"AI 품질의 70% = 데이터"</a:t>
             </a:r>
           </a:p>
           <a:p>
@@ -4570,7 +4629,39 @@
                 </a:solidFill>
                 <a:latin typeface="Pretendard"/>
               </a:rPr>
-              <a:t>→ Phase 2 자체 sLLM 학습 데이터셋</a:t>
+              <a:t/>
+            </a:r>
+          </a:p>
+          <a:p>
+            <a:pPr algn="l">
+              <a:lnSpc>
+                <a:spcPct val="135000"/>
+              </a:lnSpc>
+            </a:pPr>
+            <a:r>
+              <a:rPr sz="1000" b="0" i="0">
+                <a:solidFill>
+                  <a:srgbClr val="475569"/>
+                </a:solidFill>
+                <a:latin typeface="Pretendard"/>
+              </a:rPr>
+              <a:t>ⓐ 답변 엔진 — 양질의 데이터 필수</a:t>
+            </a:r>
+          </a:p>
+          <a:p>
+            <a:pPr algn="l">
+              <a:lnSpc>
+                <a:spcPct val="135000"/>
+              </a:lnSpc>
+            </a:pPr>
+            <a:r>
+              <a:rPr sz="1000" b="0" i="0">
+                <a:solidFill>
+                  <a:srgbClr val="475569"/>
+                </a:solidFill>
+                <a:latin typeface="Pretendard"/>
+              </a:rPr>
+              <a:t>ⓑ 트랙 — 수집 · 정제 · 검증</a:t>
             </a:r>
           </a:p>
         </p:txBody>
@@ -4578,82 +4669,6 @@
       <p:sp>
         <p:nvSpPr>
           <p:cNvPr id="10" name="Rounded Rectangle 9"/>
-          <p:cNvSpPr/>
-          <p:nvPr/>
-        </p:nvSpPr>
-        <p:spPr>
-          <a:xfrm>
-            <a:off x="576072" y="3191256"/>
-            <a:ext cx="5240883" cy="694944"/>
-          </a:xfrm>
-          <a:prstGeom prst="roundRect">
-            <a:avLst>
-              <a:gd name="adj" fmla="val 8000"/>
-            </a:avLst>
-          </a:prstGeom>
-          <a:solidFill>
-            <a:srgbClr val="F8FAFC"/>
-          </a:solidFill>
-          <a:ln w="6350">
-            <a:solidFill>
-              <a:srgbClr val="CBD5E1"/>
-            </a:solidFill>
-          </a:ln>
-        </p:spPr>
-        <p:style>
-          <a:lnRef idx="1">
-            <a:schemeClr val="accent1"/>
-          </a:lnRef>
-          <a:fillRef idx="3">
-            <a:schemeClr val="accent1"/>
-          </a:fillRef>
-          <a:effectRef idx="2">
-            <a:schemeClr val="accent1"/>
-          </a:effectRef>
-          <a:fontRef idx="minor">
-            <a:schemeClr val="lt1"/>
-          </a:fontRef>
-        </p:style>
-        <p:txBody>
-          <a:bodyPr rtlCol="0" anchor="t" lIns="109728" rIns="109728" tIns="73152" bIns="73152" wrap="square"/>
-          <a:lstStyle/>
-          <a:p>
-            <a:pPr algn="l">
-              <a:lnSpc>
-                <a:spcPct val="120000"/>
-              </a:lnSpc>
-            </a:pPr>
-            <a:r>
-              <a:rPr sz="850" b="1">
-                <a:solidFill>
-                  <a:srgbClr val="2563EB"/>
-                </a:solidFill>
-                <a:latin typeface="Consolas"/>
-              </a:rPr>
-              <a:t>데이터 라벨링</a:t>
-            </a:r>
-          </a:p>
-          <a:p>
-            <a:pPr algn="l">
-              <a:lnSpc>
-                <a:spcPct val="130000"/>
-              </a:lnSpc>
-            </a:pPr>
-            <a:r>
-              <a:rPr sz="900">
-                <a:solidFill>
-                  <a:srgbClr val="475569"/>
-                </a:solidFill>
-                <a:latin typeface="Pretendard"/>
-              </a:rPr>
-              <a:t>전문가 검토 후 "정답" 라벨 부착 데이터. AI 학습 핵심 재료. 양보다 품질 우선 → 전문가 리뷰 필수.</a:t>
-            </a:r>
-          </a:p>
-        </p:txBody>
-      </p:sp>
-      <p:sp>
-        <p:nvSpPr>
-          <p:cNvPr id="11" name="Rounded Rectangle 10"/>
           <p:cNvSpPr/>
           <p:nvPr/>
         </p:nvSpPr>
@@ -4700,7 +4715,7 @@
       </p:sp>
       <p:sp>
         <p:nvSpPr>
-          <p:cNvPr id="12" name="Rectangle 11"/>
+          <p:cNvPr id="11" name="Rectangle 10"/>
           <p:cNvSpPr/>
           <p:nvPr/>
         </p:nvSpPr>
@@ -4713,7 +4728,7 @@
             <a:avLst/>
           </a:prstGeom>
           <a:solidFill>
-            <a:srgbClr val="059669"/>
+            <a:srgbClr val="2563EB"/>
           </a:solidFill>
           <a:ln>
             <a:noFill/>
@@ -4743,7 +4758,7 @@
       </p:sp>
       <p:sp>
         <p:nvSpPr>
-          <p:cNvPr id="13" name="TextBox 12"/>
+          <p:cNvPr id="12" name="TextBox 11"/>
           <p:cNvSpPr txBox="1"/>
           <p:nvPr/>
         </p:nvSpPr>
@@ -4771,25 +4786,25 @@
             <a:r>
               <a:rPr sz="850" b="1" i="0">
                 <a:solidFill>
-                  <a:srgbClr val="059669"/>
+                  <a:srgbClr val="2563EB"/>
                 </a:solidFill>
                 <a:latin typeface="Consolas"/>
               </a:rPr>
-              <a:t>구성 요소 (M3~M9)</a:t>
-            </a:r>
-          </a:p>
-        </p:txBody>
-      </p:sp>
-      <p:sp>
-        <p:nvSpPr>
-          <p:cNvPr id="14" name="TextBox 13"/>
+              <a:t>9개월 4단계</a:t>
+            </a:r>
+          </a:p>
+        </p:txBody>
+      </p:sp>
+      <p:sp>
+        <p:nvSpPr>
+          <p:cNvPr id="13" name="TextBox 12"/>
           <p:cNvSpPr txBox="1"/>
           <p:nvPr/>
         </p:nvSpPr>
         <p:spPr>
           <a:xfrm>
             <a:off x="6374739" y="2249424"/>
-            <a:ext cx="5240883" cy="1371600"/>
+            <a:ext cx="5240883" cy="1115568"/>
           </a:xfrm>
           <a:prstGeom prst="rect">
             <a:avLst/>
@@ -4814,7 +4829,7 @@
                 </a:solidFill>
                 <a:latin typeface="Pretendard"/>
               </a:rPr>
-              <a:t>• 구조화 로그 파이프 — JSON 형식 대화 저장</a:t>
+              <a:t>• M1~M3 소스·스키마 — 데이터 정의 · 저장 방식</a:t>
             </a:r>
           </a:p>
           <a:p>
@@ -4830,7 +4845,7 @@
                 </a:solidFill>
                 <a:latin typeface="Pretendard"/>
               </a:rPr>
-              <a:t>• 피드백 UI — 👍/👎 + 자유 코멘트</a:t>
+              <a:t>• M2~M5 수집 — 실험 데이터 · 컴포넌트 카탈로그</a:t>
             </a:r>
           </a:p>
           <a:p>
@@ -4846,7 +4861,7 @@
                 </a:solidFill>
                 <a:latin typeface="Pretendard"/>
               </a:rPr>
-              <a:t>• 품질 필터 · 익명화 — 노이즈 제거 · 민감정보 마스킹</a:t>
+              <a:t>• M4~M8 룰 + API — 규격 추출 · 검색 인터페이스</a:t>
             </a:r>
           </a:p>
           <a:p>
@@ -4862,30 +4877,14 @@
                 </a:solidFill>
                 <a:latin typeface="Pretendard"/>
               </a:rPr>
-              <a:t>• 전문가 리뷰 · 라벨링 — 정답 라벨 부착</a:t>
-            </a:r>
-          </a:p>
-          <a:p>
-            <a:pPr algn="l">
-              <a:lnSpc>
-                <a:spcPct val="140000"/>
-              </a:lnSpc>
-            </a:pPr>
-            <a:r>
-              <a:rPr sz="1000" b="0" i="0">
-                <a:solidFill>
-                  <a:srgbClr val="475569"/>
-                </a:solidFill>
-                <a:latin typeface="Pretendard"/>
-              </a:rPr>
-              <a:t>• Synthetic 증강 — 외부 LLM으로 보충 데이터 생성</a:t>
-            </a:r>
-          </a:p>
-        </p:txBody>
-      </p:sp>
-      <p:sp>
-        <p:nvSpPr>
-          <p:cNvPr id="15" name="Rounded Rectangle 14"/>
+              <a:t>• M6~M9 검증·품질 — 100+ 시나리오 · 회귀 테스트</a:t>
+            </a:r>
+          </a:p>
+        </p:txBody>
+      </p:sp>
+      <p:sp>
+        <p:nvSpPr>
+          <p:cNvPr id="14" name="Rounded Rectangle 13"/>
           <p:cNvSpPr/>
           <p:nvPr/>
         </p:nvSpPr>
@@ -4932,7 +4931,7 @@
       </p:sp>
       <p:sp>
         <p:nvSpPr>
-          <p:cNvPr id="16" name="Rectangle 15"/>
+          <p:cNvPr id="15" name="Rectangle 14"/>
           <p:cNvSpPr/>
           <p:nvPr/>
         </p:nvSpPr>
@@ -4945,7 +4944,7 @@
             <a:avLst/>
           </a:prstGeom>
           <a:solidFill>
-            <a:srgbClr val="D97706"/>
+            <a:srgbClr val="059669"/>
           </a:solidFill>
           <a:ln>
             <a:noFill/>
@@ -4975,7 +4974,7 @@
       </p:sp>
       <p:sp>
         <p:nvSpPr>
-          <p:cNvPr id="17" name="TextBox 16"/>
+          <p:cNvPr id="16" name="TextBox 15"/>
           <p:cNvSpPr txBox="1"/>
           <p:nvPr/>
         </p:nvSpPr>
@@ -5003,25 +5002,25 @@
             <a:r>
               <a:rPr sz="850" b="1" i="0">
                 <a:solidFill>
-                  <a:srgbClr val="D97706"/>
+                  <a:srgbClr val="059669"/>
                 </a:solidFill>
                 <a:latin typeface="Consolas"/>
               </a:rPr>
-              <a:t>필요성</a:t>
-            </a:r>
-          </a:p>
-        </p:txBody>
-      </p:sp>
-      <p:sp>
-        <p:nvSpPr>
-          <p:cNvPr id="18" name="TextBox 17"/>
+              <a:t>ⓐ와의 관계</a:t>
+            </a:r>
+          </a:p>
+        </p:txBody>
+      </p:sp>
+      <p:sp>
+        <p:nvSpPr>
+          <p:cNvPr id="17" name="TextBox 16"/>
           <p:cNvSpPr txBox="1"/>
           <p:nvPr/>
         </p:nvSpPr>
         <p:spPr>
           <a:xfrm>
             <a:off x="6374739" y="4512564"/>
-            <a:ext cx="5240883" cy="1097280"/>
+            <a:ext cx="5240883" cy="914400"/>
           </a:xfrm>
           <a:prstGeom prst="rect">
             <a:avLst/>
@@ -5046,7 +5045,7 @@
                 </a:solidFill>
                 <a:latin typeface="Pretendard"/>
               </a:rPr>
-              <a:t>Phase 2 자체 AI = 도메인 특화 데이터 필수</a:t>
+              <a:t>ⓐ ② RAG 자료 출처 = ⓑ</a:t>
             </a:r>
           </a:p>
           <a:p>
@@ -5062,7 +5061,7 @@
                 </a:solidFill>
                 <a:latin typeface="Pretendard"/>
               </a:rPr>
-              <a:t>일반 LLM — 본 도메인 미숙지</a:t>
+              <a:t>ⓐ ③ Tool-use DB API 제공처 = ⓑ</a:t>
             </a:r>
           </a:p>
           <a:p>
@@ -5094,30 +5093,14 @@
                 </a:solidFill>
                 <a:latin typeface="Pretendard"/>
               </a:rPr>
-              <a:t>데이터 부재 시 — 자체 sLLM 개발 최소 6개월 지연</a:t>
-            </a:r>
-          </a:p>
-          <a:p>
-            <a:pPr algn="l">
-              <a:lnSpc>
-                <a:spcPct val="135000"/>
-              </a:lnSpc>
-            </a:pPr>
-            <a:r>
-              <a:rPr sz="1000" b="0" i="0">
-                <a:solidFill>
-                  <a:srgbClr val="475569"/>
-                </a:solidFill>
-                <a:latin typeface="Pretendard"/>
-              </a:rPr>
-              <a:t>⑤ 트랙 = 시간 매입 트랙</a:t>
-            </a:r>
-          </a:p>
-        </p:txBody>
-      </p:sp>
-      <p:sp>
-        <p:nvSpPr>
-          <p:cNvPr id="19" name="TextBox 18"/>
+              <a:t>ⓐ ↔ ⓑ 상호 의존 — 한 쪽 부재 시 시스템 정지</a:t>
+            </a:r>
+          </a:p>
+        </p:txBody>
+      </p:sp>
+      <p:sp>
+        <p:nvSpPr>
+          <p:cNvPr id="18" name="TextBox 17"/>
           <p:cNvSpPr txBox="1"/>
           <p:nvPr/>
         </p:nvSpPr>
@@ -5149,7 +5132,7 @@
                 </a:solidFill>
                 <a:latin typeface="Consolas"/>
               </a:rPr>
-              <a:t>11 / 18</a:t>
+              <a:t>11 / 17</a:t>
             </a:r>
           </a:p>
         </p:txBody>
@@ -5214,7 +5197,7 @@
                 </a:solidFill>
                 <a:latin typeface="Consolas"/>
               </a:rPr>
-              <a:t>E. Phase 1 ⓑ 트랙</a:t>
+              <a:t>E. ⓑ ① DB 설계</a:t>
             </a:r>
           </a:p>
         </p:txBody>
@@ -5253,7 +5236,7 @@
                 </a:solidFill>
                 <a:latin typeface="Pretendard"/>
               </a:rPr>
-              <a:t>ⓑ 검증 DB 구축</a:t>
+              <a:t>5요소 · 3개월 · M1~M3</a:t>
             </a:r>
           </a:p>
         </p:txBody>
@@ -5292,7 +5275,7 @@
                 </a:solidFill>
                 <a:latin typeface="Pretendard"/>
               </a:rPr>
-              <a:t>AI · 시뮬 공용 사내 데이터 통합 저장소</a:t>
+              <a:t>데이터 저장 구조 사전 설계 — 청사진</a:t>
             </a:r>
           </a:p>
         </p:txBody>
@@ -5306,7 +5289,7 @@
         <p:spPr>
           <a:xfrm>
             <a:off x="411480" y="1874520"/>
-            <a:ext cx="5570067" cy="4343400"/>
+            <a:ext cx="5570067" cy="2080260"/>
           </a:xfrm>
           <a:prstGeom prst="roundRect">
             <a:avLst>
@@ -5353,13 +5336,13 @@
         <p:spPr>
           <a:xfrm>
             <a:off x="411480" y="1874520"/>
-            <a:ext cx="45720" cy="4343400"/>
+            <a:ext cx="45720" cy="2080260"/>
           </a:xfrm>
           <a:prstGeom prst="rect">
             <a:avLst/>
           </a:prstGeom>
           <a:solidFill>
-            <a:srgbClr val="D97706"/>
+            <a:srgbClr val="2563EB"/>
           </a:solidFill>
           <a:ln>
             <a:noFill/>
@@ -5417,11 +5400,11 @@
             <a:r>
               <a:rPr sz="850" b="1" i="0">
                 <a:solidFill>
-                  <a:srgbClr val="D97706"/>
+                  <a:srgbClr val="2563EB"/>
                 </a:solidFill>
                 <a:latin typeface="Consolas"/>
               </a:rPr>
-              <a:t>트랙 정체</a:t>
+              <a:t>한 줄 정리</a:t>
             </a:r>
           </a:p>
         </p:txBody>
@@ -5460,7 +5443,7 @@
                 </a:solidFill>
                 <a:latin typeface="Pretendard"/>
               </a:rPr>
-              <a:t>독립 DB 트랙이 필요한 이유</a:t>
+              <a:t>데이터 수집 전 사전 설계</a:t>
             </a:r>
           </a:p>
         </p:txBody>
@@ -5474,7 +5457,7 @@
         <p:spPr>
           <a:xfrm>
             <a:off x="576072" y="2660904"/>
-            <a:ext cx="5240883" cy="914400"/>
+            <a:ext cx="5240883" cy="457200"/>
           </a:xfrm>
           <a:prstGeom prst="rect">
             <a:avLst/>
@@ -5499,7 +5482,7 @@
                 </a:solidFill>
                 <a:latin typeface="Pretendard"/>
               </a:rPr>
-              <a:t>"AI 품질의 70% = 데이터"</a:t>
+              <a:t>데이터 수집 전 — "무엇을 · 어디에" 결정</a:t>
             </a:r>
           </a:p>
           <a:p>
@@ -5515,39 +5498,7 @@
                 </a:solidFill>
                 <a:latin typeface="Pretendard"/>
               </a:rPr>
-              <a:t/>
-            </a:r>
-          </a:p>
-          <a:p>
-            <a:pPr algn="l">
-              <a:lnSpc>
-                <a:spcPct val="135000"/>
-              </a:lnSpc>
-            </a:pPr>
-            <a:r>
-              <a:rPr sz="1000" b="0" i="0">
-                <a:solidFill>
-                  <a:srgbClr val="475569"/>
-                </a:solidFill>
-                <a:latin typeface="Pretendard"/>
-              </a:rPr>
-              <a:t>ⓐ 답변 엔진 — 양질의 데이터 필수</a:t>
-            </a:r>
-          </a:p>
-          <a:p>
-            <a:pPr algn="l">
-              <a:lnSpc>
-                <a:spcPct val="135000"/>
-              </a:lnSpc>
-            </a:pPr>
-            <a:r>
-              <a:rPr sz="1000" b="0" i="0">
-                <a:solidFill>
-                  <a:srgbClr val="475569"/>
-                </a:solidFill>
-                <a:latin typeface="Pretendard"/>
-              </a:rPr>
-              <a:t>ⓑ 트랙 — 수집 · 정제 · 검증</a:t>
+              <a:t>오류 시 — 전면 재구축 필요</a:t>
             </a:r>
           </a:p>
         </p:txBody>
@@ -5614,7 +5565,7 @@
             <a:avLst/>
           </a:prstGeom>
           <a:solidFill>
-            <a:srgbClr val="2563EB"/>
+            <a:srgbClr val="059669"/>
           </a:solidFill>
           <a:ln>
             <a:noFill/>
@@ -5672,11 +5623,11 @@
             <a:r>
               <a:rPr sz="850" b="1" i="0">
                 <a:solidFill>
-                  <a:srgbClr val="2563EB"/>
+                  <a:srgbClr val="059669"/>
                 </a:solidFill>
                 <a:latin typeface="Consolas"/>
               </a:rPr>
-              <a:t>9개월 4단계</a:t>
+              <a:t>5개 요소</a:t>
             </a:r>
           </a:p>
         </p:txBody>
@@ -5690,7 +5641,7 @@
         <p:spPr>
           <a:xfrm>
             <a:off x="6374739" y="2249424"/>
-            <a:ext cx="5240883" cy="1115568"/>
+            <a:ext cx="5240883" cy="1371600"/>
           </a:xfrm>
           <a:prstGeom prst="rect">
             <a:avLst/>
@@ -5715,7 +5666,7 @@
                 </a:solidFill>
                 <a:latin typeface="Pretendard"/>
               </a:rPr>
-              <a:t>• M1~M3 소스·스키마 — 데이터 정의 · 저장 방식</a:t>
+              <a:t>• ① 소스 인벤토리 — 데이터 위치 · 관리자 조사</a:t>
             </a:r>
           </a:p>
           <a:p>
@@ -5731,7 +5682,7 @@
                 </a:solidFill>
                 <a:latin typeface="Pretendard"/>
               </a:rPr>
-              <a:t>• M2~M5 수집 — 실험 데이터 · 컴포넌트 카탈로그</a:t>
+              <a:t>• ② ERD 모델링 — 엔티티 · 관계 정의</a:t>
             </a:r>
           </a:p>
           <a:p>
@@ -5747,7 +5698,7 @@
                 </a:solidFill>
                 <a:latin typeface="Pretendard"/>
               </a:rPr>
-              <a:t>• M4~M8 룰 + API — 규격 추출 · 검색 인터페이스</a:t>
+              <a:t>• ③ 스키마 + 인덱스 — 테이블 · 검색 최적화</a:t>
             </a:r>
           </a:p>
           <a:p>
@@ -5763,7 +5714,23 @@
                 </a:solidFill>
                 <a:latin typeface="Pretendard"/>
               </a:rPr>
-              <a:t>• M6~M9 검증·품질 — 100+ 시나리오 · 회귀 테스트</a:t>
+              <a:t>• ④ 품질 기준 — 좋은 데이터 명시화</a:t>
+            </a:r>
+          </a:p>
+          <a:p>
+            <a:pPr algn="l">
+              <a:lnSpc>
+                <a:spcPct val="140000"/>
+              </a:lnSpc>
+            </a:pPr>
+            <a:r>
+              <a:rPr sz="1000" b="0" i="0">
+                <a:solidFill>
+                  <a:srgbClr val="475569"/>
+                </a:solidFill>
+                <a:latin typeface="Pretendard"/>
+              </a:rPr>
+              <a:t>• ⑤ 마이그레이션 — 변경 대응 체계</a:t>
             </a:r>
           </a:p>
         </p:txBody>
@@ -5776,7 +5743,7 @@
         </p:nvSpPr>
         <p:spPr>
           <a:xfrm>
-            <a:off x="6210147" y="4137660"/>
+            <a:off x="411480" y="4137660"/>
             <a:ext cx="5570067" cy="2080260"/>
           </a:xfrm>
           <a:prstGeom prst="roundRect">
@@ -5823,14 +5790,14 @@
         </p:nvSpPr>
         <p:spPr>
           <a:xfrm>
-            <a:off x="6210147" y="4137660"/>
+            <a:off x="411480" y="4137660"/>
             <a:ext cx="45720" cy="2080260"/>
           </a:xfrm>
           <a:prstGeom prst="rect">
             <a:avLst/>
           </a:prstGeom>
           <a:solidFill>
-            <a:srgbClr val="059669"/>
+            <a:srgbClr val="D97706"/>
           </a:solidFill>
           <a:ln>
             <a:noFill/>
@@ -5866,7 +5833,7 @@
         </p:nvSpPr>
         <p:spPr>
           <a:xfrm>
-            <a:off x="6374739" y="4256532"/>
+            <a:off x="576072" y="4256532"/>
             <a:ext cx="5240883" cy="228600"/>
           </a:xfrm>
           <a:prstGeom prst="rect">
@@ -5888,11 +5855,11 @@
             <a:r>
               <a:rPr sz="850" b="1" i="0">
                 <a:solidFill>
-                  <a:srgbClr val="059669"/>
+                  <a:srgbClr val="D97706"/>
                 </a:solidFill>
                 <a:latin typeface="Consolas"/>
               </a:rPr>
-              <a:t>ⓐ와의 관계</a:t>
+              <a:t>중요 — 사람의 일</a:t>
             </a:r>
           </a:p>
         </p:txBody>
@@ -5905,7 +5872,7 @@
         </p:nvSpPr>
         <p:spPr>
           <a:xfrm>
-            <a:off x="6374739" y="4512564"/>
+            <a:off x="576072" y="4512564"/>
             <a:ext cx="5240883" cy="914400"/>
           </a:xfrm>
           <a:prstGeom prst="rect">
@@ -5931,7 +5898,7 @@
                 </a:solidFill>
                 <a:latin typeface="Pretendard"/>
               </a:rPr>
-              <a:t>ⓐ ② RAG 자료 출처 = ⓑ</a:t>
+              <a:t>5요소 모두 AI가 아닌 사람·부서 협업 작업.</a:t>
             </a:r>
           </a:p>
           <a:p>
@@ -5947,7 +5914,7 @@
                 </a:solidFill>
                 <a:latin typeface="Pretendard"/>
               </a:rPr>
-              <a:t>ⓐ ③ Tool-use DB API 제공처 = ⓑ</a:t>
+              <a:t/>
             </a:r>
           </a:p>
           <a:p>
@@ -5963,7 +5930,7 @@
                 </a:solidFill>
                 <a:latin typeface="Pretendard"/>
               </a:rPr>
-              <a:t/>
+              <a:t>· 사내 정책 · 조직 컨텍스트 · 부서 협상</a:t>
             </a:r>
           </a:p>
           <a:p>
@@ -5979,14 +5946,214 @@
                 </a:solidFill>
                 <a:latin typeface="Pretendard"/>
               </a:rPr>
-              <a:t>ⓐ ↔ ⓑ 상호 의존 — 한 쪽 부재 시 시스템 정지</a:t>
-            </a:r>
-          </a:p>
-        </p:txBody>
-      </p:sp>
-      <p:sp>
-        <p:nvSpPr>
-          <p:cNvPr id="18" name="TextBox 17"/>
+              <a:t>→ AI 학습 데이터 부재 · 자동화 불가</a:t>
+            </a:r>
+          </a:p>
+        </p:txBody>
+      </p:sp>
+      <p:sp>
+        <p:nvSpPr>
+          <p:cNvPr id="18" name="Rounded Rectangle 17"/>
+          <p:cNvSpPr/>
+          <p:nvPr/>
+        </p:nvSpPr>
+        <p:spPr>
+          <a:xfrm>
+            <a:off x="6210147" y="4137660"/>
+            <a:ext cx="5570067" cy="2080260"/>
+          </a:xfrm>
+          <a:prstGeom prst="roundRect">
+            <a:avLst>
+              <a:gd name="adj" fmla="val 5000"/>
+            </a:avLst>
+          </a:prstGeom>
+          <a:solidFill>
+            <a:srgbClr val="FFFFFF"/>
+          </a:solidFill>
+          <a:ln w="6350">
+            <a:solidFill>
+              <a:srgbClr val="E2E8F0"/>
+            </a:solidFill>
+          </a:ln>
+        </p:spPr>
+        <p:style>
+          <a:lnRef idx="1">
+            <a:schemeClr val="accent1"/>
+          </a:lnRef>
+          <a:fillRef idx="3">
+            <a:schemeClr val="accent1"/>
+          </a:fillRef>
+          <a:effectRef idx="2">
+            <a:schemeClr val="accent1"/>
+          </a:effectRef>
+          <a:fontRef idx="minor">
+            <a:schemeClr val="lt1"/>
+          </a:fontRef>
+        </p:style>
+        <p:txBody>
+          <a:bodyPr rtlCol="0" anchor="ctr"/>
+          <a:lstStyle/>
+          <a:p>
+            <a:pPr algn="ctr"/>
+          </a:p>
+        </p:txBody>
+      </p:sp>
+      <p:sp>
+        <p:nvSpPr>
+          <p:cNvPr id="19" name="Rectangle 18"/>
+          <p:cNvSpPr/>
+          <p:nvPr/>
+        </p:nvSpPr>
+        <p:spPr>
+          <a:xfrm>
+            <a:off x="6210147" y="4137660"/>
+            <a:ext cx="45720" cy="2080260"/>
+          </a:xfrm>
+          <a:prstGeom prst="rect">
+            <a:avLst/>
+          </a:prstGeom>
+          <a:solidFill>
+            <a:srgbClr val="0D9488"/>
+          </a:solidFill>
+          <a:ln>
+            <a:noFill/>
+          </a:ln>
+        </p:spPr>
+        <p:style>
+          <a:lnRef idx="1">
+            <a:schemeClr val="accent1"/>
+          </a:lnRef>
+          <a:fillRef idx="3">
+            <a:schemeClr val="accent1"/>
+          </a:fillRef>
+          <a:effectRef idx="2">
+            <a:schemeClr val="accent1"/>
+          </a:effectRef>
+          <a:fontRef idx="minor">
+            <a:schemeClr val="lt1"/>
+          </a:fontRef>
+        </p:style>
+        <p:txBody>
+          <a:bodyPr rtlCol="0" anchor="ctr"/>
+          <a:lstStyle/>
+          <a:p>
+            <a:pPr algn="ctr"/>
+          </a:p>
+        </p:txBody>
+      </p:sp>
+      <p:sp>
+        <p:nvSpPr>
+          <p:cNvPr id="20" name="TextBox 19"/>
+          <p:cNvSpPr txBox="1"/>
+          <p:nvPr/>
+        </p:nvSpPr>
+        <p:spPr>
+          <a:xfrm>
+            <a:off x="6374739" y="4256532"/>
+            <a:ext cx="5240883" cy="228600"/>
+          </a:xfrm>
+          <a:prstGeom prst="rect">
+            <a:avLst/>
+          </a:prstGeom>
+          <a:noFill/>
+        </p:spPr>
+        <p:txBody>
+          <a:bodyPr wrap="square" lIns="0" rIns="0" tIns="0" bIns="0" anchor="t">
+            <a:spAutoFit/>
+          </a:bodyPr>
+          <a:lstStyle/>
+          <a:p>
+            <a:pPr algn="l">
+              <a:lnSpc>
+                <a:spcPct val="115000"/>
+              </a:lnSpc>
+            </a:pPr>
+            <a:r>
+              <a:rPr sz="850" b="1" i="0">
+                <a:solidFill>
+                  <a:srgbClr val="0D9488"/>
+                </a:solidFill>
+                <a:latin typeface="Consolas"/>
+              </a:rPr>
+              <a:t>V1 → 점진 진화</a:t>
+            </a:r>
+          </a:p>
+        </p:txBody>
+      </p:sp>
+      <p:sp>
+        <p:nvSpPr>
+          <p:cNvPr id="21" name="TextBox 20"/>
+          <p:cNvSpPr txBox="1"/>
+          <p:nvPr/>
+        </p:nvSpPr>
+        <p:spPr>
+          <a:xfrm>
+            <a:off x="6374739" y="4512564"/>
+            <a:ext cx="5240883" cy="640080"/>
+          </a:xfrm>
+          <a:prstGeom prst="rect">
+            <a:avLst/>
+          </a:prstGeom>
+          <a:noFill/>
+        </p:spPr>
+        <p:txBody>
+          <a:bodyPr wrap="square" lIns="0" rIns="0" tIns="0" bIns="0" anchor="t">
+            <a:normAutofit fontScale="85000"/>
+          </a:bodyPr>
+          <a:lstStyle/>
+          <a:p>
+            <a:pPr algn="l">
+              <a:lnSpc>
+                <a:spcPct val="135000"/>
+              </a:lnSpc>
+            </a:pPr>
+            <a:r>
+              <a:rPr sz="1000" b="0" i="0">
+                <a:solidFill>
+                  <a:srgbClr val="475569"/>
+                </a:solidFill>
+                <a:latin typeface="Pretendard"/>
+              </a:rPr>
+              <a:t>3개월 = "완벽 설계" 아님</a:t>
+            </a:r>
+          </a:p>
+          <a:p>
+            <a:pPr algn="l">
+              <a:lnSpc>
+                <a:spcPct val="135000"/>
+              </a:lnSpc>
+            </a:pPr>
+            <a:r>
+              <a:rPr sz="1000" b="0" i="0">
+                <a:solidFill>
+                  <a:srgbClr val="475569"/>
+                </a:solidFill>
+                <a:latin typeface="Pretendard"/>
+              </a:rPr>
+              <a:t>M1~M3 — 핵심 엔티티만 V1</a:t>
+            </a:r>
+          </a:p>
+          <a:p>
+            <a:pPr algn="l">
+              <a:lnSpc>
+                <a:spcPct val="135000"/>
+              </a:lnSpc>
+            </a:pPr>
+            <a:r>
+              <a:rPr sz="1000" b="0" i="0">
+                <a:solidFill>
+                  <a:srgbClr val="475569"/>
+                </a:solidFill>
+                <a:latin typeface="Pretendard"/>
+              </a:rPr>
+              <a:t>M4~M9 — ⑤ 마이그레이션으로 점진 추가</a:t>
+            </a:r>
+          </a:p>
+        </p:txBody>
+      </p:sp>
+      <p:sp>
+        <p:nvSpPr>
+          <p:cNvPr id="22" name="TextBox 21"/>
           <p:cNvSpPr txBox="1"/>
           <p:nvPr/>
         </p:nvSpPr>
@@ -6018,7 +6185,7 @@
                 </a:solidFill>
                 <a:latin typeface="Consolas"/>
               </a:rPr>
-              <a:t>12 / 18</a:t>
+              <a:t>12 / 17</a:t>
             </a:r>
           </a:p>
         </p:txBody>
@@ -6083,7 +6250,7 @@
                 </a:solidFill>
                 <a:latin typeface="Consolas"/>
               </a:rPr>
-              <a:t>E. ⓑ ① DB 설계</a:t>
+              <a:t>E-1-1. ⓑ ① DB 설계 · 요소 1</a:t>
             </a:r>
           </a:p>
         </p:txBody>
@@ -6122,7 +6289,7 @@
                 </a:solidFill>
                 <a:latin typeface="Pretendard"/>
               </a:rPr>
-              <a:t>5요소 · 3개월 · M1~M3</a:t>
+              <a:t>데이터 소스 인벤토리</a:t>
             </a:r>
           </a:p>
         </p:txBody>
@@ -6161,7 +6328,7 @@
                 </a:solidFill>
                 <a:latin typeface="Pretendard"/>
               </a:rPr>
-              <a:t>데이터 저장 구조 사전 설계 — 청사진</a:t>
+              <a:t>사내 데이터 위치 · 관리자 조사</a:t>
             </a:r>
           </a:p>
         </p:txBody>
@@ -6329,7 +6496,7 @@
                 </a:solidFill>
                 <a:latin typeface="Pretendard"/>
               </a:rPr>
-              <a:t>데이터 수집 전 사전 설계</a:t>
+              <a:t>"어디에 · 무엇이 · 누가 관리"</a:t>
             </a:r>
           </a:p>
         </p:txBody>
@@ -6368,7 +6535,7 @@
                 </a:solidFill>
                 <a:latin typeface="Pretendard"/>
               </a:rPr>
-              <a:t>데이터 수집 전 — "무엇을 · 어디에" 결정</a:t>
+              <a:t>사내 분산 데이터 → 전수 조사 · 목록화</a:t>
             </a:r>
           </a:p>
           <a:p>
@@ -6384,7 +6551,7 @@
                 </a:solidFill>
                 <a:latin typeface="Pretendard"/>
               </a:rPr>
-              <a:t>오류 시 — 전면 재구축 필요</a:t>
+              <a:t>10+ 데이터 소스 · 부서별 책임자 식별</a:t>
             </a:r>
           </a:p>
         </p:txBody>
@@ -6513,7 +6680,7 @@
                 </a:solidFill>
                 <a:latin typeface="Consolas"/>
               </a:rPr>
-              <a:t>5개 요소</a:t>
+              <a:t>예시 인벤토리</a:t>
             </a:r>
           </a:p>
         </p:txBody>
@@ -6527,7 +6694,7 @@
         <p:spPr>
           <a:xfrm>
             <a:off x="6374739" y="2249424"/>
-            <a:ext cx="5240883" cy="1371600"/>
+            <a:ext cx="5240883" cy="1522476"/>
           </a:xfrm>
           <a:prstGeom prst="rect">
             <a:avLst/>
@@ -6552,7 +6719,7 @@
                 </a:solidFill>
                 <a:latin typeface="Pretendard"/>
               </a:rPr>
-              <a:t>• ① 소스 인벤토리 — 데이터 위치 · 관리자 조사</a:t>
+              <a:t>• 사내 모델 카탈로그 — 양산·개발 중 모델 리스트</a:t>
             </a:r>
           </a:p>
           <a:p>
@@ -6568,7 +6735,7 @@
                 </a:solidFill>
                 <a:latin typeface="Pretendard"/>
               </a:rPr>
-              <a:t>• ② ERD 모델링 — 엔티티 · 관계 정의</a:t>
+              <a:t>• 부품 사양시트 — 압축기·HX·팬·EEV 성능 곡선</a:t>
             </a:r>
           </a:p>
           <a:p>
@@ -6584,7 +6751,7 @@
                 </a:solidFill>
                 <a:latin typeface="Pretendard"/>
               </a:rPr>
-              <a:t>• ③ 스키마 + 인덱스 — 테이블 · 검색 최적화</a:t>
+              <a:t>• 시험 보고서 — 과거 모델 시험 결과 (SMER·소음·전력)</a:t>
             </a:r>
           </a:p>
           <a:p>
@@ -6600,7 +6767,7 @@
                 </a:solidFill>
                 <a:latin typeface="Pretendard"/>
               </a:rPr>
-              <a:t>• ④ 품질 기준 — 좋은 데이터 명시화</a:t>
+              <a:t>• 시험 규격 — IEC · EN · ISO 인증 요건</a:t>
             </a:r>
           </a:p>
           <a:p>
@@ -6616,7 +6783,23 @@
                 </a:solidFill>
                 <a:latin typeface="Pretendard"/>
               </a:rPr>
-              <a:t>• ⑤ 마이그레이션 — 변경 대응 체계</a:t>
+              <a:t>• 사내 설계 가이드 — 표준 · 체크리스트 · 노하우</a:t>
+            </a:r>
+          </a:p>
+          <a:p>
+            <a:pPr algn="l">
+              <a:lnSpc>
+                <a:spcPct val="140000"/>
+              </a:lnSpc>
+            </a:pPr>
+            <a:r>
+              <a:rPr sz="1000" b="0" i="0">
+                <a:solidFill>
+                  <a:srgbClr val="475569"/>
+                </a:solidFill>
+                <a:latin typeface="Pretendard"/>
+              </a:rPr>
+              <a:t>• 타겟 시장 지표 — 지역 · 인증별 목표 (효율 · 소음)</a:t>
             </a:r>
           </a:p>
         </p:txBody>
@@ -6745,7 +6928,7 @@
                 </a:solidFill>
                 <a:latin typeface="Consolas"/>
               </a:rPr>
-              <a:t>중요 — 사람의 일</a:t>
+              <a:t>필요성</a:t>
             </a:r>
           </a:p>
         </p:txBody>
@@ -6784,7 +6967,7 @@
                 </a:solidFill>
                 <a:latin typeface="Pretendard"/>
               </a:rPr>
-              <a:t>5요소 모두 AI가 아닌 사람·부서 협업 작업.</a:t>
+              <a:t>미실시 — 6개월 후 누락 데이터 발견 → 스키마 재설계</a:t>
             </a:r>
           </a:p>
           <a:p>
@@ -6800,6 +6983,22 @@
                 </a:solidFill>
                 <a:latin typeface="Pretendard"/>
               </a:rPr>
+              <a:t>실시 — 사전 식별 · 부서 승인 절차 미리 시작</a:t>
+            </a:r>
+          </a:p>
+          <a:p>
+            <a:pPr algn="l">
+              <a:lnSpc>
+                <a:spcPct val="135000"/>
+              </a:lnSpc>
+            </a:pPr>
+            <a:r>
+              <a:rPr sz="1000" b="0" i="0">
+                <a:solidFill>
+                  <a:srgbClr val="475569"/>
+                </a:solidFill>
+                <a:latin typeface="Pretendard"/>
+              </a:rPr>
               <a:t/>
             </a:r>
           </a:p>
@@ -6816,23 +7015,7 @@
                 </a:solidFill>
                 <a:latin typeface="Pretendard"/>
               </a:rPr>
-              <a:t>· 사내 정책 · 조직 컨텍스트 · 부서 협상</a:t>
-            </a:r>
-          </a:p>
-          <a:p>
-            <a:pPr algn="l">
-              <a:lnSpc>
-                <a:spcPct val="135000"/>
-              </a:lnSpc>
-            </a:pPr>
-            <a:r>
-              <a:rPr sz="1000" b="0" i="0">
-                <a:solidFill>
-                  <a:srgbClr val="475569"/>
-                </a:solidFill>
-                <a:latin typeface="Pretendard"/>
-              </a:rPr>
-              <a:t>→ AI 학습 데이터 부재 · 자동화 불가</a:t>
+              <a:t>민감도 분류 시작점 — 단가 · 도면 등 사전 표시</a:t>
             </a:r>
           </a:p>
         </p:txBody>
@@ -6961,7 +7144,7 @@
                 </a:solidFill>
                 <a:latin typeface="Consolas"/>
               </a:rPr>
-              <a:t>V1 → 점진 진화</a:t>
+              <a:t>산출물</a:t>
             </a:r>
           </a:p>
         </p:txBody>
@@ -6975,7 +7158,7 @@
         <p:spPr>
           <a:xfrm>
             <a:off x="6374739" y="4512564"/>
-            <a:ext cx="5240883" cy="640080"/>
+            <a:ext cx="5240883" cy="859536"/>
           </a:xfrm>
           <a:prstGeom prst="rect">
             <a:avLst/>
@@ -6984,55 +7167,55 @@
         </p:spPr>
         <p:txBody>
           <a:bodyPr wrap="square" lIns="0" rIns="0" tIns="0" bIns="0" anchor="t">
-            <a:normAutofit fontScale="85000"/>
+            <a:spAutoFit/>
           </a:bodyPr>
           <a:lstStyle/>
           <a:p>
             <a:pPr algn="l">
               <a:lnSpc>
-                <a:spcPct val="135000"/>
-              </a:lnSpc>
-            </a:pPr>
-            <a:r>
-              <a:rPr sz="1000" b="0" i="0">
-                <a:solidFill>
-                  <a:srgbClr val="475569"/>
-                </a:solidFill>
-                <a:latin typeface="Pretendard"/>
-              </a:rPr>
-              <a:t>3개월 = "완벽 설계" 아님</a:t>
-            </a:r>
-          </a:p>
-          <a:p>
-            <a:pPr algn="l">
-              <a:lnSpc>
-                <a:spcPct val="135000"/>
-              </a:lnSpc>
-            </a:pPr>
-            <a:r>
-              <a:rPr sz="1000" b="0" i="0">
-                <a:solidFill>
-                  <a:srgbClr val="475569"/>
-                </a:solidFill>
-                <a:latin typeface="Pretendard"/>
-              </a:rPr>
-              <a:t>M1~M3 — 핵심 엔티티만 V1</a:t>
-            </a:r>
-          </a:p>
-          <a:p>
-            <a:pPr algn="l">
-              <a:lnSpc>
-                <a:spcPct val="135000"/>
-              </a:lnSpc>
-            </a:pPr>
-            <a:r>
-              <a:rPr sz="1000" b="0" i="0">
-                <a:solidFill>
-                  <a:srgbClr val="475569"/>
-                </a:solidFill>
-                <a:latin typeface="Pretendard"/>
-              </a:rPr>
-              <a:t>M4~M9 — ⑤ 마이그레이션으로 점진 추가</a:t>
+                <a:spcPct val="140000"/>
+              </a:lnSpc>
+            </a:pPr>
+            <a:r>
+              <a:rPr sz="1000" b="0" i="0">
+                <a:solidFill>
+                  <a:srgbClr val="475569"/>
+                </a:solidFill>
+                <a:latin typeface="Pretendard"/>
+              </a:rPr>
+              <a:t>• 데이터 소스 카탈로그 (스프레드시트)</a:t>
+            </a:r>
+          </a:p>
+          <a:p>
+            <a:pPr algn="l">
+              <a:lnSpc>
+                <a:spcPct val="140000"/>
+              </a:lnSpc>
+            </a:pPr>
+            <a:r>
+              <a:rPr sz="1000" b="0" i="0">
+                <a:solidFill>
+                  <a:srgbClr val="475569"/>
+                </a:solidFill>
+                <a:latin typeface="Pretendard"/>
+              </a:rPr>
+              <a:t>• 부서별 책임자 연락 목록</a:t>
+            </a:r>
+          </a:p>
+          <a:p>
+            <a:pPr algn="l">
+              <a:lnSpc>
+                <a:spcPct val="140000"/>
+              </a:lnSpc>
+            </a:pPr>
+            <a:r>
+              <a:rPr sz="1000" b="0" i="0">
+                <a:solidFill>
+                  <a:srgbClr val="475569"/>
+                </a:solidFill>
+                <a:latin typeface="Pretendard"/>
+              </a:rPr>
+              <a:t>• 접근 권한 요청 우선순위</a:t>
             </a:r>
           </a:p>
         </p:txBody>
@@ -7071,7 +7254,7 @@
                 </a:solidFill>
                 <a:latin typeface="Consolas"/>
               </a:rPr>
-              <a:t>13 / 18</a:t>
+              <a:t>13 / 17</a:t>
             </a:r>
           </a:p>
         </p:txBody>
@@ -7136,7 +7319,7 @@
                 </a:solidFill>
                 <a:latin typeface="Consolas"/>
               </a:rPr>
-              <a:t>E-1-1. ⓑ ① DB 설계 · 요소 1</a:t>
+              <a:t>E-1-2. ⓑ ① DB 설계 · 요소 2</a:t>
             </a:r>
           </a:p>
         </p:txBody>
@@ -7175,7 +7358,7 @@
                 </a:solidFill>
                 <a:latin typeface="Pretendard"/>
               </a:rPr>
-              <a:t>데이터 소스 인벤토리</a:t>
+              <a:t>ERD 모델링</a:t>
             </a:r>
           </a:p>
         </p:txBody>
@@ -7214,7 +7397,7 @@
                 </a:solidFill>
                 <a:latin typeface="Pretendard"/>
               </a:rPr>
-              <a:t>사내 데이터 위치 · 관리자 조사</a:t>
+              <a:t>엔티티 · 관계도 정의</a:t>
             </a:r>
           </a:p>
         </p:txBody>
@@ -7382,7 +7565,7 @@
                 </a:solidFill>
                 <a:latin typeface="Pretendard"/>
               </a:rPr>
-              <a:t>"어디에 · 무엇이 · 누가 관리"</a:t>
+              <a:t>데이터 단위와 연결 구조 청사진</a:t>
             </a:r>
           </a:p>
         </p:txBody>
@@ -7421,7 +7604,7 @@
                 </a:solidFill>
                 <a:latin typeface="Pretendard"/>
               </a:rPr>
-              <a:t>사내 분산 데이터 → 전수 조사 · 목록화</a:t>
+              <a:t>Entity-Relationship Diagram</a:t>
             </a:r>
           </a:p>
           <a:p>
@@ -7437,7 +7620,7 @@
                 </a:solidFill>
                 <a:latin typeface="Pretendard"/>
               </a:rPr>
-              <a:t>10+ 데이터 소스 · 부서별 책임자 식별</a:t>
+              <a:t>엔티티 식별 · 속성 정의 · 관계 표현</a:t>
             </a:r>
           </a:p>
         </p:txBody>
@@ -7566,7 +7749,7 @@
                 </a:solidFill>
                 <a:latin typeface="Consolas"/>
               </a:rPr>
-              <a:t>예시 인벤토리</a:t>
+              <a:t>관계 예시</a:t>
             </a:r>
           </a:p>
         </p:txBody>
@@ -7589,103 +7772,151 @@
         </p:spPr>
         <p:txBody>
           <a:bodyPr wrap="square" lIns="0" rIns="0" tIns="0" bIns="0" anchor="t">
-            <a:spAutoFit/>
+            <a:normAutofit fontScale="85000"/>
           </a:bodyPr>
           <a:lstStyle/>
           <a:p>
             <a:pPr algn="l">
               <a:lnSpc>
-                <a:spcPct val="140000"/>
-              </a:lnSpc>
-            </a:pPr>
-            <a:r>
-              <a:rPr sz="1000" b="0" i="0">
-                <a:solidFill>
-                  <a:srgbClr val="475569"/>
-                </a:solidFill>
-                <a:latin typeface="Pretendard"/>
-              </a:rPr>
-              <a:t>• 사내 모델 카탈로그 — 양산·개발 중 모델 리스트</a:t>
-            </a:r>
-          </a:p>
-          <a:p>
-            <a:pPr algn="l">
-              <a:lnSpc>
-                <a:spcPct val="140000"/>
-              </a:lnSpc>
-            </a:pPr>
-            <a:r>
-              <a:rPr sz="1000" b="0" i="0">
-                <a:solidFill>
-                  <a:srgbClr val="475569"/>
-                </a:solidFill>
-                <a:latin typeface="Pretendard"/>
-              </a:rPr>
-              <a:t>• 부품 사양시트 — 압축기·HX·팬·EEV 성능 곡선</a:t>
-            </a:r>
-          </a:p>
-          <a:p>
-            <a:pPr algn="l">
-              <a:lnSpc>
-                <a:spcPct val="140000"/>
-              </a:lnSpc>
-            </a:pPr>
-            <a:r>
-              <a:rPr sz="1000" b="0" i="0">
-                <a:solidFill>
-                  <a:srgbClr val="475569"/>
-                </a:solidFill>
-                <a:latin typeface="Pretendard"/>
-              </a:rPr>
-              <a:t>• 시험 보고서 — 과거 모델 시험 결과 (SMER·소음·전력)</a:t>
-            </a:r>
-          </a:p>
-          <a:p>
-            <a:pPr algn="l">
-              <a:lnSpc>
-                <a:spcPct val="140000"/>
-              </a:lnSpc>
-            </a:pPr>
-            <a:r>
-              <a:rPr sz="1000" b="0" i="0">
-                <a:solidFill>
-                  <a:srgbClr val="475569"/>
-                </a:solidFill>
-                <a:latin typeface="Pretendard"/>
-              </a:rPr>
-              <a:t>• 시험 규격 — IEC · EN · ISO 인증 요건</a:t>
-            </a:r>
-          </a:p>
-          <a:p>
-            <a:pPr algn="l">
-              <a:lnSpc>
-                <a:spcPct val="140000"/>
-              </a:lnSpc>
-            </a:pPr>
-            <a:r>
-              <a:rPr sz="1000" b="0" i="0">
-                <a:solidFill>
-                  <a:srgbClr val="475569"/>
-                </a:solidFill>
-                <a:latin typeface="Pretendard"/>
-              </a:rPr>
-              <a:t>• 사내 설계 가이드 — 표준 · 체크리스트 · 노하우</a:t>
-            </a:r>
-          </a:p>
-          <a:p>
-            <a:pPr algn="l">
-              <a:lnSpc>
-                <a:spcPct val="140000"/>
-              </a:lnSpc>
-            </a:pPr>
-            <a:r>
-              <a:rPr sz="1000" b="0" i="0">
-                <a:solidFill>
-                  <a:srgbClr val="475569"/>
-                </a:solidFill>
-                <a:latin typeface="Pretendard"/>
-              </a:rPr>
-              <a:t>• 타겟 시장 지표 — 지역 · 인증별 목표 (효율 · 소음)</a:t>
+                <a:spcPct val="135000"/>
+              </a:lnSpc>
+            </a:pPr>
+            <a:r>
+              <a:rPr sz="1000" b="0" i="0">
+                <a:solidFill>
+                  <a:srgbClr val="475569"/>
+                </a:solidFill>
+                <a:latin typeface="Pretendard"/>
+              </a:rPr>
+              <a:t>[모델] ──1:N── [컴포넌트]</a:t>
+            </a:r>
+          </a:p>
+          <a:p>
+            <a:pPr algn="l">
+              <a:lnSpc>
+                <a:spcPct val="135000"/>
+              </a:lnSpc>
+            </a:pPr>
+            <a:r>
+              <a:rPr sz="1000" b="0" i="0">
+                <a:solidFill>
+                  <a:srgbClr val="475569"/>
+                </a:solidFill>
+                <a:latin typeface="Pretendard"/>
+              </a:rPr>
+              <a:t/>
+            </a:r>
+          </a:p>
+          <a:p>
+            <a:pPr algn="l">
+              <a:lnSpc>
+                <a:spcPct val="135000"/>
+              </a:lnSpc>
+            </a:pPr>
+            <a:r>
+              <a:rPr sz="1000" b="0" i="0">
+                <a:solidFill>
+                  <a:srgbClr val="475569"/>
+                </a:solidFill>
+                <a:latin typeface="Pretendard"/>
+              </a:rPr>
+              <a:t>  │</a:t>
+            </a:r>
+          </a:p>
+          <a:p>
+            <a:pPr algn="l">
+              <a:lnSpc>
+                <a:spcPct val="135000"/>
+              </a:lnSpc>
+            </a:pPr>
+            <a:r>
+              <a:rPr sz="1000" b="0" i="0">
+                <a:solidFill>
+                  <a:srgbClr val="475569"/>
+                </a:solidFill>
+                <a:latin typeface="Pretendard"/>
+              </a:rPr>
+              <a:t/>
+            </a:r>
+          </a:p>
+          <a:p>
+            <a:pPr algn="l">
+              <a:lnSpc>
+                <a:spcPct val="135000"/>
+              </a:lnSpc>
+            </a:pPr>
+            <a:r>
+              <a:rPr sz="1000" b="0" i="0">
+                <a:solidFill>
+                  <a:srgbClr val="475569"/>
+                </a:solidFill>
+                <a:latin typeface="Pretendard"/>
+              </a:rPr>
+              <a:t>  1:N</a:t>
+            </a:r>
+          </a:p>
+          <a:p>
+            <a:pPr algn="l">
+              <a:lnSpc>
+                <a:spcPct val="135000"/>
+              </a:lnSpc>
+            </a:pPr>
+            <a:r>
+              <a:rPr sz="1000" b="0" i="0">
+                <a:solidFill>
+                  <a:srgbClr val="475569"/>
+                </a:solidFill>
+                <a:latin typeface="Pretendard"/>
+              </a:rPr>
+              <a:t/>
+            </a:r>
+          </a:p>
+          <a:p>
+            <a:pPr algn="l">
+              <a:lnSpc>
+                <a:spcPct val="135000"/>
+              </a:lnSpc>
+            </a:pPr>
+            <a:r>
+              <a:rPr sz="1000" b="0" i="0">
+                <a:solidFill>
+                  <a:srgbClr val="475569"/>
+                </a:solidFill>
+                <a:latin typeface="Pretendard"/>
+              </a:rPr>
+              <a:t>  ▼</a:t>
+            </a:r>
+          </a:p>
+          <a:p>
+            <a:pPr algn="l">
+              <a:lnSpc>
+                <a:spcPct val="135000"/>
+              </a:lnSpc>
+            </a:pPr>
+            <a:r>
+              <a:rPr sz="1000" b="0" i="0">
+                <a:solidFill>
+                  <a:srgbClr val="475569"/>
+                </a:solidFill>
+                <a:latin typeface="Pretendard"/>
+              </a:rPr>
+              <a:t/>
+            </a:r>
+          </a:p>
+          <a:p>
+            <a:pPr algn="l">
+              <a:lnSpc>
+                <a:spcPct val="135000"/>
+              </a:lnSpc>
+            </a:pPr>
+            <a:r>
+              <a:rPr sz="1000" b="0" i="0">
+                <a:solidFill>
+                  <a:srgbClr val="475569"/>
+                </a:solidFill>
+                <a:latin typeface="Pretendard"/>
+              </a:rPr>
+              <a:t>[실험 시리즈] ──1:N── [시계열 데이터]</a:t>
             </a:r>
           </a:p>
         </p:txBody>
@@ -7752,7 +7983,7 @@
             <a:avLst/>
           </a:prstGeom>
           <a:solidFill>
-            <a:srgbClr val="D97706"/>
+            <a:srgbClr val="7C3AED"/>
           </a:solidFill>
           <a:ln>
             <a:noFill/>
@@ -7810,11 +8041,11 @@
             <a:r>
               <a:rPr sz="850" b="1" i="0">
                 <a:solidFill>
-                  <a:srgbClr val="D97706"/>
+                  <a:srgbClr val="7C3AED"/>
                 </a:solidFill>
                 <a:latin typeface="Consolas"/>
               </a:rPr>
-              <a:t>필요성</a:t>
+              <a:t>엔티티 속성 예시</a:t>
             </a:r>
           </a:p>
         </p:txBody>
@@ -7828,7 +8059,7 @@
         <p:spPr>
           <a:xfrm>
             <a:off x="576072" y="4512564"/>
-            <a:ext cx="5240883" cy="914400"/>
+            <a:ext cx="5240883" cy="1522475"/>
           </a:xfrm>
           <a:prstGeom prst="rect">
             <a:avLst/>
@@ -7853,7 +8084,7 @@
                 </a:solidFill>
                 <a:latin typeface="Pretendard"/>
               </a:rPr>
-              <a:t>미실시 — 6개월 후 누락 데이터 발견 → 스키마 재설계</a:t>
+              <a:t>모델</a:t>
             </a:r>
           </a:p>
           <a:p>
@@ -7869,7 +8100,7 @@
                 </a:solidFill>
                 <a:latin typeface="Pretendard"/>
               </a:rPr>
-              <a:t>실시 — 사전 식별 · 부서 승인 절차 미리 시작</a:t>
+              <a:t/>
             </a:r>
           </a:p>
           <a:p>
@@ -7885,6 +8116,22 @@
                 </a:solidFill>
                 <a:latin typeface="Pretendard"/>
               </a:rPr>
+              <a:t>· model_id (PK)</a:t>
+            </a:r>
+          </a:p>
+          <a:p>
+            <a:pPr algn="l">
+              <a:lnSpc>
+                <a:spcPct val="135000"/>
+              </a:lnSpc>
+            </a:pPr>
+            <a:r>
+              <a:rPr sz="1000" b="0" i="0">
+                <a:solidFill>
+                  <a:srgbClr val="475569"/>
+                </a:solidFill>
+                <a:latin typeface="Pretendard"/>
+              </a:rPr>
               <a:t/>
             </a:r>
           </a:p>
@@ -7901,7 +8148,199 @@
                 </a:solidFill>
                 <a:latin typeface="Pretendard"/>
               </a:rPr>
-              <a:t>민감도 분류 시작점 — 단가 · 도면 등 사전 표시</a:t>
+              <a:t>· model_name</a:t>
+            </a:r>
+          </a:p>
+          <a:p>
+            <a:pPr algn="l">
+              <a:lnSpc>
+                <a:spcPct val="135000"/>
+              </a:lnSpc>
+            </a:pPr>
+            <a:r>
+              <a:rPr sz="1000" b="0" i="0">
+                <a:solidFill>
+                  <a:srgbClr val="475569"/>
+                </a:solidFill>
+                <a:latin typeface="Pretendard"/>
+              </a:rPr>
+              <a:t/>
+            </a:r>
+          </a:p>
+          <a:p>
+            <a:pPr algn="l">
+              <a:lnSpc>
+                <a:spcPct val="135000"/>
+              </a:lnSpc>
+            </a:pPr>
+            <a:r>
+              <a:rPr sz="1000" b="0" i="0">
+                <a:solidFill>
+                  <a:srgbClr val="475569"/>
+                </a:solidFill>
+                <a:latin typeface="Pretendard"/>
+              </a:rPr>
+              <a:t>· 인증 등급 · 양산 시작일 · 담당 부서</a:t>
+            </a:r>
+          </a:p>
+          <a:p>
+            <a:pPr algn="l">
+              <a:lnSpc>
+                <a:spcPct val="135000"/>
+              </a:lnSpc>
+            </a:pPr>
+            <a:r>
+              <a:rPr sz="1000" b="0" i="0">
+                <a:solidFill>
+                  <a:srgbClr val="475569"/>
+                </a:solidFill>
+                <a:latin typeface="Pretendard"/>
+              </a:rPr>
+              <a:t/>
+            </a:r>
+          </a:p>
+          <a:p>
+            <a:pPr algn="l">
+              <a:lnSpc>
+                <a:spcPct val="135000"/>
+              </a:lnSpc>
+            </a:pPr>
+            <a:r>
+              <a:rPr sz="1000" b="0" i="0">
+                <a:solidFill>
+                  <a:srgbClr val="475569"/>
+                </a:solidFill>
+                <a:latin typeface="Pretendard"/>
+              </a:rPr>
+              <a:t>컴포넌트</a:t>
+            </a:r>
+          </a:p>
+          <a:p>
+            <a:pPr algn="l">
+              <a:lnSpc>
+                <a:spcPct val="135000"/>
+              </a:lnSpc>
+            </a:pPr>
+            <a:r>
+              <a:rPr sz="1000" b="0" i="0">
+                <a:solidFill>
+                  <a:srgbClr val="475569"/>
+                </a:solidFill>
+                <a:latin typeface="Pretendard"/>
+              </a:rPr>
+              <a:t/>
+            </a:r>
+          </a:p>
+          <a:p>
+            <a:pPr algn="l">
+              <a:lnSpc>
+                <a:spcPct val="135000"/>
+              </a:lnSpc>
+            </a:pPr>
+            <a:r>
+              <a:rPr sz="1000" b="0" i="0">
+                <a:solidFill>
+                  <a:srgbClr val="475569"/>
+                </a:solidFill>
+                <a:latin typeface="Pretendard"/>
+              </a:rPr>
+              <a:t>· component_id (PK)</a:t>
+            </a:r>
+          </a:p>
+          <a:p>
+            <a:pPr algn="l">
+              <a:lnSpc>
+                <a:spcPct val="135000"/>
+              </a:lnSpc>
+            </a:pPr>
+            <a:r>
+              <a:rPr sz="1000" b="0" i="0">
+                <a:solidFill>
+                  <a:srgbClr val="475569"/>
+                </a:solidFill>
+                <a:latin typeface="Pretendard"/>
+              </a:rPr>
+              <a:t/>
+            </a:r>
+          </a:p>
+          <a:p>
+            <a:pPr algn="l">
+              <a:lnSpc>
+                <a:spcPct val="135000"/>
+              </a:lnSpc>
+            </a:pPr>
+            <a:r>
+              <a:rPr sz="1000" b="0" i="0">
+                <a:solidFill>
+                  <a:srgbClr val="475569"/>
+                </a:solidFill>
+                <a:latin typeface="Pretendard"/>
+              </a:rPr>
+              <a:t>· type (압축기 / HX / 팬 / EEV)</a:t>
+            </a:r>
+          </a:p>
+          <a:p>
+            <a:pPr algn="l">
+              <a:lnSpc>
+                <a:spcPct val="135000"/>
+              </a:lnSpc>
+            </a:pPr>
+            <a:r>
+              <a:rPr sz="1000" b="0" i="0">
+                <a:solidFill>
+                  <a:srgbClr val="475569"/>
+                </a:solidFill>
+                <a:latin typeface="Pretendard"/>
+              </a:rPr>
+              <a:t/>
+            </a:r>
+          </a:p>
+          <a:p>
+            <a:pPr algn="l">
+              <a:lnSpc>
+                <a:spcPct val="135000"/>
+              </a:lnSpc>
+            </a:pPr>
+            <a:r>
+              <a:rPr sz="1000" b="0" i="0">
+                <a:solidFill>
+                  <a:srgbClr val="475569"/>
+                </a:solidFill>
+                <a:latin typeface="Pretendard"/>
+              </a:rPr>
+              <a:t>· model_id (FK → 모델)</a:t>
+            </a:r>
+          </a:p>
+          <a:p>
+            <a:pPr algn="l">
+              <a:lnSpc>
+                <a:spcPct val="135000"/>
+              </a:lnSpc>
+            </a:pPr>
+            <a:r>
+              <a:rPr sz="1000" b="0" i="0">
+                <a:solidFill>
+                  <a:srgbClr val="475569"/>
+                </a:solidFill>
+                <a:latin typeface="Pretendard"/>
+              </a:rPr>
+              <a:t/>
+            </a:r>
+          </a:p>
+          <a:p>
+            <a:pPr algn="l">
+              <a:lnSpc>
+                <a:spcPct val="135000"/>
+              </a:lnSpc>
+            </a:pPr>
+            <a:r>
+              <a:rPr sz="1000" b="0" i="0">
+                <a:solidFill>
+                  <a:srgbClr val="475569"/>
+                </a:solidFill>
+                <a:latin typeface="Pretendard"/>
+              </a:rPr>
+              <a:t>· 사양 JSON</a:t>
             </a:r>
           </a:p>
         </p:txBody>
@@ -7968,7 +8407,7 @@
             <a:avLst/>
           </a:prstGeom>
           <a:solidFill>
-            <a:srgbClr val="0D9488"/>
+            <a:srgbClr val="D97706"/>
           </a:solidFill>
           <a:ln>
             <a:noFill/>
@@ -8026,11 +8465,11 @@
             <a:r>
               <a:rPr sz="850" b="1" i="0">
                 <a:solidFill>
-                  <a:srgbClr val="0D9488"/>
+                  <a:srgbClr val="D97706"/>
                 </a:solidFill>
                 <a:latin typeface="Consolas"/>
               </a:rPr>
-              <a:t>산출물</a:t>
+              <a:t>필요성</a:t>
             </a:r>
           </a:p>
         </p:txBody>
@@ -8044,7 +8483,7 @@
         <p:spPr>
           <a:xfrm>
             <a:off x="6374739" y="4512564"/>
-            <a:ext cx="5240883" cy="859536"/>
+            <a:ext cx="5240883" cy="640080"/>
           </a:xfrm>
           <a:prstGeom prst="rect">
             <a:avLst/>
@@ -8053,55 +8492,55 @@
         </p:spPr>
         <p:txBody>
           <a:bodyPr wrap="square" lIns="0" rIns="0" tIns="0" bIns="0" anchor="t">
-            <a:spAutoFit/>
+            <a:normAutofit fontScale="85000"/>
           </a:bodyPr>
           <a:lstStyle/>
           <a:p>
             <a:pPr algn="l">
               <a:lnSpc>
-                <a:spcPct val="140000"/>
-              </a:lnSpc>
-            </a:pPr>
-            <a:r>
-              <a:rPr sz="1000" b="0" i="0">
-                <a:solidFill>
-                  <a:srgbClr val="475569"/>
-                </a:solidFill>
-                <a:latin typeface="Pretendard"/>
-              </a:rPr>
-              <a:t>• 데이터 소스 카탈로그 (스프레드시트)</a:t>
-            </a:r>
-          </a:p>
-          <a:p>
-            <a:pPr algn="l">
-              <a:lnSpc>
-                <a:spcPct val="140000"/>
-              </a:lnSpc>
-            </a:pPr>
-            <a:r>
-              <a:rPr sz="1000" b="0" i="0">
-                <a:solidFill>
-                  <a:srgbClr val="475569"/>
-                </a:solidFill>
-                <a:latin typeface="Pretendard"/>
-              </a:rPr>
-              <a:t>• 부서별 책임자 연락 목록</a:t>
-            </a:r>
-          </a:p>
-          <a:p>
-            <a:pPr algn="l">
-              <a:lnSpc>
-                <a:spcPct val="140000"/>
-              </a:lnSpc>
-            </a:pPr>
-            <a:r>
-              <a:rPr sz="1000" b="0" i="0">
-                <a:solidFill>
-                  <a:srgbClr val="475569"/>
-                </a:solidFill>
-                <a:latin typeface="Pretendard"/>
-              </a:rPr>
-              <a:t>• 접근 권한 요청 우선순위</a:t>
+                <a:spcPct val="135000"/>
+              </a:lnSpc>
+            </a:pPr>
+            <a:r>
+              <a:rPr sz="1000" b="0" i="0">
+                <a:solidFill>
+                  <a:srgbClr val="475569"/>
+                </a:solidFill>
+                <a:latin typeface="Pretendard"/>
+              </a:rPr>
+              <a:t>검색 효율 결정 — "X 모델 압축기" 쿼리 속도가 여기서 정해짐</a:t>
+            </a:r>
+          </a:p>
+          <a:p>
+            <a:pPr algn="l">
+              <a:lnSpc>
+                <a:spcPct val="135000"/>
+              </a:lnSpc>
+            </a:pPr>
+            <a:r>
+              <a:rPr sz="1000" b="0" i="0">
+                <a:solidFill>
+                  <a:srgbClr val="475569"/>
+                </a:solidFill>
+                <a:latin typeface="Pretendard"/>
+              </a:rPr>
+              <a:t>중복 방지 — 단일 진실 원천 (Single Source of Truth)</a:t>
+            </a:r>
+          </a:p>
+          <a:p>
+            <a:pPr algn="l">
+              <a:lnSpc>
+                <a:spcPct val="135000"/>
+              </a:lnSpc>
+            </a:pPr>
+            <a:r>
+              <a:rPr sz="1000" b="0" i="0">
+                <a:solidFill>
+                  <a:srgbClr val="475569"/>
+                </a:solidFill>
+                <a:latin typeface="Pretendard"/>
+              </a:rPr>
+              <a:t>확장성 — 새 도메인 추가 위치 사전 정의</a:t>
             </a:r>
           </a:p>
         </p:txBody>
@@ -8140,7 +8579,7 @@
                 </a:solidFill>
                 <a:latin typeface="Consolas"/>
               </a:rPr>
-              <a:t>14 / 18</a:t>
+              <a:t>14 / 17</a:t>
             </a:r>
           </a:p>
         </p:txBody>
@@ -8205,7 +8644,7 @@
                 </a:solidFill>
                 <a:latin typeface="Consolas"/>
               </a:rPr>
-              <a:t>E-1-2. ⓑ ① DB 설계 · 요소 2</a:t>
+              <a:t>E-1-3. ⓑ ① DB 설계 · 요소 3</a:t>
             </a:r>
           </a:p>
         </p:txBody>
@@ -8244,7 +8683,7 @@
                 </a:solidFill>
                 <a:latin typeface="Pretendard"/>
               </a:rPr>
-              <a:t>ERD 모델링</a:t>
+              <a:t>스키마 + 인덱스 설계</a:t>
             </a:r>
           </a:p>
         </p:txBody>
@@ -8283,7 +8722,7 @@
                 </a:solidFill>
                 <a:latin typeface="Pretendard"/>
               </a:rPr>
-              <a:t>엔티티 · 관계도 정의</a:t>
+              <a:t>테이블 정의 · 검색 최적화</a:t>
             </a:r>
           </a:p>
         </p:txBody>
@@ -8451,7 +8890,7 @@
                 </a:solidFill>
                 <a:latin typeface="Pretendard"/>
               </a:rPr>
-              <a:t>데이터 단위와 연결 구조 청사진</a:t>
+              <a:t>ERD → 실제 DB 테이블 + 인덱스</a:t>
             </a:r>
           </a:p>
         </p:txBody>
@@ -8465,7 +8904,7 @@
         <p:spPr>
           <a:xfrm>
             <a:off x="576072" y="2660904"/>
-            <a:ext cx="5240883" cy="457200"/>
+            <a:ext cx="5240883" cy="365760"/>
           </a:xfrm>
           <a:prstGeom prst="rect">
             <a:avLst/>
@@ -8490,23 +8929,7 @@
                 </a:solidFill>
                 <a:latin typeface="Pretendard"/>
               </a:rPr>
-              <a:t>Entity-Relationship Diagram</a:t>
-            </a:r>
-          </a:p>
-          <a:p>
-            <a:pPr algn="l">
-              <a:lnSpc>
-                <a:spcPct val="135000"/>
-              </a:lnSpc>
-            </a:pPr>
-            <a:r>
-              <a:rPr sz="1000" b="0" i="0">
-                <a:solidFill>
-                  <a:srgbClr val="475569"/>
-                </a:solidFill>
-                <a:latin typeface="Pretendard"/>
-              </a:rPr>
-              <a:t>엔티티 식별 · 속성 정의 · 관계 표현</a:t>
+              <a:t>테이블 · 컬럼 · 데이터 타입 · 외래키 · 인덱스 · 파티셔닝 정의</a:t>
             </a:r>
           </a:p>
         </p:txBody>
@@ -8635,7 +9058,7 @@
                 </a:solidFill>
                 <a:latin typeface="Consolas"/>
               </a:rPr>
-              <a:t>관계 예시</a:t>
+              <a:t>구성 요소</a:t>
             </a:r>
           </a:p>
         </p:txBody>
@@ -8649,7 +9072,7 @@
         <p:spPr>
           <a:xfrm>
             <a:off x="6374739" y="2249424"/>
-            <a:ext cx="5240883" cy="1522476"/>
+            <a:ext cx="5240883" cy="1371600"/>
           </a:xfrm>
           <a:prstGeom prst="rect">
             <a:avLst/>
@@ -8658,151 +9081,87 @@
         </p:spPr>
         <p:txBody>
           <a:bodyPr wrap="square" lIns="0" rIns="0" tIns="0" bIns="0" anchor="t">
-            <a:normAutofit fontScale="85000"/>
+            <a:spAutoFit/>
           </a:bodyPr>
           <a:lstStyle/>
           <a:p>
             <a:pPr algn="l">
               <a:lnSpc>
-                <a:spcPct val="135000"/>
-              </a:lnSpc>
-            </a:pPr>
-            <a:r>
-              <a:rPr sz="1000" b="0" i="0">
-                <a:solidFill>
-                  <a:srgbClr val="475569"/>
-                </a:solidFill>
-                <a:latin typeface="Pretendard"/>
-              </a:rPr>
-              <a:t>[모델] ──1:N── [컴포넌트]</a:t>
-            </a:r>
-          </a:p>
-          <a:p>
-            <a:pPr algn="l">
-              <a:lnSpc>
-                <a:spcPct val="135000"/>
-              </a:lnSpc>
-            </a:pPr>
-            <a:r>
-              <a:rPr sz="1000" b="0" i="0">
-                <a:solidFill>
-                  <a:srgbClr val="475569"/>
-                </a:solidFill>
-                <a:latin typeface="Pretendard"/>
-              </a:rPr>
-              <a:t/>
-            </a:r>
-          </a:p>
-          <a:p>
-            <a:pPr algn="l">
-              <a:lnSpc>
-                <a:spcPct val="135000"/>
-              </a:lnSpc>
-            </a:pPr>
-            <a:r>
-              <a:rPr sz="1000" b="0" i="0">
-                <a:solidFill>
-                  <a:srgbClr val="475569"/>
-                </a:solidFill>
-                <a:latin typeface="Pretendard"/>
-              </a:rPr>
-              <a:t>  │</a:t>
-            </a:r>
-          </a:p>
-          <a:p>
-            <a:pPr algn="l">
-              <a:lnSpc>
-                <a:spcPct val="135000"/>
-              </a:lnSpc>
-            </a:pPr>
-            <a:r>
-              <a:rPr sz="1000" b="0" i="0">
-                <a:solidFill>
-                  <a:srgbClr val="475569"/>
-                </a:solidFill>
-                <a:latin typeface="Pretendard"/>
-              </a:rPr>
-              <a:t/>
-            </a:r>
-          </a:p>
-          <a:p>
-            <a:pPr algn="l">
-              <a:lnSpc>
-                <a:spcPct val="135000"/>
-              </a:lnSpc>
-            </a:pPr>
-            <a:r>
-              <a:rPr sz="1000" b="0" i="0">
-                <a:solidFill>
-                  <a:srgbClr val="475569"/>
-                </a:solidFill>
-                <a:latin typeface="Pretendard"/>
-              </a:rPr>
-              <a:t>  1:N</a:t>
-            </a:r>
-          </a:p>
-          <a:p>
-            <a:pPr algn="l">
-              <a:lnSpc>
-                <a:spcPct val="135000"/>
-              </a:lnSpc>
-            </a:pPr>
-            <a:r>
-              <a:rPr sz="1000" b="0" i="0">
-                <a:solidFill>
-                  <a:srgbClr val="475569"/>
-                </a:solidFill>
-                <a:latin typeface="Pretendard"/>
-              </a:rPr>
-              <a:t/>
-            </a:r>
-          </a:p>
-          <a:p>
-            <a:pPr algn="l">
-              <a:lnSpc>
-                <a:spcPct val="135000"/>
-              </a:lnSpc>
-            </a:pPr>
-            <a:r>
-              <a:rPr sz="1000" b="0" i="0">
-                <a:solidFill>
-                  <a:srgbClr val="475569"/>
-                </a:solidFill>
-                <a:latin typeface="Pretendard"/>
-              </a:rPr>
-              <a:t>  ▼</a:t>
-            </a:r>
-          </a:p>
-          <a:p>
-            <a:pPr algn="l">
-              <a:lnSpc>
-                <a:spcPct val="135000"/>
-              </a:lnSpc>
-            </a:pPr>
-            <a:r>
-              <a:rPr sz="1000" b="0" i="0">
-                <a:solidFill>
-                  <a:srgbClr val="475569"/>
-                </a:solidFill>
-                <a:latin typeface="Pretendard"/>
-              </a:rPr>
-              <a:t/>
-            </a:r>
-          </a:p>
-          <a:p>
-            <a:pPr algn="l">
-              <a:lnSpc>
-                <a:spcPct val="135000"/>
-              </a:lnSpc>
-            </a:pPr>
-            <a:r>
-              <a:rPr sz="1000" b="0" i="0">
-                <a:solidFill>
-                  <a:srgbClr val="475569"/>
-                </a:solidFill>
-                <a:latin typeface="Pretendard"/>
-              </a:rPr>
-              <a:t>[실험 시리즈] ──1:N── [시계열 데이터]</a:t>
+                <a:spcPct val="140000"/>
+              </a:lnSpc>
+            </a:pPr>
+            <a:r>
+              <a:rPr sz="1000" b="0" i="0">
+                <a:solidFill>
+                  <a:srgbClr val="475569"/>
+                </a:solidFill>
+                <a:latin typeface="Pretendard"/>
+              </a:rPr>
+              <a:t>• 테이블 정의 — 엔티티 → 테이블 · 속성 → 컬럼</a:t>
+            </a:r>
+          </a:p>
+          <a:p>
+            <a:pPr algn="l">
+              <a:lnSpc>
+                <a:spcPct val="140000"/>
+              </a:lnSpc>
+            </a:pPr>
+            <a:r>
+              <a:rPr sz="1000" b="0" i="0">
+                <a:solidFill>
+                  <a:srgbClr val="475569"/>
+                </a:solidFill>
+                <a:latin typeface="Pretendard"/>
+              </a:rPr>
+              <a:t>• 데이터 타입 — VARCHAR · INTEGER · TIMESTAMP · JSONB</a:t>
+            </a:r>
+          </a:p>
+          <a:p>
+            <a:pPr algn="l">
+              <a:lnSpc>
+                <a:spcPct val="140000"/>
+              </a:lnSpc>
+            </a:pPr>
+            <a:r>
+              <a:rPr sz="1000" b="0" i="0">
+                <a:solidFill>
+                  <a:srgbClr val="475569"/>
+                </a:solidFill>
+                <a:latin typeface="Pretendard"/>
+              </a:rPr>
+              <a:t>• 외래키 — DB 레벨 관계 강제</a:t>
+            </a:r>
+          </a:p>
+          <a:p>
+            <a:pPr algn="l">
+              <a:lnSpc>
+                <a:spcPct val="140000"/>
+              </a:lnSpc>
+            </a:pPr>
+            <a:r>
+              <a:rPr sz="1000" b="0" i="0">
+                <a:solidFill>
+                  <a:srgbClr val="475569"/>
+                </a:solidFill>
+                <a:latin typeface="Pretendard"/>
+              </a:rPr>
+              <a:t>• 인덱스 — 검색 빈번 컬럼 (model_id · type · 날짜)</a:t>
+            </a:r>
+          </a:p>
+          <a:p>
+            <a:pPr algn="l">
+              <a:lnSpc>
+                <a:spcPct val="140000"/>
+              </a:lnSpc>
+            </a:pPr>
+            <a:r>
+              <a:rPr sz="1000" b="0" i="0">
+                <a:solidFill>
+                  <a:srgbClr val="475569"/>
+                </a:solidFill>
+                <a:latin typeface="Pretendard"/>
+              </a:rPr>
+              <a:t>• 파티셔닝 — 시계열 = 월별 분할 (TimescaleDB)</a:t>
             </a:r>
           </a:p>
         </p:txBody>
@@ -8869,7 +9228,7 @@
             <a:avLst/>
           </a:prstGeom>
           <a:solidFill>
-            <a:srgbClr val="7C3AED"/>
+            <a:srgbClr val="DC2626"/>
           </a:solidFill>
           <a:ln>
             <a:noFill/>
@@ -8927,11 +9286,11 @@
             <a:r>
               <a:rPr sz="850" b="1" i="0">
                 <a:solidFill>
-                  <a:srgbClr val="7C3AED"/>
+                  <a:srgbClr val="DC2626"/>
                 </a:solidFill>
                 <a:latin typeface="Consolas"/>
               </a:rPr>
-              <a:t>엔티티 속성 예시</a:t>
+              <a:t>인덱스 효과 — 100×</a:t>
             </a:r>
           </a:p>
         </p:txBody>
@@ -8945,7 +9304,7 @@
         <p:spPr>
           <a:xfrm>
             <a:off x="576072" y="4512564"/>
-            <a:ext cx="5240883" cy="1522475"/>
+            <a:ext cx="5240883" cy="914400"/>
           </a:xfrm>
           <a:prstGeom prst="rect">
             <a:avLst/>
@@ -8970,7 +9329,7 @@
                 </a:solidFill>
                 <a:latin typeface="Pretendard"/>
               </a:rPr>
-              <a:t>모델</a:t>
+              <a:t>인덱스 없음 — "X 모델 압축기" 검색 5초</a:t>
             </a:r>
           </a:p>
           <a:p>
@@ -8986,6 +9345,22 @@
                 </a:solidFill>
                 <a:latin typeface="Pretendard"/>
               </a:rPr>
+              <a:t>인덱스 있음 — 같은 쿼리 50ms</a:t>
+            </a:r>
+          </a:p>
+          <a:p>
+            <a:pPr algn="l">
+              <a:lnSpc>
+                <a:spcPct val="135000"/>
+              </a:lnSpc>
+            </a:pPr>
+            <a:r>
+              <a:rPr sz="1000" b="0" i="0">
+                <a:solidFill>
+                  <a:srgbClr val="475569"/>
+                </a:solidFill>
+                <a:latin typeface="Pretendard"/>
+              </a:rPr>
               <a:t/>
             </a:r>
           </a:p>
@@ -9002,231 +9377,7 @@
                 </a:solidFill>
                 <a:latin typeface="Pretendard"/>
               </a:rPr>
-              <a:t>· model_id (PK)</a:t>
-            </a:r>
-          </a:p>
-          <a:p>
-            <a:pPr algn="l">
-              <a:lnSpc>
-                <a:spcPct val="135000"/>
-              </a:lnSpc>
-            </a:pPr>
-            <a:r>
-              <a:rPr sz="1000" b="0" i="0">
-                <a:solidFill>
-                  <a:srgbClr val="475569"/>
-                </a:solidFill>
-                <a:latin typeface="Pretendard"/>
-              </a:rPr>
-              <a:t/>
-            </a:r>
-          </a:p>
-          <a:p>
-            <a:pPr algn="l">
-              <a:lnSpc>
-                <a:spcPct val="135000"/>
-              </a:lnSpc>
-            </a:pPr>
-            <a:r>
-              <a:rPr sz="1000" b="0" i="0">
-                <a:solidFill>
-                  <a:srgbClr val="475569"/>
-                </a:solidFill>
-                <a:latin typeface="Pretendard"/>
-              </a:rPr>
-              <a:t>· model_name</a:t>
-            </a:r>
-          </a:p>
-          <a:p>
-            <a:pPr algn="l">
-              <a:lnSpc>
-                <a:spcPct val="135000"/>
-              </a:lnSpc>
-            </a:pPr>
-            <a:r>
-              <a:rPr sz="1000" b="0" i="0">
-                <a:solidFill>
-                  <a:srgbClr val="475569"/>
-                </a:solidFill>
-                <a:latin typeface="Pretendard"/>
-              </a:rPr>
-              <a:t/>
-            </a:r>
-          </a:p>
-          <a:p>
-            <a:pPr algn="l">
-              <a:lnSpc>
-                <a:spcPct val="135000"/>
-              </a:lnSpc>
-            </a:pPr>
-            <a:r>
-              <a:rPr sz="1000" b="0" i="0">
-                <a:solidFill>
-                  <a:srgbClr val="475569"/>
-                </a:solidFill>
-                <a:latin typeface="Pretendard"/>
-              </a:rPr>
-              <a:t>· 인증 등급 · 양산 시작일 · 담당 부서</a:t>
-            </a:r>
-          </a:p>
-          <a:p>
-            <a:pPr algn="l">
-              <a:lnSpc>
-                <a:spcPct val="135000"/>
-              </a:lnSpc>
-            </a:pPr>
-            <a:r>
-              <a:rPr sz="1000" b="0" i="0">
-                <a:solidFill>
-                  <a:srgbClr val="475569"/>
-                </a:solidFill>
-                <a:latin typeface="Pretendard"/>
-              </a:rPr>
-              <a:t/>
-            </a:r>
-          </a:p>
-          <a:p>
-            <a:pPr algn="l">
-              <a:lnSpc>
-                <a:spcPct val="135000"/>
-              </a:lnSpc>
-            </a:pPr>
-            <a:r>
-              <a:rPr sz="1000" b="0" i="0">
-                <a:solidFill>
-                  <a:srgbClr val="475569"/>
-                </a:solidFill>
-                <a:latin typeface="Pretendard"/>
-              </a:rPr>
-              <a:t>컴포넌트</a:t>
-            </a:r>
-          </a:p>
-          <a:p>
-            <a:pPr algn="l">
-              <a:lnSpc>
-                <a:spcPct val="135000"/>
-              </a:lnSpc>
-            </a:pPr>
-            <a:r>
-              <a:rPr sz="1000" b="0" i="0">
-                <a:solidFill>
-                  <a:srgbClr val="475569"/>
-                </a:solidFill>
-                <a:latin typeface="Pretendard"/>
-              </a:rPr>
-              <a:t/>
-            </a:r>
-          </a:p>
-          <a:p>
-            <a:pPr algn="l">
-              <a:lnSpc>
-                <a:spcPct val="135000"/>
-              </a:lnSpc>
-            </a:pPr>
-            <a:r>
-              <a:rPr sz="1000" b="0" i="0">
-                <a:solidFill>
-                  <a:srgbClr val="475569"/>
-                </a:solidFill>
-                <a:latin typeface="Pretendard"/>
-              </a:rPr>
-              <a:t>· component_id (PK)</a:t>
-            </a:r>
-          </a:p>
-          <a:p>
-            <a:pPr algn="l">
-              <a:lnSpc>
-                <a:spcPct val="135000"/>
-              </a:lnSpc>
-            </a:pPr>
-            <a:r>
-              <a:rPr sz="1000" b="0" i="0">
-                <a:solidFill>
-                  <a:srgbClr val="475569"/>
-                </a:solidFill>
-                <a:latin typeface="Pretendard"/>
-              </a:rPr>
-              <a:t/>
-            </a:r>
-          </a:p>
-          <a:p>
-            <a:pPr algn="l">
-              <a:lnSpc>
-                <a:spcPct val="135000"/>
-              </a:lnSpc>
-            </a:pPr>
-            <a:r>
-              <a:rPr sz="1000" b="0" i="0">
-                <a:solidFill>
-                  <a:srgbClr val="475569"/>
-                </a:solidFill>
-                <a:latin typeface="Pretendard"/>
-              </a:rPr>
-              <a:t>· type (압축기 / HX / 팬 / EEV)</a:t>
-            </a:r>
-          </a:p>
-          <a:p>
-            <a:pPr algn="l">
-              <a:lnSpc>
-                <a:spcPct val="135000"/>
-              </a:lnSpc>
-            </a:pPr>
-            <a:r>
-              <a:rPr sz="1000" b="0" i="0">
-                <a:solidFill>
-                  <a:srgbClr val="475569"/>
-                </a:solidFill>
-                <a:latin typeface="Pretendard"/>
-              </a:rPr>
-              <a:t/>
-            </a:r>
-          </a:p>
-          <a:p>
-            <a:pPr algn="l">
-              <a:lnSpc>
-                <a:spcPct val="135000"/>
-              </a:lnSpc>
-            </a:pPr>
-            <a:r>
-              <a:rPr sz="1000" b="0" i="0">
-                <a:solidFill>
-                  <a:srgbClr val="475569"/>
-                </a:solidFill>
-                <a:latin typeface="Pretendard"/>
-              </a:rPr>
-              <a:t>· model_id (FK → 모델)</a:t>
-            </a:r>
-          </a:p>
-          <a:p>
-            <a:pPr algn="l">
-              <a:lnSpc>
-                <a:spcPct val="135000"/>
-              </a:lnSpc>
-            </a:pPr>
-            <a:r>
-              <a:rPr sz="1000" b="0" i="0">
-                <a:solidFill>
-                  <a:srgbClr val="475569"/>
-                </a:solidFill>
-                <a:latin typeface="Pretendard"/>
-              </a:rPr>
-              <a:t/>
-            </a:r>
-          </a:p>
-          <a:p>
-            <a:pPr algn="l">
-              <a:lnSpc>
-                <a:spcPct val="135000"/>
-              </a:lnSpc>
-            </a:pPr>
-            <a:r>
-              <a:rPr sz="1000" b="0" i="0">
-                <a:solidFill>
-                  <a:srgbClr val="475569"/>
-                </a:solidFill>
-                <a:latin typeface="Pretendard"/>
-              </a:rPr>
-              <a:t>· 사양 JSON</a:t>
+              <a:t>→ 사용자 체감 큰 차이 · AI 응답 속도 직결</a:t>
             </a:r>
           </a:p>
         </p:txBody>
@@ -9355,7 +9506,7 @@
                 </a:solidFill>
                 <a:latin typeface="Consolas"/>
               </a:rPr>
-              <a:t>필요성</a:t>
+              <a:t>DB 엔진 선정</a:t>
             </a:r>
           </a:p>
         </p:txBody>
@@ -9369,7 +9520,7 @@
         <p:spPr>
           <a:xfrm>
             <a:off x="6374739" y="4512564"/>
-            <a:ext cx="5240883" cy="640080"/>
+            <a:ext cx="5240883" cy="1097280"/>
           </a:xfrm>
           <a:prstGeom prst="rect">
             <a:avLst/>
@@ -9394,7 +9545,7 @@
                 </a:solidFill>
                 <a:latin typeface="Pretendard"/>
               </a:rPr>
-              <a:t>검색 효율 결정 — "X 모델 압축기" 쿼리 속도가 여기서 정해짐</a:t>
+              <a:t>PostgreSQL — 정형 데이터 · 관계형</a:t>
             </a:r>
           </a:p>
           <a:p>
@@ -9410,7 +9561,7 @@
                 </a:solidFill>
                 <a:latin typeface="Pretendard"/>
               </a:rPr>
-              <a:t>중복 방지 — 단일 진실 원천 (Single Source of Truth)</a:t>
+              <a:t>TimescaleDB — 시계열 확장</a:t>
             </a:r>
           </a:p>
           <a:p>
@@ -9426,7 +9577,39 @@
                 </a:solidFill>
                 <a:latin typeface="Pretendard"/>
               </a:rPr>
-              <a:t>확장성 — 새 도메인 추가 위치 사전 정의</a:t>
+              <a:t>Qdrant · Chroma — 벡터 검색 (RAG용)</a:t>
+            </a:r>
+          </a:p>
+          <a:p>
+            <a:pPr algn="l">
+              <a:lnSpc>
+                <a:spcPct val="135000"/>
+              </a:lnSpc>
+            </a:pPr>
+            <a:r>
+              <a:rPr sz="1000" b="0" i="0">
+                <a:solidFill>
+                  <a:srgbClr val="475569"/>
+                </a:solidFill>
+                <a:latin typeface="Pretendard"/>
+              </a:rPr>
+              <a:t/>
+            </a:r>
+          </a:p>
+          <a:p>
+            <a:pPr algn="l">
+              <a:lnSpc>
+                <a:spcPct val="135000"/>
+              </a:lnSpc>
+            </a:pPr>
+            <a:r>
+              <a:rPr sz="1000" b="0" i="0">
+                <a:solidFill>
+                  <a:srgbClr val="475569"/>
+                </a:solidFill>
+                <a:latin typeface="Pretendard"/>
+              </a:rPr>
+              <a:t>보안 · 확장성 · 비용 종합 결정</a:t>
             </a:r>
           </a:p>
         </p:txBody>
@@ -9465,7 +9648,7 @@
                 </a:solidFill>
                 <a:latin typeface="Consolas"/>
               </a:rPr>
-              <a:t>15 / 18</a:t>
+              <a:t>15 / 17</a:t>
             </a:r>
           </a:p>
         </p:txBody>
@@ -9530,7 +9713,7 @@
                 </a:solidFill>
                 <a:latin typeface="Consolas"/>
               </a:rPr>
-              <a:t>E-1-3. ⓑ ① DB 설계 · 요소 3</a:t>
+              <a:t>E-1-4. ⓑ ① DB 설계 · 요소 4</a:t>
             </a:r>
           </a:p>
         </p:txBody>
@@ -9569,7 +9752,7 @@
                 </a:solidFill>
                 <a:latin typeface="Pretendard"/>
               </a:rPr>
-              <a:t>스키마 + 인덱스 설계</a:t>
+              <a:t>품질 기준 정의</a:t>
             </a:r>
           </a:p>
         </p:txBody>
@@ -9608,7 +9791,7 @@
                 </a:solidFill>
                 <a:latin typeface="Pretendard"/>
               </a:rPr>
-              <a:t>테이블 정의 · 검색 최적화</a:t>
+              <a:t>좋은 데이터 vs 나쁜 데이터 명시화</a:t>
             </a:r>
           </a:p>
         </p:txBody>
@@ -9776,7 +9959,7 @@
                 </a:solidFill>
                 <a:latin typeface="Pretendard"/>
               </a:rPr>
-              <a:t>ERD → 실제 DB 테이블 + 인덱스</a:t>
+              <a:t>자동 검증 가능한 명시적 룰</a:t>
             </a:r>
           </a:p>
         </p:txBody>
@@ -9815,7 +9998,7 @@
                 </a:solidFill>
                 <a:latin typeface="Pretendard"/>
               </a:rPr>
-              <a:t>테이블 · 컬럼 · 데이터 타입 · 외래키 · 인덱스 · 파티셔닝 정의</a:t>
+              <a:t>"좋은 데이터" 판단 기준 → 코드화 → ⑥ 검증·품질 트랙의 입력</a:t>
             </a:r>
           </a:p>
         </p:txBody>
@@ -9944,7 +10127,7 @@
                 </a:solidFill>
                 <a:latin typeface="Consolas"/>
               </a:rPr>
-              <a:t>구성 요소</a:t>
+              <a:t>4가지 차원</a:t>
             </a:r>
           </a:p>
         </p:txBody>
@@ -9958,7 +10141,7 @@
         <p:spPr>
           <a:xfrm>
             <a:off x="6374739" y="2249424"/>
-            <a:ext cx="5240883" cy="1371600"/>
+            <a:ext cx="5240883" cy="1115568"/>
           </a:xfrm>
           <a:prstGeom prst="rect">
             <a:avLst/>
@@ -9983,7 +10166,7 @@
                 </a:solidFill>
                 <a:latin typeface="Pretendard"/>
               </a:rPr>
-              <a:t>• 테이블 정의 — 엔티티 → 테이블 · 속성 → 컬럼</a:t>
+              <a:t>• 완결성 (Completeness) — 필수 필드 채워짐? 미충족 시 reject</a:t>
             </a:r>
           </a:p>
           <a:p>
@@ -9999,7 +10182,7 @@
                 </a:solidFill>
                 <a:latin typeface="Pretendard"/>
               </a:rPr>
-              <a:t>• 데이터 타입 — VARCHAR · INTEGER · TIMESTAMP · JSONB</a:t>
+              <a:t>• 일관성 (Consistency) — 같은 의미 = 같은 형식? cc · ㎤ 통일 강제</a:t>
             </a:r>
           </a:p>
           <a:p>
@@ -10015,7 +10198,7 @@
                 </a:solidFill>
                 <a:latin typeface="Pretendard"/>
               </a:rPr>
-              <a:t>• 외래키 — DB 레벨 관계 강제</a:t>
+              <a:t>• 정확성 (Accuracy) — 값이 사실과 일치? 음수 압력 자동 검출</a:t>
             </a:r>
           </a:p>
           <a:p>
@@ -10031,23 +10214,7 @@
                 </a:solidFill>
                 <a:latin typeface="Pretendard"/>
               </a:rPr>
-              <a:t>• 인덱스 — 검색 빈번 컬럼 (model_id · type · 날짜)</a:t>
-            </a:r>
-          </a:p>
-          <a:p>
-            <a:pPr algn="l">
-              <a:lnSpc>
-                <a:spcPct val="140000"/>
-              </a:lnSpc>
-            </a:pPr>
-            <a:r>
-              <a:rPr sz="1000" b="0" i="0">
-                <a:solidFill>
-                  <a:srgbClr val="475569"/>
-                </a:solidFill>
-                <a:latin typeface="Pretendard"/>
-              </a:rPr>
-              <a:t>• 파티셔닝 — 시계열 = 월별 분할 (TimescaleDB)</a:t>
+              <a:t>• 최신성 (Timeliness) — 데이터 수명? 5년 이상 → "오래됨" 라벨</a:t>
             </a:r>
           </a:p>
         </p:txBody>
@@ -10114,7 +10281,7 @@
             <a:avLst/>
           </a:prstGeom>
           <a:solidFill>
-            <a:srgbClr val="DC2626"/>
+            <a:srgbClr val="7C3AED"/>
           </a:solidFill>
           <a:ln>
             <a:noFill/>
@@ -10172,11 +10339,11 @@
             <a:r>
               <a:rPr sz="850" b="1" i="0">
                 <a:solidFill>
-                  <a:srgbClr val="DC2626"/>
+                  <a:srgbClr val="7C3AED"/>
                 </a:solidFill>
                 <a:latin typeface="Consolas"/>
               </a:rPr>
-              <a:t>인덱스 효과 — 100×</a:t>
+              <a:t>구체 룰 예시</a:t>
             </a:r>
           </a:p>
         </p:txBody>
@@ -10190,7 +10357,7 @@
         <p:spPr>
           <a:xfrm>
             <a:off x="576072" y="4512564"/>
-            <a:ext cx="5240883" cy="914400"/>
+            <a:ext cx="5240883" cy="1522475"/>
           </a:xfrm>
           <a:prstGeom prst="rect">
             <a:avLst/>
@@ -10215,7 +10382,7 @@
                 </a:solidFill>
                 <a:latin typeface="Pretendard"/>
               </a:rPr>
-              <a:t>인덱스 없음 — "X 모델 압축기" 검색 5초</a:t>
+              <a:t>· 실험 온도 −40°C ~ 60°C 외 → reject</a:t>
             </a:r>
           </a:p>
           <a:p>
@@ -10231,7 +10398,7 @@
                 </a:solidFill>
                 <a:latin typeface="Pretendard"/>
               </a:rPr>
-              <a:t>인덱스 있음 — 같은 쿼리 50ms</a:t>
+              <a:t/>
             </a:r>
           </a:p>
           <a:p>
@@ -10247,6 +10414,22 @@
                 </a:solidFill>
                 <a:latin typeface="Pretendard"/>
               </a:rPr>
+              <a:t>· 압축기 RPM 0 ~ 7000 외 → flag</a:t>
+            </a:r>
+          </a:p>
+          <a:p>
+            <a:pPr algn="l">
+              <a:lnSpc>
+                <a:spcPct val="135000"/>
+              </a:lnSpc>
+            </a:pPr>
+            <a:r>
+              <a:rPr sz="1000" b="0" i="0">
+                <a:solidFill>
+                  <a:srgbClr val="475569"/>
+                </a:solidFill>
+                <a:latin typeface="Pretendard"/>
+              </a:rPr>
               <a:t/>
             </a:r>
           </a:p>
@@ -10263,7 +10446,39 @@
                 </a:solidFill>
                 <a:latin typeface="Pretendard"/>
               </a:rPr>
-              <a:t>→ 사용자 체감 큰 차이 · AI 응답 속도 직결</a:t>
+              <a:t>· 시계열 샘플링 변동 30% 초과 → warning</a:t>
+            </a:r>
+          </a:p>
+          <a:p>
+            <a:pPr algn="l">
+              <a:lnSpc>
+                <a:spcPct val="135000"/>
+              </a:lnSpc>
+            </a:pPr>
+            <a:r>
+              <a:rPr sz="1000" b="0" i="0">
+                <a:solidFill>
+                  <a:srgbClr val="475569"/>
+                </a:solidFill>
+                <a:latin typeface="Pretendard"/>
+              </a:rPr>
+              <a:t/>
+            </a:r>
+          </a:p>
+          <a:p>
+            <a:pPr algn="l">
+              <a:lnSpc>
+                <a:spcPct val="135000"/>
+              </a:lnSpc>
+            </a:pPr>
+            <a:r>
+              <a:rPr sz="1000" b="0" i="0">
+                <a:solidFill>
+                  <a:srgbClr val="475569"/>
+                </a:solidFill>
+                <a:latin typeface="Pretendard"/>
+              </a:rPr>
+              <a:t>· 시험 보고서 12개월 미갱신 → "오래됨"</a:t>
             </a:r>
           </a:p>
         </p:txBody>
@@ -10392,7 +10607,7 @@
                 </a:solidFill>
                 <a:latin typeface="Consolas"/>
               </a:rPr>
-              <a:t>DB 엔진 선정</a:t>
+              <a:t>필요성</a:t>
             </a:r>
           </a:p>
         </p:txBody>
@@ -10431,7 +10646,7 @@
                 </a:solidFill>
                 <a:latin typeface="Pretendard"/>
               </a:rPr>
-              <a:t>PostgreSQL — 정형 데이터 · 관계형</a:t>
+              <a:t>AI 답변 품질 = 데이터 품질</a:t>
             </a:r>
           </a:p>
           <a:p>
@@ -10447,7 +10662,7 @@
                 </a:solidFill>
                 <a:latin typeface="Pretendard"/>
               </a:rPr>
-              <a:t>TimescaleDB — 시계열 확장</a:t>
+              <a:t>잘못된 데이터 학습 → AI 잘못된 답변</a:t>
             </a:r>
           </a:p>
           <a:p>
@@ -10463,7 +10678,7 @@
                 </a:solidFill>
                 <a:latin typeface="Pretendard"/>
               </a:rPr>
-              <a:t>Qdrant · Chroma — 벡터 검색 (RAG용)</a:t>
+              <a:t/>
             </a:r>
           </a:p>
           <a:p>
@@ -10479,7 +10694,7 @@
                 </a:solidFill>
                 <a:latin typeface="Pretendard"/>
               </a:rPr>
-              <a:t/>
+              <a:t>자동 검증 — 룰 코드화 시 신규 데이터 자동 체크</a:t>
             </a:r>
           </a:p>
           <a:p>
@@ -10495,7 +10710,7 @@
                 </a:solidFill>
                 <a:latin typeface="Pretendard"/>
               </a:rPr>
-              <a:t>보안 · 확장성 · 비용 종합 결정</a:t>
+              <a:t>부서 간 데이터 거래 기준 — "이 형식으로 주세요" 근거</a:t>
             </a:r>
           </a:p>
         </p:txBody>
@@ -10534,7 +10749,7 @@
                 </a:solidFill>
                 <a:latin typeface="Consolas"/>
               </a:rPr>
-              <a:t>16 / 18</a:t>
+              <a:t>16 / 17</a:t>
             </a:r>
           </a:p>
         </p:txBody>
@@ -10599,7 +10814,7 @@
                 </a:solidFill>
                 <a:latin typeface="Consolas"/>
               </a:rPr>
-              <a:t>E-1-4. ⓑ ① DB 설계 · 요소 4</a:t>
+              <a:t>E-1-5. ⓑ ① DB 설계 · 요소 5</a:t>
             </a:r>
           </a:p>
         </p:txBody>
@@ -10638,7 +10853,7 @@
                 </a:solidFill>
                 <a:latin typeface="Pretendard"/>
               </a:rPr>
-              <a:t>품질 기준 정의</a:t>
+              <a:t>마이그레이션 체계</a:t>
             </a:r>
           </a:p>
         </p:txBody>
@@ -10677,7 +10892,7 @@
                 </a:solidFill>
                 <a:latin typeface="Pretendard"/>
               </a:rPr>
-              <a:t>좋은 데이터 vs 나쁜 데이터 명시화</a:t>
+              <a:t>스키마 변경 대응 방법론</a:t>
             </a:r>
           </a:p>
         </p:txBody>
@@ -10845,7 +11060,7 @@
                 </a:solidFill>
                 <a:latin typeface="Pretendard"/>
               </a:rPr>
-              <a:t>자동 검증 가능한 명시적 룰</a:t>
+              <a:t>스키마 변경 시 데이터 보존</a:t>
             </a:r>
           </a:p>
         </p:txBody>
@@ -10884,7 +11099,7 @@
                 </a:solidFill>
                 <a:latin typeface="Pretendard"/>
               </a:rPr>
-              <a:t>"좋은 데이터" 판단 기준 → 코드화 → ⑥ 검증·품질 트랙의 입력</a:t>
+              <a:t>한 번 설계로 끝 ≠ DB. 운영 중 5~10회 변경 필연 → 변경 절차 사전 표준화</a:t>
             </a:r>
           </a:p>
         </p:txBody>
@@ -11013,7 +11228,7 @@
                 </a:solidFill>
                 <a:latin typeface="Consolas"/>
               </a:rPr>
-              <a:t>4가지 차원</a:t>
+              <a:t>전형 시나리오</a:t>
             </a:r>
           </a:p>
         </p:txBody>
@@ -11027,7 +11242,7 @@
         <p:spPr>
           <a:xfrm>
             <a:off x="6374739" y="2249424"/>
-            <a:ext cx="5240883" cy="1115568"/>
+            <a:ext cx="5240883" cy="1371600"/>
           </a:xfrm>
           <a:prstGeom prst="rect">
             <a:avLst/>
@@ -11052,7 +11267,7 @@
                 </a:solidFill>
                 <a:latin typeface="Pretendard"/>
               </a:rPr>
-              <a:t>• 완결성 (Completeness) — 필수 필드 채워짐? 미충족 시 reject</a:t>
+              <a:t>• "부품 카탈로그 친환경 등급 컬럼 추가"</a:t>
             </a:r>
           </a:p>
           <a:p>
@@ -11068,7 +11283,7 @@
                 </a:solidFill>
                 <a:latin typeface="Pretendard"/>
               </a:rPr>
-              <a:t>• 일관성 (Consistency) — 같은 의미 = 같은 형식? cc · ㎤ 통일 강제</a:t>
+              <a:t>• "부품 카탈로그 신규 컬럼 추가 (예: 인증등급)"</a:t>
             </a:r>
           </a:p>
           <a:p>
@@ -11084,7 +11299,7 @@
                 </a:solidFill>
                 <a:latin typeface="Pretendard"/>
               </a:rPr>
-              <a:t>• 정확성 (Accuracy) — 값이 사실과 일치? 음수 압력 자동 검출</a:t>
+              <a:t>• "시계열 샘플링 간격 변경 — 기존 데이터?"</a:t>
             </a:r>
           </a:p>
           <a:p>
@@ -11100,7 +11315,23 @@
                 </a:solidFill>
                 <a:latin typeface="Pretendard"/>
               </a:rPr>
-              <a:t>• 최신성 (Timeliness) — 데이터 수명? 5년 이상 → "오래됨" 라벨</a:t>
+              <a:t>• "신 도메인 (소음 · 진동) 추가"</a:t>
+            </a:r>
+          </a:p>
+          <a:p>
+            <a:pPr algn="l">
+              <a:lnSpc>
+                <a:spcPct val="140000"/>
+              </a:lnSpc>
+            </a:pPr>
+            <a:r>
+              <a:rPr sz="1000" b="0" i="0">
+                <a:solidFill>
+                  <a:srgbClr val="475569"/>
+                </a:solidFill>
+                <a:latin typeface="Pretendard"/>
+              </a:rPr>
+              <a:t>• "시험 규격 룰셋 구조 개편"</a:t>
             </a:r>
           </a:p>
         </p:txBody>
@@ -11229,7 +11460,7 @@
                 </a:solidFill>
                 <a:latin typeface="Consolas"/>
               </a:rPr>
-              <a:t>구체 룰 예시</a:t>
+              <a:t>도구 · 버전 관리</a:t>
             </a:r>
           </a:p>
         </p:txBody>
@@ -11268,7 +11499,7 @@
                 </a:solidFill>
                 <a:latin typeface="Pretendard"/>
               </a:rPr>
-              <a:t>· 실험 온도 −40°C ~ 60°C 외 → reject</a:t>
+              <a:t>Alembic (Python) · Flyway (Java/SQL)</a:t>
             </a:r>
           </a:p>
           <a:p>
@@ -11284,6 +11515,22 @@
                 </a:solidFill>
                 <a:latin typeface="Pretendard"/>
               </a:rPr>
+              <a:t>스키마 변경 = 코드로 버전 관리</a:t>
+            </a:r>
+          </a:p>
+          <a:p>
+            <a:pPr algn="l">
+              <a:lnSpc>
+                <a:spcPct val="135000"/>
+              </a:lnSpc>
+            </a:pPr>
+            <a:r>
+              <a:rPr sz="1000" b="0" i="0">
+                <a:solidFill>
+                  <a:srgbClr val="475569"/>
+                </a:solidFill>
+                <a:latin typeface="Pretendard"/>
+              </a:rPr>
               <a:t/>
             </a:r>
           </a:p>
@@ -11300,7 +11547,7 @@
                 </a:solidFill>
                 <a:latin typeface="Pretendard"/>
               </a:rPr>
-              <a:t>· 압축기 RPM 0 ~ 7000 외 → flag</a:t>
+              <a:t>예시 마이그레이션 파일</a:t>
             </a:r>
           </a:p>
           <a:p>
@@ -11332,7 +11579,7 @@
                 </a:solidFill>
                 <a:latin typeface="Pretendard"/>
               </a:rPr>
-              <a:t>· 시계열 샘플링 변동 30% 초과 → warning</a:t>
+              <a:t>V1__initial_schema.sql</a:t>
             </a:r>
           </a:p>
           <a:p>
@@ -11364,7 +11611,39 @@
                 </a:solidFill>
                 <a:latin typeface="Pretendard"/>
               </a:rPr>
-              <a:t>· 시험 보고서 12개월 미갱신 → "오래됨"</a:t>
+              <a:t>V2__add_certification_grade.sql</a:t>
+            </a:r>
+          </a:p>
+          <a:p>
+            <a:pPr algn="l">
+              <a:lnSpc>
+                <a:spcPct val="135000"/>
+              </a:lnSpc>
+            </a:pPr>
+            <a:r>
+              <a:rPr sz="1000" b="0" i="0">
+                <a:solidFill>
+                  <a:srgbClr val="475569"/>
+                </a:solidFill>
+                <a:latin typeface="Pretendard"/>
+              </a:rPr>
+              <a:t/>
+            </a:r>
+          </a:p>
+          <a:p>
+            <a:pPr algn="l">
+              <a:lnSpc>
+                <a:spcPct val="135000"/>
+              </a:lnSpc>
+            </a:pPr>
+            <a:r>
+              <a:rPr sz="1000" b="0" i="0">
+                <a:solidFill>
+                  <a:srgbClr val="475569"/>
+                </a:solidFill>
+                <a:latin typeface="Pretendard"/>
+              </a:rPr>
+              <a:t>V3__add_acoustics_domain.sql</a:t>
             </a:r>
           </a:p>
         </p:txBody>
@@ -11507,7 +11786,7 @@
         <p:spPr>
           <a:xfrm>
             <a:off x="6374739" y="4512564"/>
-            <a:ext cx="5240883" cy="1097280"/>
+            <a:ext cx="5240883" cy="640080"/>
           </a:xfrm>
           <a:prstGeom prst="rect">
             <a:avLst/>
@@ -11532,7 +11811,7 @@
                 </a:solidFill>
                 <a:latin typeface="Pretendard"/>
               </a:rPr>
-              <a:t>AI 답변 품질 = 데이터 품질</a:t>
+              <a:t>변경은 필연 — Phase 1 9개월 = 5~10회 변경</a:t>
             </a:r>
           </a:p>
           <a:p>
@@ -11548,7 +11827,7 @@
                 </a:solidFill>
                 <a:latin typeface="Pretendard"/>
               </a:rPr>
-              <a:t>잘못된 데이터 학습 → AI 잘못된 답변</a:t>
+              <a:t>데이터 손실 방지 — 변경 시 재수집 비용 막대</a:t>
             </a:r>
           </a:p>
           <a:p>
@@ -11564,39 +11843,7 @@
                 </a:solidFill>
                 <a:latin typeface="Pretendard"/>
               </a:rPr>
-              <a:t/>
-            </a:r>
-          </a:p>
-          <a:p>
-            <a:pPr algn="l">
-              <a:lnSpc>
-                <a:spcPct val="135000"/>
-              </a:lnSpc>
-            </a:pPr>
-            <a:r>
-              <a:rPr sz="1000" b="0" i="0">
-                <a:solidFill>
-                  <a:srgbClr val="475569"/>
-                </a:solidFill>
-                <a:latin typeface="Pretendard"/>
-              </a:rPr>
-              <a:t>자동 검증 — 룰 코드화 시 신규 데이터 자동 체크</a:t>
-            </a:r>
-          </a:p>
-          <a:p>
-            <a:pPr algn="l">
-              <a:lnSpc>
-                <a:spcPct val="135000"/>
-              </a:lnSpc>
-            </a:pPr>
-            <a:r>
-              <a:rPr sz="1000" b="0" i="0">
-                <a:solidFill>
-                  <a:srgbClr val="475569"/>
-                </a:solidFill>
-                <a:latin typeface="Pretendard"/>
-              </a:rPr>
-              <a:t>부서 간 데이터 거래 기준 — "이 형식으로 주세요" 근거</a:t>
+              <a:t>롤백 가능 — 실수 시 직전 버전 복원</a:t>
             </a:r>
           </a:p>
         </p:txBody>
@@ -11635,1140 +11882,7 @@
                 </a:solidFill>
                 <a:latin typeface="Consolas"/>
               </a:rPr>
-              <a:t>17 / 18</a:t>
-            </a:r>
-          </a:p>
-        </p:txBody>
-      </p:sp>
-    </p:spTree>
-  </p:cSld>
-  <p:clrMapOvr>
-    <a:masterClrMapping/>
-  </p:clrMapOvr>
-</p:sld>
-</file>
-
-<file path=ppt/slides/slide18.xml><?xml version="1.0" encoding="utf-8"?>
-<p:sld xmlns:a="http://schemas.openxmlformats.org/drawingml/2006/main" xmlns:p="http://schemas.openxmlformats.org/presentationml/2006/main" xmlns:r="http://schemas.openxmlformats.org/officeDocument/2006/relationships">
-  <p:cSld>
-    <p:bg>
-      <p:bgPr>
-        <a:solidFill>
-          <a:srgbClr val="FAF8F3"/>
-        </a:solidFill>
-        <a:effectLst/>
-      </p:bgPr>
-    </p:bg>
-    <p:spTree>
-      <p:nvGrpSpPr>
-        <p:cNvPr id="1" name=""/>
-        <p:cNvGrpSpPr/>
-        <p:nvPr/>
-      </p:nvGrpSpPr>
-      <p:grpSpPr/>
-      <p:sp>
-        <p:nvSpPr>
-          <p:cNvPr id="2" name="TextBox 1"/>
-          <p:cNvSpPr txBox="1"/>
-          <p:nvPr/>
-        </p:nvSpPr>
-        <p:spPr>
-          <a:xfrm>
-            <a:off x="411480" y="411480"/>
-            <a:ext cx="10058400" cy="411480"/>
-          </a:xfrm>
-          <a:prstGeom prst="rect">
-            <a:avLst/>
-          </a:prstGeom>
-          <a:noFill/>
-        </p:spPr>
-        <p:txBody>
-          <a:bodyPr wrap="square" lIns="54864" rIns="54864" tIns="54864" bIns="54864" anchor="t">
-            <a:spAutoFit/>
-          </a:bodyPr>
-          <a:lstStyle/>
-          <a:p>
-            <a:pPr algn="l">
-              <a:lnSpc>
-                <a:spcPct val="115000"/>
-              </a:lnSpc>
-            </a:pPr>
-            <a:r>
-              <a:rPr sz="1800" b="1" i="0">
-                <a:solidFill>
-                  <a:srgbClr val="2563EB"/>
-                </a:solidFill>
-                <a:latin typeface="Consolas"/>
-              </a:rPr>
-              <a:t>E-1-5. ⓑ ① DB 설계 · 요소 5</a:t>
-            </a:r>
-          </a:p>
-        </p:txBody>
-      </p:sp>
-      <p:sp>
-        <p:nvSpPr>
-          <p:cNvPr id="3" name="TextBox 2"/>
-          <p:cNvSpPr txBox="1"/>
-          <p:nvPr/>
-        </p:nvSpPr>
-        <p:spPr>
-          <a:xfrm>
-            <a:off x="411480" y="914400"/>
-            <a:ext cx="10058400" cy="411480"/>
-          </a:xfrm>
-          <a:prstGeom prst="rect">
-            <a:avLst/>
-          </a:prstGeom>
-          <a:noFill/>
-        </p:spPr>
-        <p:txBody>
-          <a:bodyPr wrap="square" lIns="54864" rIns="54864" tIns="54864" bIns="54864" anchor="t">
-            <a:spAutoFit/>
-          </a:bodyPr>
-          <a:lstStyle/>
-          <a:p>
-            <a:pPr algn="l">
-              <a:lnSpc>
-                <a:spcPct val="115000"/>
-              </a:lnSpc>
-            </a:pPr>
-            <a:r>
-              <a:rPr sz="1400" b="1" i="0">
-                <a:solidFill>
-                  <a:srgbClr val="475569"/>
-                </a:solidFill>
-                <a:latin typeface="Pretendard"/>
-              </a:rPr>
-              <a:t>마이그레이션 체계</a:t>
-            </a:r>
-          </a:p>
-        </p:txBody>
-      </p:sp>
-      <p:sp>
-        <p:nvSpPr>
-          <p:cNvPr id="4" name="TextBox 3"/>
-          <p:cNvSpPr txBox="1"/>
-          <p:nvPr/>
-        </p:nvSpPr>
-        <p:spPr>
-          <a:xfrm>
-            <a:off x="411480" y="1280160"/>
-            <a:ext cx="10058400" cy="292608"/>
-          </a:xfrm>
-          <a:prstGeom prst="rect">
-            <a:avLst/>
-          </a:prstGeom>
-          <a:noFill/>
-        </p:spPr>
-        <p:txBody>
-          <a:bodyPr wrap="square" lIns="54864" rIns="54864" tIns="54864" bIns="54864" anchor="t">
-            <a:spAutoFit/>
-          </a:bodyPr>
-          <a:lstStyle/>
-          <a:p>
-            <a:pPr algn="l">
-              <a:lnSpc>
-                <a:spcPct val="115000"/>
-              </a:lnSpc>
-            </a:pPr>
-            <a:r>
-              <a:rPr sz="1100" b="0" i="0">
-                <a:solidFill>
-                  <a:srgbClr val="94A3B8"/>
-                </a:solidFill>
-                <a:latin typeface="Pretendard"/>
-              </a:rPr>
-              <a:t>스키마 변경 대응 방법론</a:t>
-            </a:r>
-          </a:p>
-        </p:txBody>
-      </p:sp>
-      <p:sp>
-        <p:nvSpPr>
-          <p:cNvPr id="5" name="Rounded Rectangle 4"/>
-          <p:cNvSpPr/>
-          <p:nvPr/>
-        </p:nvSpPr>
-        <p:spPr>
-          <a:xfrm>
-            <a:off x="411480" y="1874520"/>
-            <a:ext cx="5570067" cy="2080260"/>
-          </a:xfrm>
-          <a:prstGeom prst="roundRect">
-            <a:avLst>
-              <a:gd name="adj" fmla="val 5000"/>
-            </a:avLst>
-          </a:prstGeom>
-          <a:solidFill>
-            <a:srgbClr val="FFFFFF"/>
-          </a:solidFill>
-          <a:ln w="6350">
-            <a:solidFill>
-              <a:srgbClr val="E2E8F0"/>
-            </a:solidFill>
-          </a:ln>
-        </p:spPr>
-        <p:style>
-          <a:lnRef idx="1">
-            <a:schemeClr val="accent1"/>
-          </a:lnRef>
-          <a:fillRef idx="3">
-            <a:schemeClr val="accent1"/>
-          </a:fillRef>
-          <a:effectRef idx="2">
-            <a:schemeClr val="accent1"/>
-          </a:effectRef>
-          <a:fontRef idx="minor">
-            <a:schemeClr val="lt1"/>
-          </a:fontRef>
-        </p:style>
-        <p:txBody>
-          <a:bodyPr rtlCol="0" anchor="ctr"/>
-          <a:lstStyle/>
-          <a:p>
-            <a:pPr algn="ctr"/>
-          </a:p>
-        </p:txBody>
-      </p:sp>
-      <p:sp>
-        <p:nvSpPr>
-          <p:cNvPr id="6" name="Rectangle 5"/>
-          <p:cNvSpPr/>
-          <p:nvPr/>
-        </p:nvSpPr>
-        <p:spPr>
-          <a:xfrm>
-            <a:off x="411480" y="1874520"/>
-            <a:ext cx="45720" cy="2080260"/>
-          </a:xfrm>
-          <a:prstGeom prst="rect">
-            <a:avLst/>
-          </a:prstGeom>
-          <a:solidFill>
-            <a:srgbClr val="2563EB"/>
-          </a:solidFill>
-          <a:ln>
-            <a:noFill/>
-          </a:ln>
-        </p:spPr>
-        <p:style>
-          <a:lnRef idx="1">
-            <a:schemeClr val="accent1"/>
-          </a:lnRef>
-          <a:fillRef idx="3">
-            <a:schemeClr val="accent1"/>
-          </a:fillRef>
-          <a:effectRef idx="2">
-            <a:schemeClr val="accent1"/>
-          </a:effectRef>
-          <a:fontRef idx="minor">
-            <a:schemeClr val="lt1"/>
-          </a:fontRef>
-        </p:style>
-        <p:txBody>
-          <a:bodyPr rtlCol="0" anchor="ctr"/>
-          <a:lstStyle/>
-          <a:p>
-            <a:pPr algn="ctr"/>
-          </a:p>
-        </p:txBody>
-      </p:sp>
-      <p:sp>
-        <p:nvSpPr>
-          <p:cNvPr id="7" name="TextBox 6"/>
-          <p:cNvSpPr txBox="1"/>
-          <p:nvPr/>
-        </p:nvSpPr>
-        <p:spPr>
-          <a:xfrm>
-            <a:off x="576072" y="1993392"/>
-            <a:ext cx="5240883" cy="228600"/>
-          </a:xfrm>
-          <a:prstGeom prst="rect">
-            <a:avLst/>
-          </a:prstGeom>
-          <a:noFill/>
-        </p:spPr>
-        <p:txBody>
-          <a:bodyPr wrap="square" lIns="0" rIns="0" tIns="0" bIns="0" anchor="t">
-            <a:spAutoFit/>
-          </a:bodyPr>
-          <a:lstStyle/>
-          <a:p>
-            <a:pPr algn="l">
-              <a:lnSpc>
-                <a:spcPct val="115000"/>
-              </a:lnSpc>
-            </a:pPr>
-            <a:r>
-              <a:rPr sz="850" b="1" i="0">
-                <a:solidFill>
-                  <a:srgbClr val="2563EB"/>
-                </a:solidFill>
-                <a:latin typeface="Consolas"/>
-              </a:rPr>
-              <a:t>한 줄 정리</a:t>
-            </a:r>
-          </a:p>
-        </p:txBody>
-      </p:sp>
-      <p:sp>
-        <p:nvSpPr>
-          <p:cNvPr id="8" name="TextBox 7"/>
-          <p:cNvSpPr txBox="1"/>
-          <p:nvPr/>
-        </p:nvSpPr>
-        <p:spPr>
-          <a:xfrm>
-            <a:off x="576072" y="2249424"/>
-            <a:ext cx="5240883" cy="365760"/>
-          </a:xfrm>
-          <a:prstGeom prst="rect">
-            <a:avLst/>
-          </a:prstGeom>
-          <a:noFill/>
-        </p:spPr>
-        <p:txBody>
-          <a:bodyPr wrap="square" lIns="0" rIns="0" tIns="0" bIns="0" anchor="t">
-            <a:spAutoFit/>
-          </a:bodyPr>
-          <a:lstStyle/>
-          <a:p>
-            <a:pPr algn="l">
-              <a:lnSpc>
-                <a:spcPct val="120000"/>
-              </a:lnSpc>
-            </a:pPr>
-            <a:r>
-              <a:rPr sz="1200" b="1" i="0">
-                <a:solidFill>
-                  <a:srgbClr val="1A1A2E"/>
-                </a:solidFill>
-                <a:latin typeface="Pretendard"/>
-              </a:rPr>
-              <a:t>스키마 변경 시 데이터 보존</a:t>
-            </a:r>
-          </a:p>
-        </p:txBody>
-      </p:sp>
-      <p:sp>
-        <p:nvSpPr>
-          <p:cNvPr id="9" name="TextBox 8"/>
-          <p:cNvSpPr txBox="1"/>
-          <p:nvPr/>
-        </p:nvSpPr>
-        <p:spPr>
-          <a:xfrm>
-            <a:off x="576072" y="2660904"/>
-            <a:ext cx="5240883" cy="365760"/>
-          </a:xfrm>
-          <a:prstGeom prst="rect">
-            <a:avLst/>
-          </a:prstGeom>
-          <a:noFill/>
-        </p:spPr>
-        <p:txBody>
-          <a:bodyPr wrap="square" lIns="0" rIns="0" tIns="0" bIns="0" anchor="t">
-            <a:normAutofit fontScale="85000"/>
-          </a:bodyPr>
-          <a:lstStyle/>
-          <a:p>
-            <a:pPr algn="l">
-              <a:lnSpc>
-                <a:spcPct val="135000"/>
-              </a:lnSpc>
-            </a:pPr>
-            <a:r>
-              <a:rPr sz="1000" b="0" i="0">
-                <a:solidFill>
-                  <a:srgbClr val="475569"/>
-                </a:solidFill>
-                <a:latin typeface="Pretendard"/>
-              </a:rPr>
-              <a:t>한 번 설계로 끝 ≠ DB. 운영 중 5~10회 변경 필연 → 변경 절차 사전 표준화</a:t>
-            </a:r>
-          </a:p>
-        </p:txBody>
-      </p:sp>
-      <p:sp>
-        <p:nvSpPr>
-          <p:cNvPr id="10" name="Rounded Rectangle 9"/>
-          <p:cNvSpPr/>
-          <p:nvPr/>
-        </p:nvSpPr>
-        <p:spPr>
-          <a:xfrm>
-            <a:off x="6210147" y="1874520"/>
-            <a:ext cx="5570067" cy="2080260"/>
-          </a:xfrm>
-          <a:prstGeom prst="roundRect">
-            <a:avLst>
-              <a:gd name="adj" fmla="val 5000"/>
-            </a:avLst>
-          </a:prstGeom>
-          <a:solidFill>
-            <a:srgbClr val="FFFFFF"/>
-          </a:solidFill>
-          <a:ln w="6350">
-            <a:solidFill>
-              <a:srgbClr val="E2E8F0"/>
-            </a:solidFill>
-          </a:ln>
-        </p:spPr>
-        <p:style>
-          <a:lnRef idx="1">
-            <a:schemeClr val="accent1"/>
-          </a:lnRef>
-          <a:fillRef idx="3">
-            <a:schemeClr val="accent1"/>
-          </a:fillRef>
-          <a:effectRef idx="2">
-            <a:schemeClr val="accent1"/>
-          </a:effectRef>
-          <a:fontRef idx="minor">
-            <a:schemeClr val="lt1"/>
-          </a:fontRef>
-        </p:style>
-        <p:txBody>
-          <a:bodyPr rtlCol="0" anchor="ctr"/>
-          <a:lstStyle/>
-          <a:p>
-            <a:pPr algn="ctr"/>
-          </a:p>
-        </p:txBody>
-      </p:sp>
-      <p:sp>
-        <p:nvSpPr>
-          <p:cNvPr id="11" name="Rectangle 10"/>
-          <p:cNvSpPr/>
-          <p:nvPr/>
-        </p:nvSpPr>
-        <p:spPr>
-          <a:xfrm>
-            <a:off x="6210147" y="1874520"/>
-            <a:ext cx="45720" cy="2080260"/>
-          </a:xfrm>
-          <a:prstGeom prst="rect">
-            <a:avLst/>
-          </a:prstGeom>
-          <a:solidFill>
-            <a:srgbClr val="059669"/>
-          </a:solidFill>
-          <a:ln>
-            <a:noFill/>
-          </a:ln>
-        </p:spPr>
-        <p:style>
-          <a:lnRef idx="1">
-            <a:schemeClr val="accent1"/>
-          </a:lnRef>
-          <a:fillRef idx="3">
-            <a:schemeClr val="accent1"/>
-          </a:fillRef>
-          <a:effectRef idx="2">
-            <a:schemeClr val="accent1"/>
-          </a:effectRef>
-          <a:fontRef idx="minor">
-            <a:schemeClr val="lt1"/>
-          </a:fontRef>
-        </p:style>
-        <p:txBody>
-          <a:bodyPr rtlCol="0" anchor="ctr"/>
-          <a:lstStyle/>
-          <a:p>
-            <a:pPr algn="ctr"/>
-          </a:p>
-        </p:txBody>
-      </p:sp>
-      <p:sp>
-        <p:nvSpPr>
-          <p:cNvPr id="12" name="TextBox 11"/>
-          <p:cNvSpPr txBox="1"/>
-          <p:nvPr/>
-        </p:nvSpPr>
-        <p:spPr>
-          <a:xfrm>
-            <a:off x="6374739" y="1993392"/>
-            <a:ext cx="5240883" cy="228600"/>
-          </a:xfrm>
-          <a:prstGeom prst="rect">
-            <a:avLst/>
-          </a:prstGeom>
-          <a:noFill/>
-        </p:spPr>
-        <p:txBody>
-          <a:bodyPr wrap="square" lIns="0" rIns="0" tIns="0" bIns="0" anchor="t">
-            <a:spAutoFit/>
-          </a:bodyPr>
-          <a:lstStyle/>
-          <a:p>
-            <a:pPr algn="l">
-              <a:lnSpc>
-                <a:spcPct val="115000"/>
-              </a:lnSpc>
-            </a:pPr>
-            <a:r>
-              <a:rPr sz="850" b="1" i="0">
-                <a:solidFill>
-                  <a:srgbClr val="059669"/>
-                </a:solidFill>
-                <a:latin typeface="Consolas"/>
-              </a:rPr>
-              <a:t>전형 시나리오</a:t>
-            </a:r>
-          </a:p>
-        </p:txBody>
-      </p:sp>
-      <p:sp>
-        <p:nvSpPr>
-          <p:cNvPr id="13" name="TextBox 12"/>
-          <p:cNvSpPr txBox="1"/>
-          <p:nvPr/>
-        </p:nvSpPr>
-        <p:spPr>
-          <a:xfrm>
-            <a:off x="6374739" y="2249424"/>
-            <a:ext cx="5240883" cy="1371600"/>
-          </a:xfrm>
-          <a:prstGeom prst="rect">
-            <a:avLst/>
-          </a:prstGeom>
-          <a:noFill/>
-        </p:spPr>
-        <p:txBody>
-          <a:bodyPr wrap="square" lIns="0" rIns="0" tIns="0" bIns="0" anchor="t">
-            <a:spAutoFit/>
-          </a:bodyPr>
-          <a:lstStyle/>
-          <a:p>
-            <a:pPr algn="l">
-              <a:lnSpc>
-                <a:spcPct val="140000"/>
-              </a:lnSpc>
-            </a:pPr>
-            <a:r>
-              <a:rPr sz="1000" b="0" i="0">
-                <a:solidFill>
-                  <a:srgbClr val="475569"/>
-                </a:solidFill>
-                <a:latin typeface="Pretendard"/>
-              </a:rPr>
-              <a:t>• "부품 카탈로그 친환경 등급 컬럼 추가"</a:t>
-            </a:r>
-          </a:p>
-          <a:p>
-            <a:pPr algn="l">
-              <a:lnSpc>
-                <a:spcPct val="140000"/>
-              </a:lnSpc>
-            </a:pPr>
-            <a:r>
-              <a:rPr sz="1000" b="0" i="0">
-                <a:solidFill>
-                  <a:srgbClr val="475569"/>
-                </a:solidFill>
-                <a:latin typeface="Pretendard"/>
-              </a:rPr>
-              <a:t>• "부품 카탈로그 신규 컬럼 추가 (예: 인증등급)"</a:t>
-            </a:r>
-          </a:p>
-          <a:p>
-            <a:pPr algn="l">
-              <a:lnSpc>
-                <a:spcPct val="140000"/>
-              </a:lnSpc>
-            </a:pPr>
-            <a:r>
-              <a:rPr sz="1000" b="0" i="0">
-                <a:solidFill>
-                  <a:srgbClr val="475569"/>
-                </a:solidFill>
-                <a:latin typeface="Pretendard"/>
-              </a:rPr>
-              <a:t>• "시계열 샘플링 간격 변경 — 기존 데이터?"</a:t>
-            </a:r>
-          </a:p>
-          <a:p>
-            <a:pPr algn="l">
-              <a:lnSpc>
-                <a:spcPct val="140000"/>
-              </a:lnSpc>
-            </a:pPr>
-            <a:r>
-              <a:rPr sz="1000" b="0" i="0">
-                <a:solidFill>
-                  <a:srgbClr val="475569"/>
-                </a:solidFill>
-                <a:latin typeface="Pretendard"/>
-              </a:rPr>
-              <a:t>• "신 도메인 (소음 · 진동) 추가"</a:t>
-            </a:r>
-          </a:p>
-          <a:p>
-            <a:pPr algn="l">
-              <a:lnSpc>
-                <a:spcPct val="140000"/>
-              </a:lnSpc>
-            </a:pPr>
-            <a:r>
-              <a:rPr sz="1000" b="0" i="0">
-                <a:solidFill>
-                  <a:srgbClr val="475569"/>
-                </a:solidFill>
-                <a:latin typeface="Pretendard"/>
-              </a:rPr>
-              <a:t>• "시험 규격 룰셋 구조 개편"</a:t>
-            </a:r>
-          </a:p>
-        </p:txBody>
-      </p:sp>
-      <p:sp>
-        <p:nvSpPr>
-          <p:cNvPr id="14" name="Rounded Rectangle 13"/>
-          <p:cNvSpPr/>
-          <p:nvPr/>
-        </p:nvSpPr>
-        <p:spPr>
-          <a:xfrm>
-            <a:off x="411480" y="4137660"/>
-            <a:ext cx="5570067" cy="2080260"/>
-          </a:xfrm>
-          <a:prstGeom prst="roundRect">
-            <a:avLst>
-              <a:gd name="adj" fmla="val 5000"/>
-            </a:avLst>
-          </a:prstGeom>
-          <a:solidFill>
-            <a:srgbClr val="FFFFFF"/>
-          </a:solidFill>
-          <a:ln w="6350">
-            <a:solidFill>
-              <a:srgbClr val="E2E8F0"/>
-            </a:solidFill>
-          </a:ln>
-        </p:spPr>
-        <p:style>
-          <a:lnRef idx="1">
-            <a:schemeClr val="accent1"/>
-          </a:lnRef>
-          <a:fillRef idx="3">
-            <a:schemeClr val="accent1"/>
-          </a:fillRef>
-          <a:effectRef idx="2">
-            <a:schemeClr val="accent1"/>
-          </a:effectRef>
-          <a:fontRef idx="minor">
-            <a:schemeClr val="lt1"/>
-          </a:fontRef>
-        </p:style>
-        <p:txBody>
-          <a:bodyPr rtlCol="0" anchor="ctr"/>
-          <a:lstStyle/>
-          <a:p>
-            <a:pPr algn="ctr"/>
-          </a:p>
-        </p:txBody>
-      </p:sp>
-      <p:sp>
-        <p:nvSpPr>
-          <p:cNvPr id="15" name="Rectangle 14"/>
-          <p:cNvSpPr/>
-          <p:nvPr/>
-        </p:nvSpPr>
-        <p:spPr>
-          <a:xfrm>
-            <a:off x="411480" y="4137660"/>
-            <a:ext cx="45720" cy="2080260"/>
-          </a:xfrm>
-          <a:prstGeom prst="rect">
-            <a:avLst/>
-          </a:prstGeom>
-          <a:solidFill>
-            <a:srgbClr val="7C3AED"/>
-          </a:solidFill>
-          <a:ln>
-            <a:noFill/>
-          </a:ln>
-        </p:spPr>
-        <p:style>
-          <a:lnRef idx="1">
-            <a:schemeClr val="accent1"/>
-          </a:lnRef>
-          <a:fillRef idx="3">
-            <a:schemeClr val="accent1"/>
-          </a:fillRef>
-          <a:effectRef idx="2">
-            <a:schemeClr val="accent1"/>
-          </a:effectRef>
-          <a:fontRef idx="minor">
-            <a:schemeClr val="lt1"/>
-          </a:fontRef>
-        </p:style>
-        <p:txBody>
-          <a:bodyPr rtlCol="0" anchor="ctr"/>
-          <a:lstStyle/>
-          <a:p>
-            <a:pPr algn="ctr"/>
-          </a:p>
-        </p:txBody>
-      </p:sp>
-      <p:sp>
-        <p:nvSpPr>
-          <p:cNvPr id="16" name="TextBox 15"/>
-          <p:cNvSpPr txBox="1"/>
-          <p:nvPr/>
-        </p:nvSpPr>
-        <p:spPr>
-          <a:xfrm>
-            <a:off x="576072" y="4256532"/>
-            <a:ext cx="5240883" cy="228600"/>
-          </a:xfrm>
-          <a:prstGeom prst="rect">
-            <a:avLst/>
-          </a:prstGeom>
-          <a:noFill/>
-        </p:spPr>
-        <p:txBody>
-          <a:bodyPr wrap="square" lIns="0" rIns="0" tIns="0" bIns="0" anchor="t">
-            <a:spAutoFit/>
-          </a:bodyPr>
-          <a:lstStyle/>
-          <a:p>
-            <a:pPr algn="l">
-              <a:lnSpc>
-                <a:spcPct val="115000"/>
-              </a:lnSpc>
-            </a:pPr>
-            <a:r>
-              <a:rPr sz="850" b="1" i="0">
-                <a:solidFill>
-                  <a:srgbClr val="7C3AED"/>
-                </a:solidFill>
-                <a:latin typeface="Consolas"/>
-              </a:rPr>
-              <a:t>도구 · 버전 관리</a:t>
-            </a:r>
-          </a:p>
-        </p:txBody>
-      </p:sp>
-      <p:sp>
-        <p:nvSpPr>
-          <p:cNvPr id="17" name="TextBox 16"/>
-          <p:cNvSpPr txBox="1"/>
-          <p:nvPr/>
-        </p:nvSpPr>
-        <p:spPr>
-          <a:xfrm>
-            <a:off x="576072" y="4512564"/>
-            <a:ext cx="5240883" cy="1522475"/>
-          </a:xfrm>
-          <a:prstGeom prst="rect">
-            <a:avLst/>
-          </a:prstGeom>
-          <a:noFill/>
-        </p:spPr>
-        <p:txBody>
-          <a:bodyPr wrap="square" lIns="0" rIns="0" tIns="0" bIns="0" anchor="t">
-            <a:normAutofit fontScale="85000"/>
-          </a:bodyPr>
-          <a:lstStyle/>
-          <a:p>
-            <a:pPr algn="l">
-              <a:lnSpc>
-                <a:spcPct val="135000"/>
-              </a:lnSpc>
-            </a:pPr>
-            <a:r>
-              <a:rPr sz="1000" b="0" i="0">
-                <a:solidFill>
-                  <a:srgbClr val="475569"/>
-                </a:solidFill>
-                <a:latin typeface="Pretendard"/>
-              </a:rPr>
-              <a:t>Alembic (Python) · Flyway (Java/SQL)</a:t>
-            </a:r>
-          </a:p>
-          <a:p>
-            <a:pPr algn="l">
-              <a:lnSpc>
-                <a:spcPct val="135000"/>
-              </a:lnSpc>
-            </a:pPr>
-            <a:r>
-              <a:rPr sz="1000" b="0" i="0">
-                <a:solidFill>
-                  <a:srgbClr val="475569"/>
-                </a:solidFill>
-                <a:latin typeface="Pretendard"/>
-              </a:rPr>
-              <a:t>스키마 변경 = 코드로 버전 관리</a:t>
-            </a:r>
-          </a:p>
-          <a:p>
-            <a:pPr algn="l">
-              <a:lnSpc>
-                <a:spcPct val="135000"/>
-              </a:lnSpc>
-            </a:pPr>
-            <a:r>
-              <a:rPr sz="1000" b="0" i="0">
-                <a:solidFill>
-                  <a:srgbClr val="475569"/>
-                </a:solidFill>
-                <a:latin typeface="Pretendard"/>
-              </a:rPr>
-              <a:t/>
-            </a:r>
-          </a:p>
-          <a:p>
-            <a:pPr algn="l">
-              <a:lnSpc>
-                <a:spcPct val="135000"/>
-              </a:lnSpc>
-            </a:pPr>
-            <a:r>
-              <a:rPr sz="1000" b="0" i="0">
-                <a:solidFill>
-                  <a:srgbClr val="475569"/>
-                </a:solidFill>
-                <a:latin typeface="Pretendard"/>
-              </a:rPr>
-              <a:t>예시 마이그레이션 파일</a:t>
-            </a:r>
-          </a:p>
-          <a:p>
-            <a:pPr algn="l">
-              <a:lnSpc>
-                <a:spcPct val="135000"/>
-              </a:lnSpc>
-            </a:pPr>
-            <a:r>
-              <a:rPr sz="1000" b="0" i="0">
-                <a:solidFill>
-                  <a:srgbClr val="475569"/>
-                </a:solidFill>
-                <a:latin typeface="Pretendard"/>
-              </a:rPr>
-              <a:t/>
-            </a:r>
-          </a:p>
-          <a:p>
-            <a:pPr algn="l">
-              <a:lnSpc>
-                <a:spcPct val="135000"/>
-              </a:lnSpc>
-            </a:pPr>
-            <a:r>
-              <a:rPr sz="1000" b="0" i="0">
-                <a:solidFill>
-                  <a:srgbClr val="475569"/>
-                </a:solidFill>
-                <a:latin typeface="Pretendard"/>
-              </a:rPr>
-              <a:t>V1__initial_schema.sql</a:t>
-            </a:r>
-          </a:p>
-          <a:p>
-            <a:pPr algn="l">
-              <a:lnSpc>
-                <a:spcPct val="135000"/>
-              </a:lnSpc>
-            </a:pPr>
-            <a:r>
-              <a:rPr sz="1000" b="0" i="0">
-                <a:solidFill>
-                  <a:srgbClr val="475569"/>
-                </a:solidFill>
-                <a:latin typeface="Pretendard"/>
-              </a:rPr>
-              <a:t/>
-            </a:r>
-          </a:p>
-          <a:p>
-            <a:pPr algn="l">
-              <a:lnSpc>
-                <a:spcPct val="135000"/>
-              </a:lnSpc>
-            </a:pPr>
-            <a:r>
-              <a:rPr sz="1000" b="0" i="0">
-                <a:solidFill>
-                  <a:srgbClr val="475569"/>
-                </a:solidFill>
-                <a:latin typeface="Pretendard"/>
-              </a:rPr>
-              <a:t>V2__add_certification_grade.sql</a:t>
-            </a:r>
-          </a:p>
-          <a:p>
-            <a:pPr algn="l">
-              <a:lnSpc>
-                <a:spcPct val="135000"/>
-              </a:lnSpc>
-            </a:pPr>
-            <a:r>
-              <a:rPr sz="1000" b="0" i="0">
-                <a:solidFill>
-                  <a:srgbClr val="475569"/>
-                </a:solidFill>
-                <a:latin typeface="Pretendard"/>
-              </a:rPr>
-              <a:t/>
-            </a:r>
-          </a:p>
-          <a:p>
-            <a:pPr algn="l">
-              <a:lnSpc>
-                <a:spcPct val="135000"/>
-              </a:lnSpc>
-            </a:pPr>
-            <a:r>
-              <a:rPr sz="1000" b="0" i="0">
-                <a:solidFill>
-                  <a:srgbClr val="475569"/>
-                </a:solidFill>
-                <a:latin typeface="Pretendard"/>
-              </a:rPr>
-              <a:t>V3__add_acoustics_domain.sql</a:t>
-            </a:r>
-          </a:p>
-        </p:txBody>
-      </p:sp>
-      <p:sp>
-        <p:nvSpPr>
-          <p:cNvPr id="18" name="Rounded Rectangle 17"/>
-          <p:cNvSpPr/>
-          <p:nvPr/>
-        </p:nvSpPr>
-        <p:spPr>
-          <a:xfrm>
-            <a:off x="6210147" y="4137660"/>
-            <a:ext cx="5570067" cy="2080260"/>
-          </a:xfrm>
-          <a:prstGeom prst="roundRect">
-            <a:avLst>
-              <a:gd name="adj" fmla="val 5000"/>
-            </a:avLst>
-          </a:prstGeom>
-          <a:solidFill>
-            <a:srgbClr val="FFFFFF"/>
-          </a:solidFill>
-          <a:ln w="6350">
-            <a:solidFill>
-              <a:srgbClr val="E2E8F0"/>
-            </a:solidFill>
-          </a:ln>
-        </p:spPr>
-        <p:style>
-          <a:lnRef idx="1">
-            <a:schemeClr val="accent1"/>
-          </a:lnRef>
-          <a:fillRef idx="3">
-            <a:schemeClr val="accent1"/>
-          </a:fillRef>
-          <a:effectRef idx="2">
-            <a:schemeClr val="accent1"/>
-          </a:effectRef>
-          <a:fontRef idx="minor">
-            <a:schemeClr val="lt1"/>
-          </a:fontRef>
-        </p:style>
-        <p:txBody>
-          <a:bodyPr rtlCol="0" anchor="ctr"/>
-          <a:lstStyle/>
-          <a:p>
-            <a:pPr algn="ctr"/>
-          </a:p>
-        </p:txBody>
-      </p:sp>
-      <p:sp>
-        <p:nvSpPr>
-          <p:cNvPr id="19" name="Rectangle 18"/>
-          <p:cNvSpPr/>
-          <p:nvPr/>
-        </p:nvSpPr>
-        <p:spPr>
-          <a:xfrm>
-            <a:off x="6210147" y="4137660"/>
-            <a:ext cx="45720" cy="2080260"/>
-          </a:xfrm>
-          <a:prstGeom prst="rect">
-            <a:avLst/>
-          </a:prstGeom>
-          <a:solidFill>
-            <a:srgbClr val="D97706"/>
-          </a:solidFill>
-          <a:ln>
-            <a:noFill/>
-          </a:ln>
-        </p:spPr>
-        <p:style>
-          <a:lnRef idx="1">
-            <a:schemeClr val="accent1"/>
-          </a:lnRef>
-          <a:fillRef idx="3">
-            <a:schemeClr val="accent1"/>
-          </a:fillRef>
-          <a:effectRef idx="2">
-            <a:schemeClr val="accent1"/>
-          </a:effectRef>
-          <a:fontRef idx="minor">
-            <a:schemeClr val="lt1"/>
-          </a:fontRef>
-        </p:style>
-        <p:txBody>
-          <a:bodyPr rtlCol="0" anchor="ctr"/>
-          <a:lstStyle/>
-          <a:p>
-            <a:pPr algn="ctr"/>
-          </a:p>
-        </p:txBody>
-      </p:sp>
-      <p:sp>
-        <p:nvSpPr>
-          <p:cNvPr id="20" name="TextBox 19"/>
-          <p:cNvSpPr txBox="1"/>
-          <p:nvPr/>
-        </p:nvSpPr>
-        <p:spPr>
-          <a:xfrm>
-            <a:off x="6374739" y="4256532"/>
-            <a:ext cx="5240883" cy="228600"/>
-          </a:xfrm>
-          <a:prstGeom prst="rect">
-            <a:avLst/>
-          </a:prstGeom>
-          <a:noFill/>
-        </p:spPr>
-        <p:txBody>
-          <a:bodyPr wrap="square" lIns="0" rIns="0" tIns="0" bIns="0" anchor="t">
-            <a:spAutoFit/>
-          </a:bodyPr>
-          <a:lstStyle/>
-          <a:p>
-            <a:pPr algn="l">
-              <a:lnSpc>
-                <a:spcPct val="115000"/>
-              </a:lnSpc>
-            </a:pPr>
-            <a:r>
-              <a:rPr sz="850" b="1" i="0">
-                <a:solidFill>
-                  <a:srgbClr val="D97706"/>
-                </a:solidFill>
-                <a:latin typeface="Consolas"/>
-              </a:rPr>
-              <a:t>필요성</a:t>
-            </a:r>
-          </a:p>
-        </p:txBody>
-      </p:sp>
-      <p:sp>
-        <p:nvSpPr>
-          <p:cNvPr id="21" name="TextBox 20"/>
-          <p:cNvSpPr txBox="1"/>
-          <p:nvPr/>
-        </p:nvSpPr>
-        <p:spPr>
-          <a:xfrm>
-            <a:off x="6374739" y="4512564"/>
-            <a:ext cx="5240883" cy="640080"/>
-          </a:xfrm>
-          <a:prstGeom prst="rect">
-            <a:avLst/>
-          </a:prstGeom>
-          <a:noFill/>
-        </p:spPr>
-        <p:txBody>
-          <a:bodyPr wrap="square" lIns="0" rIns="0" tIns="0" bIns="0" anchor="t">
-            <a:normAutofit fontScale="85000"/>
-          </a:bodyPr>
-          <a:lstStyle/>
-          <a:p>
-            <a:pPr algn="l">
-              <a:lnSpc>
-                <a:spcPct val="135000"/>
-              </a:lnSpc>
-            </a:pPr>
-            <a:r>
-              <a:rPr sz="1000" b="0" i="0">
-                <a:solidFill>
-                  <a:srgbClr val="475569"/>
-                </a:solidFill>
-                <a:latin typeface="Pretendard"/>
-              </a:rPr>
-              <a:t>변경은 필연 — Phase 1 9개월 = 5~10회 변경</a:t>
-            </a:r>
-          </a:p>
-          <a:p>
-            <a:pPr algn="l">
-              <a:lnSpc>
-                <a:spcPct val="135000"/>
-              </a:lnSpc>
-            </a:pPr>
-            <a:r>
-              <a:rPr sz="1000" b="0" i="0">
-                <a:solidFill>
-                  <a:srgbClr val="475569"/>
-                </a:solidFill>
-                <a:latin typeface="Pretendard"/>
-              </a:rPr>
-              <a:t>데이터 손실 방지 — 변경 시 재수집 비용 막대</a:t>
-            </a:r>
-          </a:p>
-          <a:p>
-            <a:pPr algn="l">
-              <a:lnSpc>
-                <a:spcPct val="135000"/>
-              </a:lnSpc>
-            </a:pPr>
-            <a:r>
-              <a:rPr sz="1000" b="0" i="0">
-                <a:solidFill>
-                  <a:srgbClr val="475569"/>
-                </a:solidFill>
-                <a:latin typeface="Pretendard"/>
-              </a:rPr>
-              <a:t>롤백 가능 — 실수 시 직전 버전 복원</a:t>
-            </a:r>
-          </a:p>
-        </p:txBody>
-      </p:sp>
-      <p:sp>
-        <p:nvSpPr>
-          <p:cNvPr id="22" name="TextBox 21"/>
-          <p:cNvSpPr txBox="1"/>
-          <p:nvPr/>
-        </p:nvSpPr>
-        <p:spPr>
-          <a:xfrm>
-            <a:off x="11277295" y="6446520"/>
-            <a:ext cx="731520" cy="274320"/>
-          </a:xfrm>
-          <a:prstGeom prst="rect">
-            <a:avLst/>
-          </a:prstGeom>
-          <a:noFill/>
-        </p:spPr>
-        <p:txBody>
-          <a:bodyPr wrap="square" lIns="54864" rIns="54864" tIns="54864" bIns="54864" anchor="ctr">
-            <a:spAutoFit/>
-          </a:bodyPr>
-          <a:lstStyle/>
-          <a:p>
-            <a:pPr algn="r">
-              <a:lnSpc>
-                <a:spcPct val="115000"/>
-              </a:lnSpc>
-            </a:pPr>
-            <a:r>
-              <a:rPr sz="1000" b="0" i="0">
-                <a:solidFill>
-                  <a:srgbClr val="94A3B8"/>
-                </a:solidFill>
-                <a:latin typeface="Consolas"/>
-              </a:rPr>
-              <a:t>18 / 18</a:t>
+              <a:t>17 / 17</a:t>
             </a:r>
           </a:p>
         </p:txBody>
@@ -13605,7 +12719,7 @@
                 </a:solidFill>
                 <a:latin typeface="Consolas"/>
               </a:rPr>
-              <a:t>02 / 18</a:t>
+              <a:t>02 / 17</a:t>
             </a:r>
           </a:p>
         </p:txBody>
@@ -14490,7 +13604,7 @@
                 </a:solidFill>
                 <a:latin typeface="Consolas"/>
               </a:rPr>
-              <a:t>03 / 18</a:t>
+              <a:t>03 / 17</a:t>
             </a:r>
           </a:p>
         </p:txBody>
@@ -15311,7 +14425,7 @@
                 </a:solidFill>
                 <a:latin typeface="Consolas"/>
               </a:rPr>
-              <a:t>04 / 18</a:t>
+              <a:t>04 / 17</a:t>
             </a:r>
           </a:p>
         </p:txBody>
@@ -16553,7 +15667,7 @@
                 </a:solidFill>
                 <a:latin typeface="Consolas"/>
               </a:rPr>
-              <a:t>05 / 18</a:t>
+              <a:t>05 / 17</a:t>
             </a:r>
           </a:p>
         </p:txBody>
@@ -17498,7 +16612,7 @@
                 </a:solidFill>
                 <a:latin typeface="Consolas"/>
               </a:rPr>
-              <a:t>06 / 18</a:t>
+              <a:t>06 / 17</a:t>
             </a:r>
           </a:p>
         </p:txBody>
@@ -18491,7 +17605,7 @@
                 </a:solidFill>
                 <a:latin typeface="Consolas"/>
               </a:rPr>
-              <a:t>07 / 18</a:t>
+              <a:t>07 / 17</a:t>
             </a:r>
           </a:p>
         </p:txBody>
@@ -18556,7 +17670,7 @@
                 </a:solidFill>
                 <a:latin typeface="Consolas"/>
               </a:rPr>
-              <a:t>D-2 보충 · AI vs 알고리즘</a:t>
+              <a:t>D-3. 서브트랙 ③</a:t>
             </a:r>
           </a:p>
         </p:txBody>
@@ -18595,7 +17709,7 @@
                 </a:solidFill>
                 <a:latin typeface="Pretendard"/>
               </a:rPr>
-              <a:t>RAG 안의 AI</a:t>
+              <a:t>③ 외부 LLM API + Tool-use · AI 답변</a:t>
             </a:r>
           </a:p>
         </p:txBody>
@@ -18634,7 +17748,7 @@
                 </a:solidFill>
                 <a:latin typeface="Pretendard"/>
               </a:rPr>
-              <a:t>알고리즘 vs AI · LLM vs 작은 모델</a:t>
+              <a:t>외부 도구 호출형 AI 모델</a:t>
             </a:r>
           </a:p>
         </p:txBody>
@@ -18648,7 +17762,7 @@
         <p:spPr>
           <a:xfrm>
             <a:off x="411480" y="1874520"/>
-            <a:ext cx="5570067" cy="2080260"/>
+            <a:ext cx="5570067" cy="4343400"/>
           </a:xfrm>
           <a:prstGeom prst="roundRect">
             <a:avLst>
@@ -18695,7 +17809,7 @@
         <p:spPr>
           <a:xfrm>
             <a:off x="411480" y="1874520"/>
-            <a:ext cx="45720" cy="2080260"/>
+            <a:ext cx="45720" cy="4343400"/>
           </a:xfrm>
           <a:prstGeom prst="rect">
             <a:avLst/>
@@ -18763,7 +17877,7 @@
                 </a:solidFill>
                 <a:latin typeface="Consolas"/>
               </a:rPr>
-              <a:t>핵심 요약</a:t>
+              <a:t>한 줄 정리</a:t>
             </a:r>
           </a:p>
         </p:txBody>
@@ -18777,7 +17891,7 @@
         <p:spPr>
           <a:xfrm>
             <a:off x="576072" y="2249424"/>
-            <a:ext cx="5240883" cy="548640"/>
+            <a:ext cx="5240883" cy="365760"/>
           </a:xfrm>
           <a:prstGeom prst="rect">
             <a:avLst/>
@@ -18802,9 +17916,140 @@
                 </a:solidFill>
                 <a:latin typeface="Pretendard"/>
               </a:rPr>
-              <a:t>"의미" → 알고리즘 불가 · AI 필요</a:t>
-            </a:r>
-          </a:p>
+              <a:t>외부 도구 호출형 AI</a:t>
+            </a:r>
+          </a:p>
+        </p:txBody>
+      </p:sp>
+      <p:sp>
+        <p:nvSpPr>
+          <p:cNvPr id="9" name="TextBox 8"/>
+          <p:cNvSpPr txBox="1"/>
+          <p:nvPr/>
+        </p:nvSpPr>
+        <p:spPr>
+          <a:xfrm>
+            <a:off x="576072" y="2660904"/>
+            <a:ext cx="5240883" cy="914400"/>
+          </a:xfrm>
+          <a:prstGeom prst="rect">
+            <a:avLst/>
+          </a:prstGeom>
+          <a:noFill/>
+        </p:spPr>
+        <p:txBody>
+          <a:bodyPr wrap="square" lIns="0" rIns="0" tIns="0" bIns="0" anchor="t">
+            <a:normAutofit fontScale="85000"/>
+          </a:bodyPr>
+          <a:lstStyle/>
+          <a:p>
+            <a:pPr algn="l">
+              <a:lnSpc>
+                <a:spcPct val="135000"/>
+              </a:lnSpc>
+            </a:pPr>
+            <a:r>
+              <a:rPr sz="1000" b="0" i="0">
+                <a:solidFill>
+                  <a:srgbClr val="475569"/>
+                </a:solidFill>
+                <a:latin typeface="Pretendard"/>
+              </a:rPr>
+              <a:t>단순 텍스트 생성 ≠ 외부 LLM</a:t>
+            </a:r>
+          </a:p>
+          <a:p>
+            <a:pPr algn="l">
+              <a:lnSpc>
+                <a:spcPct val="135000"/>
+              </a:lnSpc>
+            </a:pPr>
+            <a:r>
+              <a:rPr sz="1000" b="0" i="0">
+                <a:solidFill>
+                  <a:srgbClr val="475569"/>
+                </a:solidFill>
+                <a:latin typeface="Pretendard"/>
+              </a:rPr>
+              <a:t/>
+            </a:r>
+          </a:p>
+          <a:p>
+            <a:pPr algn="l">
+              <a:lnSpc>
+                <a:spcPct val="135000"/>
+              </a:lnSpc>
+            </a:pPr>
+            <a:r>
+              <a:rPr sz="1000" b="0" i="0">
+                <a:solidFill>
+                  <a:srgbClr val="475569"/>
+                </a:solidFill>
+                <a:latin typeface="Pretendard"/>
+              </a:rPr>
+              <a:t>호출 가능 — 시뮬레이터 · DB · 최적화 도구</a:t>
+            </a:r>
+          </a:p>
+          <a:p>
+            <a:pPr algn="l">
+              <a:lnSpc>
+                <a:spcPct val="135000"/>
+              </a:lnSpc>
+            </a:pPr>
+            <a:r>
+              <a:rPr sz="1000" b="0" i="0">
+                <a:solidFill>
+                  <a:srgbClr val="475569"/>
+                </a:solidFill>
+                <a:latin typeface="Pretendard"/>
+              </a:rPr>
+              <a:t>예 — "응축기 UA 14% 증가 시?" → 1D 시뮬 호출 → 결과 → 답변</a:t>
+            </a:r>
+          </a:p>
+        </p:txBody>
+      </p:sp>
+      <p:sp>
+        <p:nvSpPr>
+          <p:cNvPr id="10" name="Rounded Rectangle 9"/>
+          <p:cNvSpPr/>
+          <p:nvPr/>
+        </p:nvSpPr>
+        <p:spPr>
+          <a:xfrm>
+            <a:off x="576072" y="3648456"/>
+            <a:ext cx="5240883" cy="502920"/>
+          </a:xfrm>
+          <a:prstGeom prst="roundRect">
+            <a:avLst>
+              <a:gd name="adj" fmla="val 8000"/>
+            </a:avLst>
+          </a:prstGeom>
+          <a:solidFill>
+            <a:srgbClr val="F8FAFC"/>
+          </a:solidFill>
+          <a:ln w="6350">
+            <a:solidFill>
+              <a:srgbClr val="CBD5E1"/>
+            </a:solidFill>
+          </a:ln>
+        </p:spPr>
+        <p:style>
+          <a:lnRef idx="1">
+            <a:schemeClr val="accent1"/>
+          </a:lnRef>
+          <a:fillRef idx="3">
+            <a:schemeClr val="accent1"/>
+          </a:fillRef>
+          <a:effectRef idx="2">
+            <a:schemeClr val="accent1"/>
+          </a:effectRef>
+          <a:fontRef idx="minor">
+            <a:schemeClr val="lt1"/>
+          </a:fontRef>
+        </p:style>
+        <p:txBody>
+          <a:bodyPr rtlCol="0" anchor="t" lIns="109728" rIns="109728" tIns="73152" bIns="73152" wrap="square"/>
+          <a:lstStyle/>
           <a:p>
             <a:pPr algn="l">
               <a:lnSpc>
@@ -18812,20 +18057,36 @@
               </a:lnSpc>
             </a:pPr>
             <a:r>
-              <a:rPr sz="1200" b="1" i="0">
-                <a:solidFill>
-                  <a:srgbClr val="1A1A2E"/>
-                </a:solidFill>
-                <a:latin typeface="Pretendard"/>
-              </a:rPr>
-              <a:t>단, 작은 전문 AI면 충분 (LLM 불필요)</a:t>
-            </a:r>
-          </a:p>
-        </p:txBody>
-      </p:sp>
-      <p:sp>
-        <p:nvSpPr>
-          <p:cNvPr id="9" name="Rounded Rectangle 8"/>
+              <a:rPr sz="850" b="1">
+                <a:solidFill>
+                  <a:srgbClr val="2563EB"/>
+                </a:solidFill>
+                <a:latin typeface="Consolas"/>
+              </a:rPr>
+              <a:t>Tool-use</a:t>
+            </a:r>
+          </a:p>
+          <a:p>
+            <a:pPr algn="l">
+              <a:lnSpc>
+                <a:spcPct val="130000"/>
+              </a:lnSpc>
+            </a:pPr>
+            <a:r>
+              <a:rPr sz="900">
+                <a:solidFill>
+                  <a:srgbClr val="475569"/>
+                </a:solidFill>
+                <a:latin typeface="Pretendard"/>
+              </a:rPr>
+              <a:t>AI 외부 함수 호출 능력. LLM 판단 → 도구 호출 → 결과 수신 → 답변 반영.</a:t>
+            </a:r>
+          </a:p>
+        </p:txBody>
+      </p:sp>
+      <p:sp>
+        <p:nvSpPr>
+          <p:cNvPr id="11" name="Rounded Rectangle 10"/>
           <p:cNvSpPr/>
           <p:nvPr/>
         </p:nvSpPr>
@@ -18872,7 +18133,7 @@
       </p:sp>
       <p:sp>
         <p:nvSpPr>
-          <p:cNvPr id="10" name="Rectangle 9"/>
+          <p:cNvPr id="12" name="Rectangle 11"/>
           <p:cNvSpPr/>
           <p:nvPr/>
         </p:nvSpPr>
@@ -18885,7 +18146,7 @@
             <a:avLst/>
           </a:prstGeom>
           <a:solidFill>
-            <a:srgbClr val="D97706"/>
+            <a:srgbClr val="059669"/>
           </a:solidFill>
           <a:ln>
             <a:noFill/>
@@ -18915,7 +18176,7 @@
       </p:sp>
       <p:sp>
         <p:nvSpPr>
-          <p:cNvPr id="11" name="TextBox 10"/>
+          <p:cNvPr id="13" name="TextBox 12"/>
           <p:cNvSpPr txBox="1"/>
           <p:nvPr/>
         </p:nvSpPr>
@@ -18943,25 +18204,25 @@
             <a:r>
               <a:rPr sz="850" b="1" i="0">
                 <a:solidFill>
-                  <a:srgbClr val="D97706"/>
+                  <a:srgbClr val="059669"/>
                 </a:solidFill>
                 <a:latin typeface="Consolas"/>
               </a:rPr>
-              <a:t>알고리즘 vs AI</a:t>
-            </a:r>
-          </a:p>
-        </p:txBody>
-      </p:sp>
-      <p:sp>
-        <p:nvSpPr>
-          <p:cNvPr id="12" name="TextBox 11"/>
+              <a:t>구성 요소 (M1~M7)</a:t>
+            </a:r>
+          </a:p>
+        </p:txBody>
+      </p:sp>
+      <p:sp>
+        <p:nvSpPr>
+          <p:cNvPr id="14" name="TextBox 13"/>
           <p:cNvSpPr txBox="1"/>
           <p:nvPr/>
         </p:nvSpPr>
         <p:spPr>
           <a:xfrm>
             <a:off x="6374739" y="2249424"/>
-            <a:ext cx="5240883" cy="1280160"/>
+            <a:ext cx="5240883" cy="1371600"/>
           </a:xfrm>
           <a:prstGeom prst="rect">
             <a:avLst/>
@@ -18970,116 +18231,100 @@
         </p:spPr>
         <p:txBody>
           <a:bodyPr wrap="square" lIns="0" rIns="0" tIns="0" bIns="0" anchor="t">
-            <a:normAutofit fontScale="85000"/>
+            <a:spAutoFit/>
           </a:bodyPr>
           <a:lstStyle/>
           <a:p>
             <a:pPr algn="l">
               <a:lnSpc>
-                <a:spcPct val="135000"/>
-              </a:lnSpc>
-            </a:pPr>
-            <a:r>
-              <a:rPr sz="1000" b="0" i="0">
-                <a:solidFill>
-                  <a:srgbClr val="475569"/>
-                </a:solidFill>
-                <a:latin typeface="Pretendard"/>
-              </a:rPr>
-              <a:t>"빨래가 안말라" ≡ "건조 효율 저하"</a:t>
-            </a:r>
-          </a:p>
-          <a:p>
-            <a:pPr algn="l">
-              <a:lnSpc>
-                <a:spcPct val="135000"/>
-              </a:lnSpc>
-            </a:pPr>
-            <a:r>
-              <a:rPr sz="1000" b="0" i="0">
-                <a:solidFill>
-                  <a:srgbClr val="475569"/>
-                </a:solidFill>
-                <a:latin typeface="Pretendard"/>
-              </a:rPr>
-              <a:t>→ 단어 미일치 · 의미 일치</a:t>
-            </a:r>
-          </a:p>
-          <a:p>
-            <a:pPr algn="l">
-              <a:lnSpc>
-                <a:spcPct val="135000"/>
-              </a:lnSpc>
-            </a:pPr>
-            <a:r>
-              <a:rPr sz="1000" b="0" i="0">
-                <a:solidFill>
-                  <a:srgbClr val="475569"/>
-                </a:solidFill>
-                <a:latin typeface="Pretendard"/>
-              </a:rPr>
-              <a:t/>
-            </a:r>
-          </a:p>
-          <a:p>
-            <a:pPr algn="l">
-              <a:lnSpc>
-                <a:spcPct val="135000"/>
-              </a:lnSpc>
-            </a:pPr>
-            <a:r>
-              <a:rPr sz="1000" b="0" i="0">
-                <a:solidFill>
-                  <a:srgbClr val="475569"/>
-                </a:solidFill>
-                <a:latin typeface="Pretendard"/>
-              </a:rPr>
-              <a:t>키워드 · 통계 · 사전 — 의미 처리 불가</a:t>
-            </a:r>
-          </a:p>
-          <a:p>
-            <a:pPr algn="l">
-              <a:lnSpc>
-                <a:spcPct val="135000"/>
-              </a:lnSpc>
-            </a:pPr>
-            <a:r>
-              <a:rPr sz="1000" b="0" i="0">
-                <a:solidFill>
-                  <a:srgbClr val="475569"/>
-                </a:solidFill>
-                <a:latin typeface="Pretendard"/>
-              </a:rPr>
-              <a:t>"의미" = 명시적 규칙화 불가능 추상 개념</a:t>
-            </a:r>
-          </a:p>
-          <a:p>
-            <a:pPr algn="l">
-              <a:lnSpc>
-                <a:spcPct val="135000"/>
-              </a:lnSpc>
-            </a:pPr>
-            <a:r>
-              <a:rPr sz="1000" b="0" i="0">
-                <a:solidFill>
-                  <a:srgbClr val="475569"/>
-                </a:solidFill>
-                <a:latin typeface="Pretendard"/>
-              </a:rPr>
-              <a:t>→ 학습된 AI 필요</a:t>
-            </a:r>
-          </a:p>
-        </p:txBody>
-      </p:sp>
-      <p:sp>
-        <p:nvSpPr>
-          <p:cNvPr id="13" name="Rounded Rectangle 12"/>
+                <a:spcPct val="140000"/>
+              </a:lnSpc>
+            </a:pPr>
+            <a:r>
+              <a:rPr sz="1000" b="0" i="0">
+                <a:solidFill>
+                  <a:srgbClr val="475569"/>
+                </a:solidFill>
+                <a:latin typeface="Pretendard"/>
+              </a:rPr>
+              <a:t>• API 보안 + 마스킹 — 단가 · 도면 외부 차단</a:t>
+            </a:r>
+          </a:p>
+          <a:p>
+            <a:pPr algn="l">
+              <a:lnSpc>
+                <a:spcPct val="140000"/>
+              </a:lnSpc>
+            </a:pPr>
+            <a:r>
+              <a:rPr sz="1000" b="0" i="0">
+                <a:solidFill>
+                  <a:srgbClr val="475569"/>
+                </a:solidFill>
+                <a:latin typeface="Pretendard"/>
+              </a:rPr>
+              <a:t>• System Prompt 설계 — 페르소나 · 답변 형식</a:t>
+            </a:r>
+          </a:p>
+          <a:p>
+            <a:pPr algn="l">
+              <a:lnSpc>
+                <a:spcPct val="140000"/>
+              </a:lnSpc>
+            </a:pPr>
+            <a:r>
+              <a:rPr sz="1000" b="0" i="0">
+                <a:solidFill>
+                  <a:srgbClr val="475569"/>
+                </a:solidFill>
+                <a:latin typeface="Pretendard"/>
+              </a:rPr>
+              <a:t>• Tool 등록 (4종) — DB · 1D 시뮬 · 최적화 · 시각화</a:t>
+            </a:r>
+          </a:p>
+          <a:p>
+            <a:pPr algn="l">
+              <a:lnSpc>
+                <a:spcPct val="140000"/>
+              </a:lnSpc>
+            </a:pPr>
+            <a:r>
+              <a:rPr sz="1000" b="0" i="0">
+                <a:solidFill>
+                  <a:srgbClr val="475569"/>
+                </a:solidFill>
+                <a:latin typeface="Pretendard"/>
+              </a:rPr>
+              <a:t>• JSON Schema — 정형 포맷 강제 (환각 방지)</a:t>
+            </a:r>
+          </a:p>
+          <a:p>
+            <a:pPr algn="l">
+              <a:lnSpc>
+                <a:spcPct val="140000"/>
+              </a:lnSpc>
+            </a:pPr>
+            <a:r>
+              <a:rPr sz="1000" b="0" i="0">
+                <a:solidFill>
+                  <a:srgbClr val="475569"/>
+                </a:solidFill>
+                <a:latin typeface="Pretendard"/>
+              </a:rPr>
+              <a:t>• Orchestrator (LangGraph) — 호출 순서 · 반복 · 복구</a:t>
+            </a:r>
+          </a:p>
+        </p:txBody>
+      </p:sp>
+      <p:sp>
+        <p:nvSpPr>
+          <p:cNvPr id="15" name="Rounded Rectangle 14"/>
           <p:cNvSpPr/>
           <p:nvPr/>
         </p:nvSpPr>
         <p:spPr>
           <a:xfrm>
-            <a:off x="411480" y="4137660"/>
+            <a:off x="6210147" y="4137660"/>
             <a:ext cx="5570067" cy="2080260"/>
           </a:xfrm>
           <a:prstGeom prst="roundRect">
@@ -19120,20 +18365,20 @@
       </p:sp>
       <p:sp>
         <p:nvSpPr>
-          <p:cNvPr id="14" name="Rectangle 13"/>
+          <p:cNvPr id="16" name="Rectangle 15"/>
           <p:cNvSpPr/>
           <p:nvPr/>
         </p:nvSpPr>
         <p:spPr>
           <a:xfrm>
-            <a:off x="411480" y="4137660"/>
+            <a:off x="6210147" y="4137660"/>
             <a:ext cx="45720" cy="2080260"/>
           </a:xfrm>
           <a:prstGeom prst="rect">
             <a:avLst/>
           </a:prstGeom>
           <a:solidFill>
-            <a:srgbClr val="0D9488"/>
+            <a:srgbClr val="D97706"/>
           </a:solidFill>
           <a:ln>
             <a:noFill/>
@@ -19163,13 +18408,13 @@
       </p:sp>
       <p:sp>
         <p:nvSpPr>
-          <p:cNvPr id="15" name="TextBox 14"/>
+          <p:cNvPr id="17" name="TextBox 16"/>
           <p:cNvSpPr txBox="1"/>
           <p:nvPr/>
         </p:nvSpPr>
         <p:spPr>
           <a:xfrm>
-            <a:off x="576072" y="4256532"/>
+            <a:off x="6374739" y="4256532"/>
             <a:ext cx="5240883" cy="228600"/>
           </a:xfrm>
           <a:prstGeom prst="rect">
@@ -19191,25 +18436,25 @@
             <a:r>
               <a:rPr sz="850" b="1" i="0">
                 <a:solidFill>
-                  <a:srgbClr val="0D9488"/>
+                  <a:srgbClr val="D97706"/>
                 </a:solidFill>
                 <a:latin typeface="Consolas"/>
               </a:rPr>
-              <a:t>LLM vs 작은 모델</a:t>
-            </a:r>
-          </a:p>
-        </p:txBody>
-      </p:sp>
-      <p:sp>
-        <p:nvSpPr>
-          <p:cNvPr id="16" name="TextBox 15"/>
+              <a:t>필요성</a:t>
+            </a:r>
+          </a:p>
+        </p:txBody>
+      </p:sp>
+      <p:sp>
+        <p:nvSpPr>
+          <p:cNvPr id="18" name="TextBox 17"/>
           <p:cNvSpPr txBox="1"/>
           <p:nvPr/>
         </p:nvSpPr>
         <p:spPr>
           <a:xfrm>
-            <a:off x="576072" y="4512564"/>
-            <a:ext cx="5240883" cy="1097280"/>
+            <a:off x="6374739" y="4512564"/>
+            <a:ext cx="5240883" cy="914400"/>
           </a:xfrm>
           <a:prstGeom prst="rect">
             <a:avLst/>
@@ -19234,7 +18479,7 @@
                 </a:solidFill>
                 <a:latin typeface="Pretendard"/>
               </a:rPr>
-              <a:t>임베딩·재랭킹 = "의미 거리 측정" 단일 작업</a:t>
+              <a:t>설계자 질의 — "변경 적용 시 결과?"</a:t>
             </a:r>
           </a:p>
           <a:p>
@@ -19250,7 +18495,7 @@
                 </a:solidFill>
                 <a:latin typeface="Pretendard"/>
               </a:rPr>
-              <a:t>LLM 기능(생성·요약·번역) 불필요</a:t>
+              <a:t>→ 실시간 시뮬 실행 필수</a:t>
             </a:r>
           </a:p>
           <a:p>
@@ -19282,49 +18527,33 @@
                 </a:solidFill>
                 <a:latin typeface="Pretendard"/>
               </a:rPr>
-              <a:t>특화 = 작음 · 빠름 · 정확함</a:t>
-            </a:r>
-          </a:p>
-          <a:p>
-            <a:pPr algn="l">
-              <a:lnSpc>
-                <a:spcPct val="135000"/>
-              </a:lnSpc>
-            </a:pPr>
-            <a:r>
-              <a:rPr sz="1000" b="0" i="0">
-                <a:solidFill>
-                  <a:srgbClr val="475569"/>
-                </a:solidFill>
-                <a:latin typeface="Pretendard"/>
-              </a:rPr>
-              <a:t>LLM 사용 시 — 100~1000× 느림 · 정확도↓</a:t>
-            </a:r>
-          </a:p>
-        </p:txBody>
-      </p:sp>
-      <p:sp>
-        <p:nvSpPr>
-          <p:cNvPr id="17" name="Rounded Rectangle 16"/>
+              <a:t>Tool-use = 텍스트 생성 + 외부 도구 직접 실행</a:t>
+            </a:r>
+          </a:p>
+        </p:txBody>
+      </p:sp>
+      <p:sp>
+        <p:nvSpPr>
+          <p:cNvPr id="19" name="Rounded Rectangle 18"/>
           <p:cNvSpPr/>
           <p:nvPr/>
         </p:nvSpPr>
         <p:spPr>
           <a:xfrm>
-            <a:off x="6210147" y="4137660"/>
-            <a:ext cx="5570067" cy="2080260"/>
+            <a:off x="6374739" y="5500116"/>
+            <a:ext cx="5240883" cy="580643"/>
           </a:xfrm>
           <a:prstGeom prst="roundRect">
             <a:avLst>
-              <a:gd name="adj" fmla="val 5000"/>
+              <a:gd name="adj" fmla="val 8000"/>
             </a:avLst>
           </a:prstGeom>
           <a:solidFill>
-            <a:srgbClr val="FFFFFF"/>
+            <a:srgbClr val="F8FAFC"/>
           </a:solidFill>
           <a:ln w="6350">
             <a:solidFill>
-              <a:srgbClr val="E2E8F0"/>
+              <a:srgbClr val="CBD5E1"/>
             </a:solidFill>
           </a:ln>
         </p:spPr>
@@ -19343,91 +18572,38 @@
           </a:fontRef>
         </p:style>
         <p:txBody>
-          <a:bodyPr rtlCol="0" anchor="ctr"/>
-          <a:lstStyle/>
-          <a:p>
-            <a:pPr algn="ctr"/>
-          </a:p>
-        </p:txBody>
-      </p:sp>
-      <p:sp>
-        <p:nvSpPr>
-          <p:cNvPr id="18" name="Rectangle 17"/>
-          <p:cNvSpPr/>
-          <p:nvPr/>
-        </p:nvSpPr>
-        <p:spPr>
-          <a:xfrm>
-            <a:off x="6210147" y="4137660"/>
-            <a:ext cx="45720" cy="2080260"/>
-          </a:xfrm>
-          <a:prstGeom prst="rect">
-            <a:avLst/>
-          </a:prstGeom>
-          <a:solidFill>
-            <a:srgbClr val="7C3AED"/>
-          </a:solidFill>
-          <a:ln>
-            <a:noFill/>
-          </a:ln>
-        </p:spPr>
-        <p:style>
-          <a:lnRef idx="1">
-            <a:schemeClr val="accent1"/>
-          </a:lnRef>
-          <a:fillRef idx="3">
-            <a:schemeClr val="accent1"/>
-          </a:fillRef>
-          <a:effectRef idx="2">
-            <a:schemeClr val="accent1"/>
-          </a:effectRef>
-          <a:fontRef idx="minor">
-            <a:schemeClr val="lt1"/>
-          </a:fontRef>
-        </p:style>
-        <p:txBody>
-          <a:bodyPr rtlCol="0" anchor="ctr"/>
-          <a:lstStyle/>
-          <a:p>
-            <a:pPr algn="ctr"/>
-          </a:p>
-        </p:txBody>
-      </p:sp>
-      <p:sp>
-        <p:nvSpPr>
-          <p:cNvPr id="19" name="TextBox 18"/>
-          <p:cNvSpPr txBox="1"/>
-          <p:nvPr/>
-        </p:nvSpPr>
-        <p:spPr>
-          <a:xfrm>
-            <a:off x="6374739" y="4256532"/>
-            <a:ext cx="5240883" cy="228600"/>
-          </a:xfrm>
-          <a:prstGeom prst="rect">
-            <a:avLst/>
-          </a:prstGeom>
-          <a:noFill/>
-        </p:spPr>
-        <p:txBody>
-          <a:bodyPr wrap="square" lIns="0" rIns="0" tIns="0" bIns="0" anchor="t">
-            <a:spAutoFit/>
-          </a:bodyPr>
-          <a:lstStyle/>
-          <a:p>
-            <a:pPr algn="l">
-              <a:lnSpc>
-                <a:spcPct val="115000"/>
-              </a:lnSpc>
-            </a:pPr>
-            <a:r>
-              <a:rPr sz="850" b="1" i="0">
-                <a:solidFill>
-                  <a:srgbClr val="7C3AED"/>
+          <a:bodyPr rtlCol="0" anchor="t" lIns="109728" rIns="109728" tIns="73152" bIns="73152" wrap="square"/>
+          <a:lstStyle/>
+          <a:p>
+            <a:pPr algn="l">
+              <a:lnSpc>
+                <a:spcPct val="120000"/>
+              </a:lnSpc>
+            </a:pPr>
+            <a:r>
+              <a:rPr sz="850" b="1">
+                <a:solidFill>
+                  <a:srgbClr val="D97706"/>
                 </a:solidFill>
                 <a:latin typeface="Consolas"/>
               </a:rPr>
-              <a:t>우리 시스템 AI 모델 구성</a:t>
+              <a:t>Structured Output</a:t>
+            </a:r>
+          </a:p>
+          <a:p>
+            <a:pPr algn="l">
+              <a:lnSpc>
+                <a:spcPct val="130000"/>
+              </a:lnSpc>
+            </a:pPr>
+            <a:r>
+              <a:rPr sz="900">
+                <a:solidFill>
+                  <a:srgbClr val="475569"/>
+                </a:solidFill>
+                <a:latin typeface="Pretendard"/>
+              </a:rPr>
+              <a:t>자유 텍스트 → 고정 JSON. 누락 · 환각 방지. 예 — {conclusion, evidence, confidence}</a:t>
             </a:r>
           </a:p>
         </p:txBody>
@@ -19435,116 +18611,6 @@
       <p:sp>
         <p:nvSpPr>
           <p:cNvPr id="20" name="TextBox 19"/>
-          <p:cNvSpPr txBox="1"/>
-          <p:nvPr/>
-        </p:nvSpPr>
-        <p:spPr>
-          <a:xfrm>
-            <a:off x="6374739" y="4512564"/>
-            <a:ext cx="5240883" cy="457200"/>
-          </a:xfrm>
-          <a:prstGeom prst="rect">
-            <a:avLst/>
-          </a:prstGeom>
-          <a:noFill/>
-        </p:spPr>
-        <p:txBody>
-          <a:bodyPr wrap="square" lIns="0" rIns="0" tIns="0" bIns="0" anchor="t">
-            <a:normAutofit fontScale="85000"/>
-          </a:bodyPr>
-          <a:lstStyle/>
-          <a:p>
-            <a:pPr algn="l">
-              <a:lnSpc>
-                <a:spcPct val="135000"/>
-              </a:lnSpc>
-            </a:pPr>
-            <a:r>
-              <a:rPr sz="1000" b="0" i="0">
-                <a:solidFill>
-                  <a:srgbClr val="475569"/>
-                </a:solidFill>
-                <a:latin typeface="Pretendard"/>
-              </a:rPr>
-              <a:t>핵심 — AI ≠ 단일 거대 LLM. 단계별 적정 크기 조합. 대부분 사내 호스팅, 외부 API는 ③에 한정</a:t>
-            </a:r>
-          </a:p>
-        </p:txBody>
-      </p:sp>
-      <p:sp>
-        <p:nvSpPr>
-          <p:cNvPr id="21" name="TextBox 20"/>
-          <p:cNvSpPr txBox="1"/>
-          <p:nvPr/>
-        </p:nvSpPr>
-        <p:spPr>
-          <a:xfrm>
-            <a:off x="6374739" y="5042916"/>
-            <a:ext cx="5240883" cy="859536"/>
-          </a:xfrm>
-          <a:prstGeom prst="rect">
-            <a:avLst/>
-          </a:prstGeom>
-          <a:noFill/>
-        </p:spPr>
-        <p:txBody>
-          <a:bodyPr wrap="square" lIns="0" rIns="0" tIns="0" bIns="0" anchor="t">
-            <a:spAutoFit/>
-          </a:bodyPr>
-          <a:lstStyle/>
-          <a:p>
-            <a:pPr algn="l">
-              <a:lnSpc>
-                <a:spcPct val="140000"/>
-              </a:lnSpc>
-            </a:pPr>
-            <a:r>
-              <a:rPr sz="1000" b="0" i="0">
-                <a:solidFill>
-                  <a:srgbClr val="475569"/>
-                </a:solidFill>
-                <a:latin typeface="Pretendard"/>
-              </a:rPr>
-              <a:t>• 임베딩·재랭킹 (~수백 MB) — ② RAG · 사내 호스팅</a:t>
-            </a:r>
-          </a:p>
-          <a:p>
-            <a:pPr algn="l">
-              <a:lnSpc>
-                <a:spcPct val="140000"/>
-              </a:lnSpc>
-            </a:pPr>
-            <a:r>
-              <a:rPr sz="1000" b="0" i="0">
-                <a:solidFill>
-                  <a:srgbClr val="475569"/>
-                </a:solidFill>
-                <a:latin typeface="Pretendard"/>
-              </a:rPr>
-              <a:t>• 외부 LLM API (~수백 GB) — ③ 답변 생성 · 외부 (마스킹)</a:t>
-            </a:r>
-          </a:p>
-          <a:p>
-            <a:pPr algn="l">
-              <a:lnSpc>
-                <a:spcPct val="140000"/>
-              </a:lnSpc>
-            </a:pPr>
-            <a:r>
-              <a:rPr sz="1000" b="0" i="0">
-                <a:solidFill>
-                  <a:srgbClr val="475569"/>
-                </a:solidFill>
-                <a:latin typeface="Pretendard"/>
-              </a:rPr>
-              <a:t>• 자체 sLLM (~수십 GB) — Phase 2 외부 LLM 대체 · 사내 호스팅</a:t>
-            </a:r>
-          </a:p>
-        </p:txBody>
-      </p:sp>
-      <p:sp>
-        <p:nvSpPr>
-          <p:cNvPr id="22" name="TextBox 21"/>
           <p:cNvSpPr txBox="1"/>
           <p:nvPr/>
         </p:nvSpPr>
@@ -19576,7 +18642,7 @@
                 </a:solidFill>
                 <a:latin typeface="Consolas"/>
               </a:rPr>
-              <a:t>08 / 18</a:t>
+              <a:t>08 / 17</a:t>
             </a:r>
           </a:p>
         </p:txBody>
@@ -19641,7 +18707,7 @@
                 </a:solidFill>
                 <a:latin typeface="Consolas"/>
               </a:rPr>
-              <a:t>D-3. 서브트랙 ③</a:t>
+              <a:t>D-4. 서브트랙 ④</a:t>
             </a:r>
           </a:p>
         </p:txBody>
@@ -19680,7 +18746,7 @@
                 </a:solidFill>
                 <a:latin typeface="Pretendard"/>
               </a:rPr>
-              <a:t>③ 외부 LLM API + Tool-use · AI 답변</a:t>
+              <a:t>④ Explainer · 답변 표시</a:t>
             </a:r>
           </a:p>
         </p:txBody>
@@ -19719,7 +18785,7 @@
                 </a:solidFill>
                 <a:latin typeface="Pretendard"/>
               </a:rPr>
-              <a:t>외부 도구 호출형 AI 모델</a:t>
+              <a:t>JSON → 카드 · 그래프 · 다이어그램</a:t>
             </a:r>
           </a:p>
         </p:txBody>
@@ -19887,7 +18953,7 @@
                 </a:solidFill>
                 <a:latin typeface="Pretendard"/>
               </a:rPr>
-              <a:t>외부 도구 호출형 AI</a:t>
+              <a:t>사용자별 맞춤 답변 표시</a:t>
             </a:r>
           </a:p>
         </p:txBody>
@@ -19926,7 +18992,7 @@
                 </a:solidFill>
                 <a:latin typeface="Pretendard"/>
               </a:rPr>
-              <a:t>단순 텍스트 생성 ≠ 외부 LLM</a:t>
+              <a:t>동일 데이터 · 다른 표현</a:t>
             </a:r>
           </a:p>
           <a:p>
@@ -19958,7 +19024,7 @@
                 </a:solidFill>
                 <a:latin typeface="Pretendard"/>
               </a:rPr>
-              <a:t>호출 가능 — 시뮬레이터 · DB · 최적화 도구</a:t>
+              <a:t>전문가 — "FMC 0.62 kg/kWh · UAcond 145 W/K"</a:t>
             </a:r>
           </a:p>
           <a:p>
@@ -19974,7 +19040,7 @@
                 </a:solidFill>
                 <a:latin typeface="Pretendard"/>
               </a:rPr>
-              <a:t>예 — "응축기 UA 14% 증가 시?" → 1D 시뮬 호출 → 결과 → 답변</a:t>
+              <a:t>비전문가 — "건조 효율 12%↓ · 라디에이터 부족"</a:t>
             </a:r>
           </a:p>
         </p:txBody>
@@ -19982,82 +19048,6 @@
       <p:sp>
         <p:nvSpPr>
           <p:cNvPr id="10" name="Rounded Rectangle 9"/>
-          <p:cNvSpPr/>
-          <p:nvPr/>
-        </p:nvSpPr>
-        <p:spPr>
-          <a:xfrm>
-            <a:off x="576072" y="3648456"/>
-            <a:ext cx="5240883" cy="502920"/>
-          </a:xfrm>
-          <a:prstGeom prst="roundRect">
-            <a:avLst>
-              <a:gd name="adj" fmla="val 8000"/>
-            </a:avLst>
-          </a:prstGeom>
-          <a:solidFill>
-            <a:srgbClr val="F8FAFC"/>
-          </a:solidFill>
-          <a:ln w="6350">
-            <a:solidFill>
-              <a:srgbClr val="CBD5E1"/>
-            </a:solidFill>
-          </a:ln>
-        </p:spPr>
-        <p:style>
-          <a:lnRef idx="1">
-            <a:schemeClr val="accent1"/>
-          </a:lnRef>
-          <a:fillRef idx="3">
-            <a:schemeClr val="accent1"/>
-          </a:fillRef>
-          <a:effectRef idx="2">
-            <a:schemeClr val="accent1"/>
-          </a:effectRef>
-          <a:fontRef idx="minor">
-            <a:schemeClr val="lt1"/>
-          </a:fontRef>
-        </p:style>
-        <p:txBody>
-          <a:bodyPr rtlCol="0" anchor="t" lIns="109728" rIns="109728" tIns="73152" bIns="73152" wrap="square"/>
-          <a:lstStyle/>
-          <a:p>
-            <a:pPr algn="l">
-              <a:lnSpc>
-                <a:spcPct val="120000"/>
-              </a:lnSpc>
-            </a:pPr>
-            <a:r>
-              <a:rPr sz="850" b="1">
-                <a:solidFill>
-                  <a:srgbClr val="2563EB"/>
-                </a:solidFill>
-                <a:latin typeface="Consolas"/>
-              </a:rPr>
-              <a:t>Tool-use</a:t>
-            </a:r>
-          </a:p>
-          <a:p>
-            <a:pPr algn="l">
-              <a:lnSpc>
-                <a:spcPct val="130000"/>
-              </a:lnSpc>
-            </a:pPr>
-            <a:r>
-              <a:rPr sz="900">
-                <a:solidFill>
-                  <a:srgbClr val="475569"/>
-                </a:solidFill>
-                <a:latin typeface="Pretendard"/>
-              </a:rPr>
-              <a:t>AI 외부 함수 호출 능력. LLM 판단 → 도구 호출 → 결과 수신 → 답변 반영.</a:t>
-            </a:r>
-          </a:p>
-        </p:txBody>
-      </p:sp>
-      <p:sp>
-        <p:nvSpPr>
-          <p:cNvPr id="11" name="Rounded Rectangle 10"/>
           <p:cNvSpPr/>
           <p:nvPr/>
         </p:nvSpPr>
@@ -20104,7 +19094,7 @@
       </p:sp>
       <p:sp>
         <p:nvSpPr>
-          <p:cNvPr id="12" name="Rectangle 11"/>
+          <p:cNvPr id="11" name="Rectangle 10"/>
           <p:cNvSpPr/>
           <p:nvPr/>
         </p:nvSpPr>
@@ -20147,7 +19137,7 @@
       </p:sp>
       <p:sp>
         <p:nvSpPr>
-          <p:cNvPr id="13" name="TextBox 12"/>
+          <p:cNvPr id="12" name="TextBox 11"/>
           <p:cNvSpPr txBox="1"/>
           <p:nvPr/>
         </p:nvSpPr>
@@ -20179,14 +19169,14 @@
                 </a:solidFill>
                 <a:latin typeface="Consolas"/>
               </a:rPr>
-              <a:t>구성 요소 (M1~M7)</a:t>
-            </a:r>
-          </a:p>
-        </p:txBody>
-      </p:sp>
-      <p:sp>
-        <p:nvSpPr>
-          <p:cNvPr id="14" name="TextBox 13"/>
+              <a:t>구성 요소 (M3~M8.5)</a:t>
+            </a:r>
+          </a:p>
+        </p:txBody>
+      </p:sp>
+      <p:sp>
+        <p:nvSpPr>
+          <p:cNvPr id="13" name="TextBox 12"/>
           <p:cNvSpPr txBox="1"/>
           <p:nvPr/>
         </p:nvSpPr>
@@ -20218,7 +19208,7 @@
                 </a:solidFill>
                 <a:latin typeface="Pretendard"/>
               </a:rPr>
-              <a:t>• API 보안 + 마스킹 — 단가 · 도면 외부 차단</a:t>
+              <a:t>• JSON → UI 매핑 — 카테고리별 카드 컴포넌트</a:t>
             </a:r>
           </a:p>
           <a:p>
@@ -20234,7 +19224,7 @@
                 </a:solidFill>
                 <a:latin typeface="Pretendard"/>
               </a:rPr>
-              <a:t>• System Prompt 설계 — 페르소나 · 답변 형식</a:t>
+              <a:t>• 전문가 / 비전문가 모드 — 답변 톤 분기</a:t>
             </a:r>
           </a:p>
           <a:p>
@@ -20250,7 +19240,7 @@
                 </a:solidFill>
                 <a:latin typeface="Pretendard"/>
               </a:rPr>
-              <a:t>• Tool 등록 (4종) — DB · 1D 시뮬 · 최적화 · 시각화</a:t>
+              <a:t>• 근거 인용 — 클릭 → 원문 스크롤</a:t>
             </a:r>
           </a:p>
           <a:p>
@@ -20266,7 +19256,7 @@
                 </a:solidFill>
                 <a:latin typeface="Pretendard"/>
               </a:rPr>
-              <a:t>• JSON Schema — 정형 포맷 강제 (환각 방지)</a:t>
+              <a:t>• 1D 시각화 — 시뮬 결과 그래프 · 차트</a:t>
             </a:r>
           </a:p>
           <a:p>
@@ -20282,14 +19272,14 @@
                 </a:solidFill>
                 <a:latin typeface="Pretendard"/>
               </a:rPr>
-              <a:t>• Orchestrator (LangGraph) — 호출 순서 · 반복 · 복구</a:t>
-            </a:r>
-          </a:p>
-        </p:txBody>
-      </p:sp>
-      <p:sp>
-        <p:nvSpPr>
-          <p:cNvPr id="15" name="Rounded Rectangle 14"/>
+              <a:t>• 음성 · 그래프 · PDF — 출력 다양화</a:t>
+            </a:r>
+          </a:p>
+        </p:txBody>
+      </p:sp>
+      <p:sp>
+        <p:nvSpPr>
+          <p:cNvPr id="14" name="Rounded Rectangle 13"/>
           <p:cNvSpPr/>
           <p:nvPr/>
         </p:nvSpPr>
@@ -20336,7 +19326,7 @@
       </p:sp>
       <p:sp>
         <p:nvSpPr>
-          <p:cNvPr id="16" name="Rectangle 15"/>
+          <p:cNvPr id="15" name="Rectangle 14"/>
           <p:cNvSpPr/>
           <p:nvPr/>
         </p:nvSpPr>
@@ -20349,7 +19339,7 @@
             <a:avLst/>
           </a:prstGeom>
           <a:solidFill>
-            <a:srgbClr val="D97706"/>
+            <a:srgbClr val="DC2626"/>
           </a:solidFill>
           <a:ln>
             <a:noFill/>
@@ -20379,7 +19369,7 @@
       </p:sp>
       <p:sp>
         <p:nvSpPr>
-          <p:cNvPr id="17" name="TextBox 16"/>
+          <p:cNvPr id="16" name="TextBox 15"/>
           <p:cNvSpPr txBox="1"/>
           <p:nvPr/>
         </p:nvSpPr>
@@ -20407,7 +19397,7 @@
             <a:r>
               <a:rPr sz="850" b="1" i="0">
                 <a:solidFill>
-                  <a:srgbClr val="D97706"/>
+                  <a:srgbClr val="DC2626"/>
                 </a:solidFill>
                 <a:latin typeface="Consolas"/>
               </a:rPr>
@@ -20418,7 +19408,7 @@
       </p:sp>
       <p:sp>
         <p:nvSpPr>
-          <p:cNvPr id="18" name="TextBox 17"/>
+          <p:cNvPr id="17" name="TextBox 16"/>
           <p:cNvSpPr txBox="1"/>
           <p:nvPr/>
         </p:nvSpPr>
@@ -20450,7 +19440,7 @@
                 </a:solidFill>
                 <a:latin typeface="Pretendard"/>
               </a:rPr>
-              <a:t>설계자 질의 — "변경 적용 시 결과?"</a:t>
+              <a:t>정확 답변 ≠ 유용한 답변</a:t>
             </a:r>
           </a:p>
           <a:p>
@@ -20466,7 +19456,7 @@
                 </a:solidFill>
                 <a:latin typeface="Pretendard"/>
               </a:rPr>
-              <a:t>→ 실시간 시뮬 실행 필수</a:t>
+              <a:t>비전문가 사용 가능성 = HPWD-GPT 차별점</a:t>
             </a:r>
           </a:p>
           <a:p>
@@ -20498,90 +19488,14 @@
                 </a:solidFill>
                 <a:latin typeface="Pretendard"/>
               </a:rPr>
-              <a:t>Tool-use = 텍스트 생성 + 외부 도구 직접 실행</a:t>
-            </a:r>
-          </a:p>
-        </p:txBody>
-      </p:sp>
-      <p:sp>
-        <p:nvSpPr>
-          <p:cNvPr id="19" name="Rounded Rectangle 18"/>
-          <p:cNvSpPr/>
-          <p:nvPr/>
-        </p:nvSpPr>
-        <p:spPr>
-          <a:xfrm>
-            <a:off x="6374739" y="5500116"/>
-            <a:ext cx="5240883" cy="580643"/>
-          </a:xfrm>
-          <a:prstGeom prst="roundRect">
-            <a:avLst>
-              <a:gd name="adj" fmla="val 8000"/>
-            </a:avLst>
-          </a:prstGeom>
-          <a:solidFill>
-            <a:srgbClr val="F8FAFC"/>
-          </a:solidFill>
-          <a:ln w="6350">
-            <a:solidFill>
-              <a:srgbClr val="CBD5E1"/>
-            </a:solidFill>
-          </a:ln>
-        </p:spPr>
-        <p:style>
-          <a:lnRef idx="1">
-            <a:schemeClr val="accent1"/>
-          </a:lnRef>
-          <a:fillRef idx="3">
-            <a:schemeClr val="accent1"/>
-          </a:fillRef>
-          <a:effectRef idx="2">
-            <a:schemeClr val="accent1"/>
-          </a:effectRef>
-          <a:fontRef idx="minor">
-            <a:schemeClr val="lt1"/>
-          </a:fontRef>
-        </p:style>
-        <p:txBody>
-          <a:bodyPr rtlCol="0" anchor="t" lIns="109728" rIns="109728" tIns="73152" bIns="73152" wrap="square"/>
-          <a:lstStyle/>
-          <a:p>
-            <a:pPr algn="l">
-              <a:lnSpc>
-                <a:spcPct val="120000"/>
-              </a:lnSpc>
-            </a:pPr>
-            <a:r>
-              <a:rPr sz="850" b="1">
-                <a:solidFill>
-                  <a:srgbClr val="D97706"/>
-                </a:solidFill>
-                <a:latin typeface="Consolas"/>
-              </a:rPr>
-              <a:t>Structured Output</a:t>
-            </a:r>
-          </a:p>
-          <a:p>
-            <a:pPr algn="l">
-              <a:lnSpc>
-                <a:spcPct val="130000"/>
-              </a:lnSpc>
-            </a:pPr>
-            <a:r>
-              <a:rPr sz="900">
-                <a:solidFill>
-                  <a:srgbClr val="475569"/>
-                </a:solidFill>
-                <a:latin typeface="Pretendard"/>
-              </a:rPr>
-              <a:t>자유 텍스트 → 고정 JSON. 누락 · 환각 방지. 예 — {conclusion, evidence, confidence}</a:t>
-            </a:r>
-          </a:p>
-        </p:txBody>
-      </p:sp>
-      <p:sp>
-        <p:nvSpPr>
-          <p:cNvPr id="20" name="TextBox 19"/>
+              <a:t>근거 인용 = 신뢰성 핵심 ("왜 이렇게 답했나" 추적)</a:t>
+            </a:r>
+          </a:p>
+        </p:txBody>
+      </p:sp>
+      <p:sp>
+        <p:nvSpPr>
+          <p:cNvPr id="18" name="TextBox 17"/>
           <p:cNvSpPr txBox="1"/>
           <p:nvPr/>
         </p:nvSpPr>
@@ -20613,7 +19527,7 @@
                 </a:solidFill>
                 <a:latin typeface="Consolas"/>
               </a:rPr>
-              <a:t>09 / 18</a:t>
+              <a:t>09 / 17</a:t>
             </a:r>
           </a:p>
         </p:txBody>

--- a/public/HPWD-GPT.pptx
+++ b/public/HPWD-GPT.pptx
@@ -3159,8 +3159,8 @@
         </p:nvSpPr>
         <p:spPr>
           <a:xfrm>
-            <a:off x="548640" y="1371600"/>
-            <a:ext cx="10972800" cy="2286000"/>
+            <a:off x="548640" y="1188720"/>
+            <a:ext cx="10972800" cy="2926080"/>
           </a:xfrm>
           <a:prstGeom prst="rect">
             <a:avLst/>
@@ -3175,7 +3175,7 @@
           <a:p>
             <a:pPr algn="l">
               <a:lnSpc>
-                <a:spcPct val="100000"/>
+                <a:spcPct val="105000"/>
               </a:lnSpc>
             </a:pPr>
             <a:r>
@@ -3185,7 +3185,23 @@
                 </a:solidFill>
                 <a:latin typeface="Pretendard"/>
               </a:rPr>
-              <a:t>HPWD-GPT</a:t>
+              <a:t>HPWD</a:t>
+            </a:r>
+          </a:p>
+          <a:p>
+            <a:pPr algn="l">
+              <a:lnSpc>
+                <a:spcPct val="105000"/>
+              </a:lnSpc>
+            </a:pPr>
+            <a:r>
+              <a:rPr sz="9600" b="1" i="0">
+                <a:solidFill>
+                  <a:srgbClr val="FFFFFF"/>
+                </a:solidFill>
+                <a:latin typeface="Pretendard"/>
+              </a:rPr>
+              <a:t>AI Agent</a:t>
             </a:r>
           </a:p>
         </p:txBody>
@@ -3198,8 +3214,8 @@
         </p:nvSpPr>
         <p:spPr>
           <a:xfrm>
-            <a:off x="548640" y="4023360"/>
-            <a:ext cx="10058400" cy="1371600"/>
+            <a:off x="548640" y="4297680"/>
+            <a:ext cx="10058400" cy="914400"/>
           </a:xfrm>
           <a:prstGeom prst="rect">
             <a:avLst/>
@@ -19456,7 +19472,7 @@
                 </a:solidFill>
                 <a:latin typeface="Pretendard"/>
               </a:rPr>
-              <a:t>비전문가 사용 가능성 = HPWD-GPT 차별점</a:t>
+              <a:t>비전문가 사용 가능성 = HPWD AI Agent 차별점</a:t>
             </a:r>
           </a:p>
           <a:p>
